--- a/Survoler.Tests/TestData/sample.pptx
+++ b/Survoler.Tests/TestData/sample.pptx
@@ -1,19 +1,4594 @@
 
 <file path=ppt/presentation.xml><?xml version="1.0" encoding="utf-8"?>
-<p:presentation xmlns:r="http://schemas.openxmlformats.org/officeDocument/2006/relationships" xmlns:p="http://schemas.openxmlformats.org/presentationml/2006/main">
+<p:presentation xmlns:a="http://schemas.openxmlformats.org/drawingml/2006/main" xmlns:r="http://schemas.openxmlformats.org/officeDocument/2006/relationships" xmlns:p="http://schemas.openxmlformats.org/presentationml/2006/main">
   <p:sldMasterIdLst>
-    <p:sldMasterId xmlns:r="http://schemas.openxmlformats.org/officeDocument/2006/relationships" id="2147483648" r:id="rId1"/>
+    <p:sldMasterId id="2147483648" r:id="rId1"/>
   </p:sldMasterIdLst>
+  <p:notesMasterIdLst>
+    <p:notesMasterId r:id="rId4"/>
+  </p:notesMasterIdLst>
   <p:sldIdLst>
-    <p:sldId id="256" r:id="R065a5460030642eb"/>
+    <p:sldId id="256" r:id="rId2"/>
+    <p:sldId id="257" r:id="rId3"/>
   </p:sldIdLst>
-  <p:sldSz cx="12192000" cy="6858000"/>
+  <p:sldSz cx="9144000" cy="6858000" type="screen4x3"/>
   <p:notesSz cx="6858000" cy="9144000"/>
+  <p:defaultTextStyle>
+    <a:defPPr>
+      <a:defRPr lang="zh-CN"/>
+    </a:defPPr>
+    <a:lvl1pPr marL="0" algn="l" defTabSz="914400" rtl="0" eaLnBrk="1" latinLnBrk="0" hangingPunct="1">
+      <a:defRPr sz="1800" kern="1200">
+        <a:solidFill>
+          <a:schemeClr val="tx1"/>
+        </a:solidFill>
+        <a:latin typeface="+mn-lt"/>
+        <a:ea typeface="+mn-ea"/>
+        <a:cs typeface="+mn-cs"/>
+      </a:defRPr>
+    </a:lvl1pPr>
+    <a:lvl2pPr marL="457200" algn="l" defTabSz="914400" rtl="0" eaLnBrk="1" latinLnBrk="0" hangingPunct="1">
+      <a:defRPr sz="1800" kern="1200">
+        <a:solidFill>
+          <a:schemeClr val="tx1"/>
+        </a:solidFill>
+        <a:latin typeface="+mn-lt"/>
+        <a:ea typeface="+mn-ea"/>
+        <a:cs typeface="+mn-cs"/>
+      </a:defRPr>
+    </a:lvl2pPr>
+    <a:lvl3pPr marL="914400" algn="l" defTabSz="914400" rtl="0" eaLnBrk="1" latinLnBrk="0" hangingPunct="1">
+      <a:defRPr sz="1800" kern="1200">
+        <a:solidFill>
+          <a:schemeClr val="tx1"/>
+        </a:solidFill>
+        <a:latin typeface="+mn-lt"/>
+        <a:ea typeface="+mn-ea"/>
+        <a:cs typeface="+mn-cs"/>
+      </a:defRPr>
+    </a:lvl3pPr>
+    <a:lvl4pPr marL="1371600" algn="l" defTabSz="914400" rtl="0" eaLnBrk="1" latinLnBrk="0" hangingPunct="1">
+      <a:defRPr sz="1800" kern="1200">
+        <a:solidFill>
+          <a:schemeClr val="tx1"/>
+        </a:solidFill>
+        <a:latin typeface="+mn-lt"/>
+        <a:ea typeface="+mn-ea"/>
+        <a:cs typeface="+mn-cs"/>
+      </a:defRPr>
+    </a:lvl4pPr>
+    <a:lvl5pPr marL="1828800" algn="l" defTabSz="914400" rtl="0" eaLnBrk="1" latinLnBrk="0" hangingPunct="1">
+      <a:defRPr sz="1800" kern="1200">
+        <a:solidFill>
+          <a:schemeClr val="tx1"/>
+        </a:solidFill>
+        <a:latin typeface="+mn-lt"/>
+        <a:ea typeface="+mn-ea"/>
+        <a:cs typeface="+mn-cs"/>
+      </a:defRPr>
+    </a:lvl5pPr>
+    <a:lvl6pPr marL="2286000" algn="l" defTabSz="914400" rtl="0" eaLnBrk="1" latinLnBrk="0" hangingPunct="1">
+      <a:defRPr sz="1800" kern="1200">
+        <a:solidFill>
+          <a:schemeClr val="tx1"/>
+        </a:solidFill>
+        <a:latin typeface="+mn-lt"/>
+        <a:ea typeface="+mn-ea"/>
+        <a:cs typeface="+mn-cs"/>
+      </a:defRPr>
+    </a:lvl6pPr>
+    <a:lvl7pPr marL="2743200" algn="l" defTabSz="914400" rtl="0" eaLnBrk="1" latinLnBrk="0" hangingPunct="1">
+      <a:defRPr sz="1800" kern="1200">
+        <a:solidFill>
+          <a:schemeClr val="tx1"/>
+        </a:solidFill>
+        <a:latin typeface="+mn-lt"/>
+        <a:ea typeface="+mn-ea"/>
+        <a:cs typeface="+mn-cs"/>
+      </a:defRPr>
+    </a:lvl7pPr>
+    <a:lvl8pPr marL="3200400" algn="l" defTabSz="914400" rtl="0" eaLnBrk="1" latinLnBrk="0" hangingPunct="1">
+      <a:defRPr sz="1800" kern="1200">
+        <a:solidFill>
+          <a:schemeClr val="tx1"/>
+        </a:solidFill>
+        <a:latin typeface="+mn-lt"/>
+        <a:ea typeface="+mn-ea"/>
+        <a:cs typeface="+mn-cs"/>
+      </a:defRPr>
+    </a:lvl8pPr>
+    <a:lvl9pPr marL="3657600" algn="l" defTabSz="914400" rtl="0" eaLnBrk="1" latinLnBrk="0" hangingPunct="1">
+      <a:defRPr sz="1800" kern="1200">
+        <a:solidFill>
+          <a:schemeClr val="tx1"/>
+        </a:solidFill>
+        <a:latin typeface="+mn-lt"/>
+        <a:ea typeface="+mn-ea"/>
+        <a:cs typeface="+mn-cs"/>
+      </a:defRPr>
+    </a:lvl9pPr>
+  </p:defaultTextStyle>
 </p:presentation>
 </file>
 
+<file path=ppt/diagrams/colors1.xml><?xml version="1.0" encoding="utf-8"?>
+<dgm:colorsDef xmlns:dgm="http://schemas.openxmlformats.org/drawingml/2006/diagram" xmlns:a="http://schemas.openxmlformats.org/drawingml/2006/main" uniqueId="urn:microsoft.com/office/officeart/2005/8/colors/accent1_2">
+  <dgm:title val=""/>
+  <dgm:desc val=""/>
+  <dgm:catLst>
+    <dgm:cat type="accent1" pri="11200"/>
+  </dgm:catLst>
+  <dgm:styleLbl name="node0">
+    <dgm:fillClrLst meth="repeat">
+      <a:schemeClr val="accent1"/>
+    </dgm:fillClrLst>
+    <dgm:linClrLst meth="repeat">
+      <a:schemeClr val="lt1"/>
+    </dgm:linClrLst>
+    <dgm:effectClrLst/>
+    <dgm:txLinClrLst/>
+    <dgm:txFillClrLst/>
+    <dgm:txEffectClrLst/>
+  </dgm:styleLbl>
+  <dgm:styleLbl name="node0NoLn">
+    <dgm:fillClrLst meth="repeat">
+      <a:schemeClr val="accent1"/>
+    </dgm:fillClrLst>
+    <dgm:linClrLst meth="repeat">
+      <a:schemeClr val="lt1">
+        <a:alpha val="0"/>
+      </a:schemeClr>
+    </dgm:linClrLst>
+    <dgm:effectClrLst/>
+    <dgm:txLinClrLst/>
+    <dgm:txFillClrLst/>
+    <dgm:txEffectClrLst/>
+  </dgm:styleLbl>
+  <dgm:styleLbl name="alignNode1">
+    <dgm:fillClrLst meth="repeat">
+      <a:schemeClr val="accent1"/>
+    </dgm:fillClrLst>
+    <dgm:linClrLst meth="repeat">
+      <a:schemeClr val="accent1"/>
+    </dgm:linClrLst>
+    <dgm:effectClrLst/>
+    <dgm:txLinClrLst/>
+    <dgm:txFillClrLst/>
+    <dgm:txEffectClrLst/>
+  </dgm:styleLbl>
+  <dgm:styleLbl name="node1">
+    <dgm:fillClrLst meth="repeat">
+      <a:schemeClr val="accent1"/>
+    </dgm:fillClrLst>
+    <dgm:linClrLst meth="repeat">
+      <a:schemeClr val="lt1"/>
+    </dgm:linClrLst>
+    <dgm:effectClrLst/>
+    <dgm:txLinClrLst/>
+    <dgm:txFillClrLst/>
+    <dgm:txEffectClrLst/>
+  </dgm:styleLbl>
+  <dgm:styleLbl name="node1NoLn">
+    <dgm:fillClrLst meth="repeat">
+      <a:schemeClr val="accent1"/>
+    </dgm:fillClrLst>
+    <dgm:linClrLst meth="repeat">
+      <a:schemeClr val="lt1">
+        <a:alpha val="0"/>
+      </a:schemeClr>
+    </dgm:linClrLst>
+    <dgm:effectClrLst/>
+    <dgm:txLinClrLst/>
+    <dgm:txFillClrLst/>
+    <dgm:txEffectClrLst/>
+  </dgm:styleLbl>
+  <dgm:styleLbl name="ltNode1NoLn">
+    <dgm:fillClrLst meth="repeat">
+      <a:schemeClr val="accent1">
+        <a:tint val="75000"/>
+      </a:schemeClr>
+    </dgm:fillClrLst>
+    <dgm:linClrLst meth="repeat">
+      <a:schemeClr val="lt1">
+        <a:alpha val="0"/>
+      </a:schemeClr>
+    </dgm:linClrLst>
+    <dgm:effectClrLst/>
+    <dgm:txLinClrLst/>
+    <dgm:txFillClrLst meth="repeat">
+      <a:schemeClr val="dk1"/>
+    </dgm:txFillClrLst>
+    <dgm:txEffectClrLst/>
+  </dgm:styleLbl>
+  <dgm:styleLbl name="lnNode1">
+    <dgm:fillClrLst meth="repeat">
+      <a:schemeClr val="accent1"/>
+    </dgm:fillClrLst>
+    <dgm:linClrLst meth="repeat">
+      <a:schemeClr val="lt1"/>
+    </dgm:linClrLst>
+    <dgm:effectClrLst/>
+    <dgm:txLinClrLst/>
+    <dgm:txFillClrLst/>
+    <dgm:txEffectClrLst/>
+  </dgm:styleLbl>
+  <dgm:styleLbl name="vennNode1">
+    <dgm:fillClrLst meth="repeat">
+      <a:schemeClr val="accent1">
+        <a:alpha val="50000"/>
+      </a:schemeClr>
+    </dgm:fillClrLst>
+    <dgm:linClrLst meth="repeat">
+      <a:schemeClr val="lt1"/>
+    </dgm:linClrLst>
+    <dgm:effectClrLst/>
+    <dgm:txLinClrLst/>
+    <dgm:txFillClrLst/>
+    <dgm:txEffectClrLst/>
+  </dgm:styleLbl>
+  <dgm:styleLbl name="node2">
+    <dgm:fillClrLst meth="repeat">
+      <a:schemeClr val="accent1"/>
+    </dgm:fillClrLst>
+    <dgm:linClrLst meth="repeat">
+      <a:schemeClr val="lt1"/>
+    </dgm:linClrLst>
+    <dgm:effectClrLst/>
+    <dgm:txLinClrLst/>
+    <dgm:txFillClrLst/>
+    <dgm:txEffectClrLst/>
+  </dgm:styleLbl>
+  <dgm:styleLbl name="node2NoLn">
+    <dgm:fillClrLst meth="repeat">
+      <a:schemeClr val="accent1"/>
+    </dgm:fillClrLst>
+    <dgm:linClrLst meth="repeat">
+      <a:schemeClr val="lt1">
+        <a:alpha val="0"/>
+      </a:schemeClr>
+    </dgm:linClrLst>
+    <dgm:effectClrLst/>
+    <dgm:txLinClrLst/>
+    <dgm:txFillClrLst/>
+    <dgm:txEffectClrLst/>
+  </dgm:styleLbl>
+  <dgm:styleLbl name="node3">
+    <dgm:fillClrLst meth="repeat">
+      <a:schemeClr val="accent1"/>
+    </dgm:fillClrLst>
+    <dgm:linClrLst meth="repeat">
+      <a:schemeClr val="lt1"/>
+    </dgm:linClrLst>
+    <dgm:effectClrLst/>
+    <dgm:txLinClrLst/>
+    <dgm:txFillClrLst/>
+    <dgm:txEffectClrLst/>
+  </dgm:styleLbl>
+  <dgm:styleLbl name="node3NoLn">
+    <dgm:fillClrLst meth="repeat">
+      <a:schemeClr val="accent1"/>
+    </dgm:fillClrLst>
+    <dgm:linClrLst meth="repeat">
+      <a:schemeClr val="lt1">
+        <a:alpha val="0"/>
+      </a:schemeClr>
+    </dgm:linClrLst>
+    <dgm:effectClrLst/>
+    <dgm:txLinClrLst/>
+    <dgm:txFillClrLst/>
+    <dgm:txEffectClrLst/>
+  </dgm:styleLbl>
+  <dgm:styleLbl name="node4">
+    <dgm:fillClrLst meth="repeat">
+      <a:schemeClr val="accent1"/>
+    </dgm:fillClrLst>
+    <dgm:linClrLst meth="repeat">
+      <a:schemeClr val="lt1"/>
+    </dgm:linClrLst>
+    <dgm:effectClrLst/>
+    <dgm:txLinClrLst/>
+    <dgm:txFillClrLst/>
+    <dgm:txEffectClrLst/>
+  </dgm:styleLbl>
+  <dgm:styleLbl name="node4NoLn">
+    <dgm:fillClrLst meth="repeat">
+      <a:schemeClr val="accent1"/>
+    </dgm:fillClrLst>
+    <dgm:linClrLst meth="repeat">
+      <a:schemeClr val="lt1">
+        <a:alpha val="0"/>
+      </a:schemeClr>
+    </dgm:linClrLst>
+    <dgm:effectClrLst/>
+    <dgm:txLinClrLst/>
+    <dgm:txFillClrLst/>
+    <dgm:txEffectClrLst/>
+  </dgm:styleLbl>
+  <dgm:styleLbl name="fgImgPlace1">
+    <dgm:fillClrLst meth="repeat">
+      <a:schemeClr val="accent1">
+        <a:tint val="50000"/>
+      </a:schemeClr>
+    </dgm:fillClrLst>
+    <dgm:linClrLst meth="repeat">
+      <a:schemeClr val="lt1"/>
+    </dgm:linClrLst>
+    <dgm:effectClrLst/>
+    <dgm:txLinClrLst/>
+    <dgm:txFillClrLst meth="repeat">
+      <a:schemeClr val="lt1"/>
+    </dgm:txFillClrLst>
+    <dgm:txEffectClrLst/>
+  </dgm:styleLbl>
+  <dgm:styleLbl name="alignImgPlace1">
+    <dgm:fillClrLst meth="repeat">
+      <a:schemeClr val="accent1">
+        <a:tint val="50000"/>
+      </a:schemeClr>
+    </dgm:fillClrLst>
+    <dgm:linClrLst meth="repeat">
+      <a:schemeClr val="lt1"/>
+    </dgm:linClrLst>
+    <dgm:effectClrLst/>
+    <dgm:txLinClrLst/>
+    <dgm:txFillClrLst meth="repeat">
+      <a:schemeClr val="lt1"/>
+    </dgm:txFillClrLst>
+    <dgm:txEffectClrLst/>
+  </dgm:styleLbl>
+  <dgm:styleLbl name="bgImgPlace1">
+    <dgm:fillClrLst meth="repeat">
+      <a:schemeClr val="accent1">
+        <a:tint val="50000"/>
+      </a:schemeClr>
+    </dgm:fillClrLst>
+    <dgm:linClrLst meth="repeat">
+      <a:schemeClr val="lt1"/>
+    </dgm:linClrLst>
+    <dgm:effectClrLst/>
+    <dgm:txLinClrLst/>
+    <dgm:txFillClrLst meth="repeat">
+      <a:schemeClr val="lt1"/>
+    </dgm:txFillClrLst>
+    <dgm:txEffectClrLst/>
+  </dgm:styleLbl>
+  <dgm:styleLbl name="sibTrans2D1">
+    <dgm:fillClrLst meth="repeat">
+      <a:schemeClr val="accent1">
+        <a:tint val="60000"/>
+      </a:schemeClr>
+    </dgm:fillClrLst>
+    <dgm:linClrLst meth="repeat">
+      <a:schemeClr val="accent1">
+        <a:tint val="60000"/>
+      </a:schemeClr>
+    </dgm:linClrLst>
+    <dgm:effectClrLst/>
+    <dgm:txLinClrLst/>
+    <dgm:txFillClrLst/>
+    <dgm:txEffectClrLst/>
+  </dgm:styleLbl>
+  <dgm:styleLbl name="fgSibTrans2D1">
+    <dgm:fillClrLst meth="repeat">
+      <a:schemeClr val="accent1">
+        <a:tint val="60000"/>
+      </a:schemeClr>
+    </dgm:fillClrLst>
+    <dgm:linClrLst meth="repeat">
+      <a:schemeClr val="accent1">
+        <a:tint val="60000"/>
+      </a:schemeClr>
+    </dgm:linClrLst>
+    <dgm:effectClrLst/>
+    <dgm:txLinClrLst/>
+    <dgm:txFillClrLst/>
+    <dgm:txEffectClrLst/>
+  </dgm:styleLbl>
+  <dgm:styleLbl name="bgSibTrans2D1">
+    <dgm:fillClrLst meth="repeat">
+      <a:schemeClr val="accent1">
+        <a:tint val="60000"/>
+      </a:schemeClr>
+    </dgm:fillClrLst>
+    <dgm:linClrLst meth="repeat">
+      <a:schemeClr val="accent1">
+        <a:tint val="60000"/>
+      </a:schemeClr>
+    </dgm:linClrLst>
+    <dgm:effectClrLst/>
+    <dgm:txLinClrLst/>
+    <dgm:txFillClrLst/>
+    <dgm:txEffectClrLst/>
+  </dgm:styleLbl>
+  <dgm:styleLbl name="sibTrans1D1">
+    <dgm:fillClrLst meth="repeat">
+      <a:schemeClr val="accent1"/>
+    </dgm:fillClrLst>
+    <dgm:linClrLst meth="repeat">
+      <a:schemeClr val="accent1"/>
+    </dgm:linClrLst>
+    <dgm:effectClrLst/>
+    <dgm:txLinClrLst/>
+    <dgm:txFillClrLst meth="repeat">
+      <a:schemeClr val="tx1"/>
+    </dgm:txFillClrLst>
+    <dgm:txEffectClrLst/>
+  </dgm:styleLbl>
+  <dgm:styleLbl name="callout">
+    <dgm:fillClrLst meth="repeat">
+      <a:schemeClr val="accent1"/>
+    </dgm:fillClrLst>
+    <dgm:linClrLst meth="repeat">
+      <a:schemeClr val="accent1">
+        <a:tint val="50000"/>
+      </a:schemeClr>
+    </dgm:linClrLst>
+    <dgm:effectClrLst/>
+    <dgm:txLinClrLst/>
+    <dgm:txFillClrLst meth="repeat">
+      <a:schemeClr val="tx1"/>
+    </dgm:txFillClrLst>
+    <dgm:txEffectClrLst/>
+  </dgm:styleLbl>
+  <dgm:styleLbl name="asst0">
+    <dgm:fillClrLst meth="repeat">
+      <a:schemeClr val="accent1"/>
+    </dgm:fillClrLst>
+    <dgm:linClrLst meth="repeat">
+      <a:schemeClr val="lt1"/>
+    </dgm:linClrLst>
+    <dgm:effectClrLst/>
+    <dgm:txLinClrLst/>
+    <dgm:txFillClrLst/>
+    <dgm:txEffectClrLst/>
+  </dgm:styleLbl>
+  <dgm:styleLbl name="asst1">
+    <dgm:fillClrLst meth="repeat">
+      <a:schemeClr val="accent1"/>
+    </dgm:fillClrLst>
+    <dgm:linClrLst meth="repeat">
+      <a:schemeClr val="lt1"/>
+    </dgm:linClrLst>
+    <dgm:effectClrLst/>
+    <dgm:txLinClrLst/>
+    <dgm:txFillClrLst/>
+    <dgm:txEffectClrLst/>
+  </dgm:styleLbl>
+  <dgm:styleLbl name="asst2">
+    <dgm:fillClrLst meth="repeat">
+      <a:schemeClr val="accent1"/>
+    </dgm:fillClrLst>
+    <dgm:linClrLst meth="repeat">
+      <a:schemeClr val="lt1"/>
+    </dgm:linClrLst>
+    <dgm:effectClrLst/>
+    <dgm:txLinClrLst/>
+    <dgm:txFillClrLst/>
+    <dgm:txEffectClrLst/>
+  </dgm:styleLbl>
+  <dgm:styleLbl name="asst3">
+    <dgm:fillClrLst meth="repeat">
+      <a:schemeClr val="accent1"/>
+    </dgm:fillClrLst>
+    <dgm:linClrLst meth="repeat">
+      <a:schemeClr val="lt1"/>
+    </dgm:linClrLst>
+    <dgm:effectClrLst/>
+    <dgm:txLinClrLst/>
+    <dgm:txFillClrLst/>
+    <dgm:txEffectClrLst/>
+  </dgm:styleLbl>
+  <dgm:styleLbl name="asst4">
+    <dgm:fillClrLst meth="repeat">
+      <a:schemeClr val="accent1"/>
+    </dgm:fillClrLst>
+    <dgm:linClrLst meth="repeat">
+      <a:schemeClr val="lt1"/>
+    </dgm:linClrLst>
+    <dgm:effectClrLst/>
+    <dgm:txLinClrLst/>
+    <dgm:txFillClrLst/>
+    <dgm:txEffectClrLst/>
+  </dgm:styleLbl>
+  <dgm:styleLbl name="parChTrans2D1">
+    <dgm:fillClrLst meth="repeat">
+      <a:schemeClr val="accent1">
+        <a:tint val="60000"/>
+      </a:schemeClr>
+    </dgm:fillClrLst>
+    <dgm:linClrLst meth="repeat">
+      <a:schemeClr val="accent1">
+        <a:tint val="60000"/>
+      </a:schemeClr>
+    </dgm:linClrLst>
+    <dgm:effectClrLst/>
+    <dgm:txLinClrLst/>
+    <dgm:txFillClrLst meth="repeat">
+      <a:schemeClr val="lt1"/>
+    </dgm:txFillClrLst>
+    <dgm:txEffectClrLst/>
+  </dgm:styleLbl>
+  <dgm:styleLbl name="parChTrans2D2">
+    <dgm:fillClrLst meth="repeat">
+      <a:schemeClr val="accent1"/>
+    </dgm:fillClrLst>
+    <dgm:linClrLst meth="repeat">
+      <a:schemeClr val="accent1"/>
+    </dgm:linClrLst>
+    <dgm:effectClrLst/>
+    <dgm:txLinClrLst/>
+    <dgm:txFillClrLst meth="repeat">
+      <a:schemeClr val="lt1"/>
+    </dgm:txFillClrLst>
+    <dgm:txEffectClrLst/>
+  </dgm:styleLbl>
+  <dgm:styleLbl name="parChTrans2D3">
+    <dgm:fillClrLst meth="repeat">
+      <a:schemeClr val="accent1"/>
+    </dgm:fillClrLst>
+    <dgm:linClrLst meth="repeat">
+      <a:schemeClr val="accent1"/>
+    </dgm:linClrLst>
+    <dgm:effectClrLst/>
+    <dgm:txLinClrLst/>
+    <dgm:txFillClrLst meth="repeat">
+      <a:schemeClr val="lt1"/>
+    </dgm:txFillClrLst>
+    <dgm:txEffectClrLst/>
+  </dgm:styleLbl>
+  <dgm:styleLbl name="parChTrans2D4">
+    <dgm:fillClrLst meth="repeat">
+      <a:schemeClr val="accent1"/>
+    </dgm:fillClrLst>
+    <dgm:linClrLst meth="repeat">
+      <a:schemeClr val="accent1"/>
+    </dgm:linClrLst>
+    <dgm:effectClrLst/>
+    <dgm:txLinClrLst/>
+    <dgm:txFillClrLst meth="repeat">
+      <a:schemeClr val="lt1"/>
+    </dgm:txFillClrLst>
+    <dgm:txEffectClrLst/>
+  </dgm:styleLbl>
+  <dgm:styleLbl name="parChTrans1D1">
+    <dgm:fillClrLst meth="repeat">
+      <a:schemeClr val="accent1"/>
+    </dgm:fillClrLst>
+    <dgm:linClrLst meth="repeat">
+      <a:schemeClr val="accent1">
+        <a:shade val="60000"/>
+      </a:schemeClr>
+    </dgm:linClrLst>
+    <dgm:effectClrLst/>
+    <dgm:txLinClrLst/>
+    <dgm:txFillClrLst meth="repeat">
+      <a:schemeClr val="tx1"/>
+    </dgm:txFillClrLst>
+    <dgm:txEffectClrLst/>
+  </dgm:styleLbl>
+  <dgm:styleLbl name="parChTrans1D2">
+    <dgm:fillClrLst meth="repeat">
+      <a:schemeClr val="accent1"/>
+    </dgm:fillClrLst>
+    <dgm:linClrLst meth="repeat">
+      <a:schemeClr val="accent1">
+        <a:shade val="60000"/>
+      </a:schemeClr>
+    </dgm:linClrLst>
+    <dgm:effectClrLst/>
+    <dgm:txLinClrLst/>
+    <dgm:txFillClrLst meth="repeat">
+      <a:schemeClr val="tx1"/>
+    </dgm:txFillClrLst>
+    <dgm:txEffectClrLst/>
+  </dgm:styleLbl>
+  <dgm:styleLbl name="parChTrans1D3">
+    <dgm:fillClrLst meth="repeat">
+      <a:schemeClr val="accent1"/>
+    </dgm:fillClrLst>
+    <dgm:linClrLst meth="repeat">
+      <a:schemeClr val="accent1">
+        <a:shade val="80000"/>
+      </a:schemeClr>
+    </dgm:linClrLst>
+    <dgm:effectClrLst/>
+    <dgm:txLinClrLst/>
+    <dgm:txFillClrLst meth="repeat">
+      <a:schemeClr val="tx1"/>
+    </dgm:txFillClrLst>
+    <dgm:txEffectClrLst/>
+  </dgm:styleLbl>
+  <dgm:styleLbl name="parChTrans1D4">
+    <dgm:fillClrLst meth="repeat">
+      <a:schemeClr val="accent1"/>
+    </dgm:fillClrLst>
+    <dgm:linClrLst meth="repeat">
+      <a:schemeClr val="accent1">
+        <a:shade val="80000"/>
+      </a:schemeClr>
+    </dgm:linClrLst>
+    <dgm:effectClrLst/>
+    <dgm:txLinClrLst/>
+    <dgm:txFillClrLst meth="repeat">
+      <a:schemeClr val="tx1"/>
+    </dgm:txFillClrLst>
+    <dgm:txEffectClrLst/>
+  </dgm:styleLbl>
+  <dgm:styleLbl name="fgAcc1">
+    <dgm:fillClrLst meth="repeat">
+      <a:schemeClr val="lt1">
+        <a:alpha val="90000"/>
+      </a:schemeClr>
+    </dgm:fillClrLst>
+    <dgm:linClrLst meth="repeat">
+      <a:schemeClr val="accent1"/>
+    </dgm:linClrLst>
+    <dgm:effectClrLst/>
+    <dgm:txLinClrLst/>
+    <dgm:txFillClrLst meth="repeat">
+      <a:schemeClr val="dk1"/>
+    </dgm:txFillClrLst>
+    <dgm:txEffectClrLst/>
+  </dgm:styleLbl>
+  <dgm:styleLbl name="conFgAcc1">
+    <dgm:fillClrLst meth="repeat">
+      <a:schemeClr val="lt1">
+        <a:alpha val="90000"/>
+      </a:schemeClr>
+    </dgm:fillClrLst>
+    <dgm:linClrLst meth="repeat">
+      <a:schemeClr val="accent1"/>
+    </dgm:linClrLst>
+    <dgm:effectClrLst/>
+    <dgm:txLinClrLst/>
+    <dgm:txFillClrLst meth="repeat">
+      <a:schemeClr val="dk1"/>
+    </dgm:txFillClrLst>
+    <dgm:txEffectClrLst/>
+  </dgm:styleLbl>
+  <dgm:styleLbl name="alignAcc1">
+    <dgm:fillClrLst meth="repeat">
+      <a:schemeClr val="lt1">
+        <a:alpha val="90000"/>
+      </a:schemeClr>
+    </dgm:fillClrLst>
+    <dgm:linClrLst meth="repeat">
+      <a:schemeClr val="accent1"/>
+    </dgm:linClrLst>
+    <dgm:effectClrLst/>
+    <dgm:txLinClrLst/>
+    <dgm:txFillClrLst meth="repeat">
+      <a:schemeClr val="dk1"/>
+    </dgm:txFillClrLst>
+    <dgm:txEffectClrLst/>
+  </dgm:styleLbl>
+  <dgm:styleLbl name="trAlignAcc1">
+    <dgm:fillClrLst meth="repeat">
+      <a:schemeClr val="lt1">
+        <a:alpha val="40000"/>
+      </a:schemeClr>
+    </dgm:fillClrLst>
+    <dgm:linClrLst meth="repeat">
+      <a:schemeClr val="accent1"/>
+    </dgm:linClrLst>
+    <dgm:effectClrLst/>
+    <dgm:txLinClrLst/>
+    <dgm:txFillClrLst meth="repeat">
+      <a:schemeClr val="dk1"/>
+    </dgm:txFillClrLst>
+    <dgm:txEffectClrLst/>
+  </dgm:styleLbl>
+  <dgm:styleLbl name="bgAcc1">
+    <dgm:fillClrLst meth="repeat">
+      <a:schemeClr val="lt1">
+        <a:alpha val="90000"/>
+      </a:schemeClr>
+    </dgm:fillClrLst>
+    <dgm:linClrLst meth="repeat">
+      <a:schemeClr val="accent1"/>
+    </dgm:linClrLst>
+    <dgm:effectClrLst/>
+    <dgm:txLinClrLst/>
+    <dgm:txFillClrLst meth="repeat">
+      <a:schemeClr val="dk1"/>
+    </dgm:txFillClrLst>
+    <dgm:txEffectClrLst/>
+  </dgm:styleLbl>
+  <dgm:styleLbl name="solidFgAcc1">
+    <dgm:fillClrLst meth="repeat">
+      <a:schemeClr val="lt1"/>
+    </dgm:fillClrLst>
+    <dgm:linClrLst meth="repeat">
+      <a:schemeClr val="accent1"/>
+    </dgm:linClrLst>
+    <dgm:effectClrLst/>
+    <dgm:txLinClrLst/>
+    <dgm:txFillClrLst meth="repeat">
+      <a:schemeClr val="dk1"/>
+    </dgm:txFillClrLst>
+    <dgm:txEffectClrLst/>
+  </dgm:styleLbl>
+  <dgm:styleLbl name="solidAlignAcc1">
+    <dgm:fillClrLst meth="repeat">
+      <a:schemeClr val="lt1"/>
+    </dgm:fillClrLst>
+    <dgm:linClrLst meth="repeat">
+      <a:schemeClr val="accent1"/>
+    </dgm:linClrLst>
+    <dgm:effectClrLst/>
+    <dgm:txLinClrLst/>
+    <dgm:txFillClrLst meth="repeat">
+      <a:schemeClr val="dk1"/>
+    </dgm:txFillClrLst>
+    <dgm:txEffectClrLst/>
+  </dgm:styleLbl>
+  <dgm:styleLbl name="solidBgAcc1">
+    <dgm:fillClrLst meth="repeat">
+      <a:schemeClr val="lt1"/>
+    </dgm:fillClrLst>
+    <dgm:linClrLst meth="repeat">
+      <a:schemeClr val="accent1"/>
+    </dgm:linClrLst>
+    <dgm:effectClrLst/>
+    <dgm:txLinClrLst/>
+    <dgm:txFillClrLst meth="repeat">
+      <a:schemeClr val="dk1"/>
+    </dgm:txFillClrLst>
+    <dgm:txEffectClrLst/>
+  </dgm:styleLbl>
+  <dgm:styleLbl name="fgAccFollowNode1">
+    <dgm:fillClrLst meth="repeat">
+      <a:schemeClr val="accent1">
+        <a:alpha val="90000"/>
+        <a:tint val="40000"/>
+      </a:schemeClr>
+    </dgm:fillClrLst>
+    <dgm:linClrLst meth="repeat">
+      <a:schemeClr val="accent1">
+        <a:alpha val="90000"/>
+        <a:tint val="40000"/>
+      </a:schemeClr>
+    </dgm:linClrLst>
+    <dgm:effectClrLst/>
+    <dgm:txLinClrLst/>
+    <dgm:txFillClrLst meth="repeat">
+      <a:schemeClr val="dk1"/>
+    </dgm:txFillClrLst>
+    <dgm:txEffectClrLst/>
+  </dgm:styleLbl>
+  <dgm:styleLbl name="alignAccFollowNode1">
+    <dgm:fillClrLst meth="repeat">
+      <a:schemeClr val="accent1">
+        <a:alpha val="90000"/>
+        <a:tint val="40000"/>
+      </a:schemeClr>
+    </dgm:fillClrLst>
+    <dgm:linClrLst meth="repeat">
+      <a:schemeClr val="accent1">
+        <a:alpha val="90000"/>
+        <a:tint val="40000"/>
+      </a:schemeClr>
+    </dgm:linClrLst>
+    <dgm:effectClrLst/>
+    <dgm:txLinClrLst/>
+    <dgm:txFillClrLst meth="repeat">
+      <a:schemeClr val="dk1"/>
+    </dgm:txFillClrLst>
+    <dgm:txEffectClrLst/>
+  </dgm:styleLbl>
+  <dgm:styleLbl name="bgAccFollowNode1">
+    <dgm:fillClrLst meth="repeat">
+      <a:schemeClr val="accent1">
+        <a:alpha val="90000"/>
+        <a:tint val="40000"/>
+      </a:schemeClr>
+    </dgm:fillClrLst>
+    <dgm:linClrLst meth="repeat">
+      <a:schemeClr val="accent1">
+        <a:alpha val="90000"/>
+        <a:tint val="40000"/>
+      </a:schemeClr>
+    </dgm:linClrLst>
+    <dgm:effectClrLst/>
+    <dgm:txLinClrLst/>
+    <dgm:txFillClrLst meth="repeat">
+      <a:schemeClr val="dk1"/>
+    </dgm:txFillClrLst>
+    <dgm:txEffectClrLst/>
+  </dgm:styleLbl>
+  <dgm:styleLbl name="fgAcc0">
+    <dgm:fillClrLst meth="repeat">
+      <a:schemeClr val="lt1">
+        <a:alpha val="90000"/>
+      </a:schemeClr>
+    </dgm:fillClrLst>
+    <dgm:linClrLst meth="repeat">
+      <a:schemeClr val="accent1"/>
+    </dgm:linClrLst>
+    <dgm:effectClrLst/>
+    <dgm:txLinClrLst/>
+    <dgm:txFillClrLst meth="repeat">
+      <a:schemeClr val="dk1"/>
+    </dgm:txFillClrLst>
+    <dgm:txEffectClrLst/>
+  </dgm:styleLbl>
+  <dgm:styleLbl name="fgAcc2">
+    <dgm:fillClrLst meth="repeat">
+      <a:schemeClr val="lt1">
+        <a:alpha val="90000"/>
+      </a:schemeClr>
+    </dgm:fillClrLst>
+    <dgm:linClrLst meth="repeat">
+      <a:schemeClr val="accent1"/>
+    </dgm:linClrLst>
+    <dgm:effectClrLst/>
+    <dgm:txLinClrLst/>
+    <dgm:txFillClrLst meth="repeat">
+      <a:schemeClr val="dk1"/>
+    </dgm:txFillClrLst>
+    <dgm:txEffectClrLst/>
+  </dgm:styleLbl>
+  <dgm:styleLbl name="fgAcc3">
+    <dgm:fillClrLst meth="repeat">
+      <a:schemeClr val="lt1">
+        <a:alpha val="90000"/>
+      </a:schemeClr>
+    </dgm:fillClrLst>
+    <dgm:linClrLst meth="repeat">
+      <a:schemeClr val="accent1"/>
+    </dgm:linClrLst>
+    <dgm:effectClrLst/>
+    <dgm:txLinClrLst/>
+    <dgm:txFillClrLst meth="repeat">
+      <a:schemeClr val="dk1"/>
+    </dgm:txFillClrLst>
+    <dgm:txEffectClrLst/>
+  </dgm:styleLbl>
+  <dgm:styleLbl name="fgAcc4">
+    <dgm:fillClrLst meth="repeat">
+      <a:schemeClr val="lt1">
+        <a:alpha val="90000"/>
+      </a:schemeClr>
+    </dgm:fillClrLst>
+    <dgm:linClrLst meth="repeat">
+      <a:schemeClr val="accent1"/>
+    </dgm:linClrLst>
+    <dgm:effectClrLst/>
+    <dgm:txLinClrLst/>
+    <dgm:txFillClrLst meth="repeat">
+      <a:schemeClr val="dk1"/>
+    </dgm:txFillClrLst>
+    <dgm:txEffectClrLst/>
+  </dgm:styleLbl>
+  <dgm:styleLbl name="bgShp">
+    <dgm:fillClrLst meth="repeat">
+      <a:schemeClr val="accent1">
+        <a:tint val="40000"/>
+      </a:schemeClr>
+    </dgm:fillClrLst>
+    <dgm:linClrLst meth="repeat">
+      <a:schemeClr val="accent1"/>
+    </dgm:linClrLst>
+    <dgm:effectClrLst/>
+    <dgm:txLinClrLst/>
+    <dgm:txFillClrLst meth="repeat">
+      <a:schemeClr val="dk1"/>
+    </dgm:txFillClrLst>
+    <dgm:txEffectClrLst/>
+  </dgm:styleLbl>
+  <dgm:styleLbl name="dkBgShp">
+    <dgm:fillClrLst meth="repeat">
+      <a:schemeClr val="accent1">
+        <a:shade val="80000"/>
+      </a:schemeClr>
+    </dgm:fillClrLst>
+    <dgm:linClrLst meth="repeat">
+      <a:schemeClr val="accent1"/>
+    </dgm:linClrLst>
+    <dgm:effectClrLst/>
+    <dgm:txLinClrLst/>
+    <dgm:txFillClrLst meth="repeat">
+      <a:schemeClr val="lt1"/>
+    </dgm:txFillClrLst>
+    <dgm:txEffectClrLst/>
+  </dgm:styleLbl>
+  <dgm:styleLbl name="trBgShp">
+    <dgm:fillClrLst meth="repeat">
+      <a:schemeClr val="accent1">
+        <a:tint val="50000"/>
+        <a:alpha val="40000"/>
+      </a:schemeClr>
+    </dgm:fillClrLst>
+    <dgm:linClrLst meth="repeat">
+      <a:schemeClr val="accent1"/>
+    </dgm:linClrLst>
+    <dgm:effectClrLst/>
+    <dgm:txLinClrLst/>
+    <dgm:txFillClrLst meth="repeat">
+      <a:schemeClr val="lt1"/>
+    </dgm:txFillClrLst>
+    <dgm:txEffectClrLst/>
+  </dgm:styleLbl>
+  <dgm:styleLbl name="fgShp">
+    <dgm:fillClrLst meth="repeat">
+      <a:schemeClr val="accent1">
+        <a:tint val="60000"/>
+      </a:schemeClr>
+    </dgm:fillClrLst>
+    <dgm:linClrLst meth="repeat">
+      <a:schemeClr val="lt1"/>
+    </dgm:linClrLst>
+    <dgm:effectClrLst/>
+    <dgm:txLinClrLst/>
+    <dgm:txFillClrLst meth="repeat">
+      <a:schemeClr val="dk1"/>
+    </dgm:txFillClrLst>
+    <dgm:txEffectClrLst/>
+  </dgm:styleLbl>
+  <dgm:styleLbl name="revTx">
+    <dgm:fillClrLst meth="repeat">
+      <a:schemeClr val="lt1">
+        <a:alpha val="0"/>
+      </a:schemeClr>
+    </dgm:fillClrLst>
+    <dgm:linClrLst meth="repeat">
+      <a:schemeClr val="dk1">
+        <a:alpha val="0"/>
+      </a:schemeClr>
+    </dgm:linClrLst>
+    <dgm:effectClrLst/>
+    <dgm:txLinClrLst/>
+    <dgm:txFillClrLst meth="repeat">
+      <a:schemeClr val="tx1"/>
+    </dgm:txFillClrLst>
+    <dgm:txEffectClrLst/>
+  </dgm:styleLbl>
+  <dgm:styleLbl name="revTxLt">
+    <dgm:fillClrLst meth="repeat">
+      <a:schemeClr val="lt1">
+        <a:alpha val="0"/>
+      </a:schemeClr>
+    </dgm:fillClrLst>
+    <dgm:linClrLst meth="repeat">
+      <a:schemeClr val="dk1">
+        <a:alpha val="0"/>
+      </a:schemeClr>
+    </dgm:linClrLst>
+    <dgm:effectClrLst/>
+    <dgm:txLinClrLst/>
+    <dgm:txFillClrLst/>
+    <dgm:txEffectClrLst/>
+  </dgm:styleLbl>
+</dgm:colorsDef>
+</file>
+
+<file path=ppt/diagrams/data1.xml><?xml version="1.0" encoding="utf-8"?>
+<dgm:dataModel xmlns:dgm="http://schemas.openxmlformats.org/drawingml/2006/diagram" xmlns:a="http://schemas.openxmlformats.org/drawingml/2006/main">
+  <dgm:ptLst>
+    <dgm:pt modelId="{6E99C52D-ACC9-4644-BFAA-96A58201F41D}" type="doc">
+      <dgm:prSet loTypeId="urn:microsoft.com/office/officeart/2024/layout/MeetTheTeamCardVertical" loCatId="meettheteam" qsTypeId="urn:microsoft.com/office/officeart/2005/8/quickstyle/3d2" qsCatId="3D" csTypeId="urn:microsoft.com/office/officeart/2005/8/colors/accent1_2" csCatId="accent1" phldr="1"/>
+      <dgm:spPr/>
+      <dgm:t>
+        <a:bodyPr/>
+        <a:lstStyle/>
+        <a:p>
+          <a:endParaRPr lang="zh-CN" altLang="en-US"/>
+        </a:p>
+      </dgm:t>
+    </dgm:pt>
+    <dgm:pt modelId="{A60FE6FE-471B-429F-A808-29225B208470}">
+      <dgm:prSet phldrT="Name" phldr="1"/>
+      <dgm:spPr/>
+      <dgm:t>
+        <a:bodyPr/>
+        <a:lstStyle/>
+        <a:p>
+          <a:pPr>
+            <a:defRPr b="1"/>
+          </a:pPr>
+          <a:endParaRPr lang="zh-CN" altLang="en-US"/>
+        </a:p>
+      </dgm:t>
+    </dgm:pt>
+    <dgm:pt modelId="{BCF563AE-95D1-4A90-BC48-838C90165D36}" type="parTrans" cxnId="{F7945686-09E5-4B94-8C9E-B9C9270753B2}">
+      <dgm:prSet/>
+      <dgm:spPr/>
+      <dgm:t>
+        <a:bodyPr/>
+        <a:lstStyle/>
+        <a:p>
+          <a:endParaRPr lang="zh-CN" altLang="en-US"/>
+        </a:p>
+      </dgm:t>
+    </dgm:pt>
+    <dgm:pt modelId="{70BFA0F0-E95C-4DEC-8FC4-DDB29D78BA7F}" type="sibTrans" cxnId="{F7945686-09E5-4B94-8C9E-B9C9270753B2}">
+      <dgm:prSet/>
+      <dgm:spPr/>
+      <dgm:t>
+        <a:bodyPr/>
+        <a:lstStyle/>
+        <a:p>
+          <a:endParaRPr lang="zh-CN" altLang="en-US"/>
+        </a:p>
+      </dgm:t>
+    </dgm:pt>
+    <dgm:pt modelId="{E87025EF-AE7C-4AE7-B225-25E7BD548DDA}">
+      <dgm:prSet phldrT="Role" phldr="1"/>
+      <dgm:spPr/>
+      <dgm:t>
+        <a:bodyPr/>
+        <a:lstStyle/>
+        <a:p>
+          <a:endParaRPr lang="zh-CN" altLang="en-US"/>
+        </a:p>
+      </dgm:t>
+    </dgm:pt>
+    <dgm:pt modelId="{B833F9EA-9E47-4D49-816E-CBAFEC33A7C4}" type="parTrans" cxnId="{92D7E0FE-2DEB-4FC0-8566-A7ACC12AC322}">
+      <dgm:prSet/>
+      <dgm:spPr/>
+      <dgm:t>
+        <a:bodyPr/>
+        <a:lstStyle/>
+        <a:p>
+          <a:endParaRPr lang="zh-CN" altLang="en-US"/>
+        </a:p>
+      </dgm:t>
+    </dgm:pt>
+    <dgm:pt modelId="{69007689-772C-4674-849F-C9F96C01550C}" type="sibTrans" cxnId="{92D7E0FE-2DEB-4FC0-8566-A7ACC12AC322}">
+      <dgm:prSet/>
+      <dgm:spPr/>
+      <dgm:t>
+        <a:bodyPr/>
+        <a:lstStyle/>
+        <a:p>
+          <a:endParaRPr lang="zh-CN" altLang="en-US"/>
+        </a:p>
+      </dgm:t>
+    </dgm:pt>
+    <dgm:pt modelId="{64543702-2944-46D6-A1C0-17F1149962E0}">
+      <dgm:prSet phldrT="Name" phldr="1"/>
+      <dgm:spPr/>
+      <dgm:t>
+        <a:bodyPr/>
+        <a:lstStyle/>
+        <a:p>
+          <a:pPr>
+            <a:defRPr b="1"/>
+          </a:pPr>
+          <a:endParaRPr lang="zh-CN" altLang="en-US"/>
+        </a:p>
+      </dgm:t>
+    </dgm:pt>
+    <dgm:pt modelId="{18991211-7EB4-42DD-9170-674DC10867D7}" type="parTrans" cxnId="{6DC070DC-8FA1-4CD7-8D19-BB0831D761F7}">
+      <dgm:prSet/>
+      <dgm:spPr/>
+      <dgm:t>
+        <a:bodyPr/>
+        <a:lstStyle/>
+        <a:p>
+          <a:endParaRPr lang="zh-CN" altLang="en-US"/>
+        </a:p>
+      </dgm:t>
+    </dgm:pt>
+    <dgm:pt modelId="{E0899D51-9EC5-41E9-9760-19F9F331D861}" type="sibTrans" cxnId="{6DC070DC-8FA1-4CD7-8D19-BB0831D761F7}">
+      <dgm:prSet/>
+      <dgm:spPr/>
+      <dgm:t>
+        <a:bodyPr/>
+        <a:lstStyle/>
+        <a:p>
+          <a:endParaRPr lang="zh-CN" altLang="en-US"/>
+        </a:p>
+      </dgm:t>
+    </dgm:pt>
+    <dgm:pt modelId="{3944493F-F978-439B-BD8F-76311AB244B4}">
+      <dgm:prSet phldrT="Role" phldr="1"/>
+      <dgm:spPr/>
+      <dgm:t>
+        <a:bodyPr/>
+        <a:lstStyle/>
+        <a:p>
+          <a:endParaRPr lang="zh-CN" altLang="en-US"/>
+        </a:p>
+      </dgm:t>
+    </dgm:pt>
+    <dgm:pt modelId="{A35DEBB5-3DC2-47E5-A445-B70A2CF5D176}" type="parTrans" cxnId="{556718EA-B7CF-4530-8F3D-E1F87AF2E1C5}">
+      <dgm:prSet/>
+      <dgm:spPr/>
+      <dgm:t>
+        <a:bodyPr/>
+        <a:lstStyle/>
+        <a:p>
+          <a:endParaRPr lang="zh-CN" altLang="en-US"/>
+        </a:p>
+      </dgm:t>
+    </dgm:pt>
+    <dgm:pt modelId="{FEB56587-39E0-4678-9C00-9A5FE33A0200}" type="sibTrans" cxnId="{556718EA-B7CF-4530-8F3D-E1F87AF2E1C5}">
+      <dgm:prSet/>
+      <dgm:spPr/>
+      <dgm:t>
+        <a:bodyPr/>
+        <a:lstStyle/>
+        <a:p>
+          <a:endParaRPr lang="zh-CN" altLang="en-US"/>
+        </a:p>
+      </dgm:t>
+    </dgm:pt>
+    <dgm:pt modelId="{CAA61C63-F29E-4AB8-8490-DC21A46AEDD1}">
+      <dgm:prSet phldrT="Name" phldr="1"/>
+      <dgm:spPr/>
+      <dgm:t>
+        <a:bodyPr/>
+        <a:lstStyle/>
+        <a:p>
+          <a:pPr>
+            <a:defRPr b="1"/>
+          </a:pPr>
+          <a:endParaRPr lang="zh-CN" altLang="en-US"/>
+        </a:p>
+      </dgm:t>
+    </dgm:pt>
+    <dgm:pt modelId="{E75FC169-1039-40BE-A530-9D67E400518C}" type="parTrans" cxnId="{D6454E36-82DC-4437-BCE4-659119D82B13}">
+      <dgm:prSet/>
+      <dgm:spPr/>
+      <dgm:t>
+        <a:bodyPr/>
+        <a:lstStyle/>
+        <a:p>
+          <a:endParaRPr lang="zh-CN" altLang="en-US"/>
+        </a:p>
+      </dgm:t>
+    </dgm:pt>
+    <dgm:pt modelId="{28EAC434-C342-41A5-9DF1-8766E15C3101}" type="sibTrans" cxnId="{D6454E36-82DC-4437-BCE4-659119D82B13}">
+      <dgm:prSet/>
+      <dgm:spPr/>
+      <dgm:t>
+        <a:bodyPr/>
+        <a:lstStyle/>
+        <a:p>
+          <a:endParaRPr lang="zh-CN" altLang="en-US"/>
+        </a:p>
+      </dgm:t>
+    </dgm:pt>
+    <dgm:pt modelId="{E109CCE7-9CD8-4553-A18A-B1A62BD46DBD}">
+      <dgm:prSet phldrT="Role" phldr="1"/>
+      <dgm:spPr/>
+      <dgm:t>
+        <a:bodyPr/>
+        <a:lstStyle/>
+        <a:p>
+          <a:endParaRPr lang="zh-CN" altLang="en-US"/>
+        </a:p>
+      </dgm:t>
+    </dgm:pt>
+    <dgm:pt modelId="{5FA4389B-B532-422F-9111-551DD1606D29}" type="parTrans" cxnId="{2361D710-2472-468C-BE97-50A93A72F7AA}">
+      <dgm:prSet/>
+      <dgm:spPr/>
+      <dgm:t>
+        <a:bodyPr/>
+        <a:lstStyle/>
+        <a:p>
+          <a:endParaRPr lang="zh-CN" altLang="en-US"/>
+        </a:p>
+      </dgm:t>
+    </dgm:pt>
+    <dgm:pt modelId="{0AAEF4FF-78E2-48E7-93D6-D2C8F9F0B09C}" type="sibTrans" cxnId="{2361D710-2472-468C-BE97-50A93A72F7AA}">
+      <dgm:prSet/>
+      <dgm:spPr/>
+      <dgm:t>
+        <a:bodyPr/>
+        <a:lstStyle/>
+        <a:p>
+          <a:endParaRPr lang="zh-CN" altLang="en-US"/>
+        </a:p>
+      </dgm:t>
+    </dgm:pt>
+    <dgm:pt modelId="{5AD9A9D0-ADB6-455E-9A0A-FD7AE4DC63E2}">
+      <dgm:prSet phldrT="Name" phldr="1"/>
+      <dgm:spPr/>
+      <dgm:t>
+        <a:bodyPr/>
+        <a:lstStyle/>
+        <a:p>
+          <a:pPr>
+            <a:defRPr b="1"/>
+          </a:pPr>
+          <a:endParaRPr lang="zh-CN" altLang="en-US"/>
+        </a:p>
+      </dgm:t>
+    </dgm:pt>
+    <dgm:pt modelId="{DC2B0C7D-22F5-47EF-BC5F-68C03C7E8EC0}" type="parTrans" cxnId="{70118F7D-8224-43F8-A65D-8B785D1E74BF}">
+      <dgm:prSet/>
+      <dgm:spPr/>
+      <dgm:t>
+        <a:bodyPr/>
+        <a:lstStyle/>
+        <a:p>
+          <a:endParaRPr lang="zh-CN" altLang="en-US"/>
+        </a:p>
+      </dgm:t>
+    </dgm:pt>
+    <dgm:pt modelId="{7317A1CA-F98B-40FF-BC53-3BAA1927BB26}" type="sibTrans" cxnId="{70118F7D-8224-43F8-A65D-8B785D1E74BF}">
+      <dgm:prSet/>
+      <dgm:spPr/>
+      <dgm:t>
+        <a:bodyPr/>
+        <a:lstStyle/>
+        <a:p>
+          <a:endParaRPr lang="zh-CN" altLang="en-US"/>
+        </a:p>
+      </dgm:t>
+    </dgm:pt>
+    <dgm:pt modelId="{981F0F7A-D379-4B69-8DBB-2A53D7C70094}">
+      <dgm:prSet phldrT="Role" phldr="1"/>
+      <dgm:spPr/>
+      <dgm:t>
+        <a:bodyPr/>
+        <a:lstStyle/>
+        <a:p>
+          <a:endParaRPr lang="zh-CN" altLang="en-US"/>
+        </a:p>
+      </dgm:t>
+    </dgm:pt>
+    <dgm:pt modelId="{A9BD8279-9C7E-4230-96AE-13EB8FF89E69}" type="parTrans" cxnId="{16B56CD4-99FF-432E-9697-C0BC97642B98}">
+      <dgm:prSet/>
+      <dgm:spPr/>
+      <dgm:t>
+        <a:bodyPr/>
+        <a:lstStyle/>
+        <a:p>
+          <a:endParaRPr lang="zh-CN" altLang="en-US"/>
+        </a:p>
+      </dgm:t>
+    </dgm:pt>
+    <dgm:pt modelId="{E4D5A8A8-77BD-4DED-8713-1D01A6CAF06C}" type="sibTrans" cxnId="{16B56CD4-99FF-432E-9697-C0BC97642B98}">
+      <dgm:prSet/>
+      <dgm:spPr/>
+      <dgm:t>
+        <a:bodyPr/>
+        <a:lstStyle/>
+        <a:p>
+          <a:endParaRPr lang="zh-CN" altLang="en-US"/>
+        </a:p>
+      </dgm:t>
+    </dgm:pt>
+    <dgm:pt modelId="{15BBBF64-F199-466F-9A9E-BB491D07E4AE}" type="pres">
+      <dgm:prSet presAssocID="{6E99C52D-ACC9-4644-BFAA-96A58201F41D}" presName="root" presStyleCnt="0">
+        <dgm:presLayoutVars>
+          <dgm:dir/>
+          <dgm:resizeHandles val="exact"/>
+        </dgm:presLayoutVars>
+      </dgm:prSet>
+      <dgm:spPr/>
+    </dgm:pt>
+    <dgm:pt modelId="{DC96D169-7336-4755-9448-0301E3B4BFBC}" type="pres">
+      <dgm:prSet presAssocID="{A60FE6FE-471B-429F-A808-29225B208470}" presName="compNode" presStyleCnt="0"/>
+      <dgm:spPr/>
+    </dgm:pt>
+    <dgm:pt modelId="{DDDE41E9-94A0-4826-B17A-C133A684B02F}" type="pres">
+      <dgm:prSet presAssocID="{A60FE6FE-471B-429F-A808-29225B208470}" presName="bgCard" presStyleLbl="node1NoLn" presStyleIdx="0" presStyleCnt="4"/>
+      <dgm:spPr/>
+    </dgm:pt>
+    <dgm:pt modelId="{10E7D2C0-C586-45A1-A676-8D16F1D59169}" type="pres">
+      <dgm:prSet presAssocID="{A60FE6FE-471B-429F-A808-29225B208470}" presName="nameText" presStyleLbl="revTxLt" presStyleIdx="0" presStyleCnt="8">
+        <dgm:presLayoutVars>
+          <dgm:chMax val="1"/>
+          <dgm:chPref val="1"/>
+        </dgm:presLayoutVars>
+      </dgm:prSet>
+      <dgm:spPr/>
+    </dgm:pt>
+    <dgm:pt modelId="{DE586D1C-C418-43BD-887F-038AFAF0B9BB}" type="pres">
+      <dgm:prSet presAssocID="{A60FE6FE-471B-429F-A808-29225B208470}" presName="roleText" presStyleLbl="revTxLt" presStyleIdx="1" presStyleCnt="8">
+        <dgm:presLayoutVars>
+          <dgm:chMax val="0"/>
+        </dgm:presLayoutVars>
+      </dgm:prSet>
+      <dgm:spPr/>
+    </dgm:pt>
+    <dgm:pt modelId="{EE19D97F-5DA6-44A1-A459-27A1CD60B914}" type="pres">
+      <dgm:prSet presAssocID="{A60FE6FE-471B-429F-A808-29225B208470}" presName="photoCircle" presStyleLbl="ltNode1NoLn" presStyleIdx="0" presStyleCnt="4"/>
+      <dgm:spPr/>
+    </dgm:pt>
+    <dgm:pt modelId="{59ED88E6-33CA-4468-B7F9-4586C2AF6202}" type="pres">
+      <dgm:prSet presAssocID="{70BFA0F0-E95C-4DEC-8FC4-DDB29D78BA7F}" presName="sibTrans" presStyleCnt="0"/>
+      <dgm:spPr/>
+    </dgm:pt>
+    <dgm:pt modelId="{9DB4B3B6-4417-4DBC-95CF-4AAF564F3DA4}" type="pres">
+      <dgm:prSet presAssocID="{64543702-2944-46D6-A1C0-17F1149962E0}" presName="compNode" presStyleCnt="0"/>
+      <dgm:spPr/>
+    </dgm:pt>
+    <dgm:pt modelId="{D06D9E18-85DD-4BD4-8C91-7823E934F466}" type="pres">
+      <dgm:prSet presAssocID="{64543702-2944-46D6-A1C0-17F1149962E0}" presName="bgCard" presStyleLbl="node1NoLn" presStyleIdx="1" presStyleCnt="4"/>
+      <dgm:spPr/>
+    </dgm:pt>
+    <dgm:pt modelId="{C6F059BF-455A-4203-BA47-0D7E9F21B36D}" type="pres">
+      <dgm:prSet presAssocID="{64543702-2944-46D6-A1C0-17F1149962E0}" presName="nameText" presStyleLbl="revTxLt" presStyleIdx="2" presStyleCnt="8">
+        <dgm:presLayoutVars>
+          <dgm:chMax val="1"/>
+          <dgm:chPref val="1"/>
+        </dgm:presLayoutVars>
+      </dgm:prSet>
+      <dgm:spPr/>
+    </dgm:pt>
+    <dgm:pt modelId="{0E2C2A39-B8CF-44B5-9C8E-A0AD5FE91AD8}" type="pres">
+      <dgm:prSet presAssocID="{64543702-2944-46D6-A1C0-17F1149962E0}" presName="roleText" presStyleLbl="revTxLt" presStyleIdx="3" presStyleCnt="8">
+        <dgm:presLayoutVars>
+          <dgm:chMax val="0"/>
+        </dgm:presLayoutVars>
+      </dgm:prSet>
+      <dgm:spPr/>
+    </dgm:pt>
+    <dgm:pt modelId="{6C2E8EDF-30E0-43D2-A1E5-3EC22C4CCD81}" type="pres">
+      <dgm:prSet presAssocID="{64543702-2944-46D6-A1C0-17F1149962E0}" presName="photoCircle" presStyleLbl="ltNode1NoLn" presStyleIdx="1" presStyleCnt="4"/>
+      <dgm:spPr/>
+    </dgm:pt>
+    <dgm:pt modelId="{5DE5CCAD-FF59-495E-8C0C-FD19E15F8FA4}" type="pres">
+      <dgm:prSet presAssocID="{E0899D51-9EC5-41E9-9760-19F9F331D861}" presName="sibTrans" presStyleCnt="0"/>
+      <dgm:spPr/>
+    </dgm:pt>
+    <dgm:pt modelId="{3F834E17-FC3E-43AC-8E47-41DF6D8849D2}" type="pres">
+      <dgm:prSet presAssocID="{CAA61C63-F29E-4AB8-8490-DC21A46AEDD1}" presName="compNode" presStyleCnt="0"/>
+      <dgm:spPr/>
+    </dgm:pt>
+    <dgm:pt modelId="{D13812A0-E70C-4DF3-8080-C0B65E045ACF}" type="pres">
+      <dgm:prSet presAssocID="{CAA61C63-F29E-4AB8-8490-DC21A46AEDD1}" presName="bgCard" presStyleLbl="node1NoLn" presStyleIdx="2" presStyleCnt="4"/>
+      <dgm:spPr/>
+    </dgm:pt>
+    <dgm:pt modelId="{E7E0EF7E-E4A4-45DF-B163-A8281D2E72C5}" type="pres">
+      <dgm:prSet presAssocID="{CAA61C63-F29E-4AB8-8490-DC21A46AEDD1}" presName="nameText" presStyleLbl="revTxLt" presStyleIdx="4" presStyleCnt="8">
+        <dgm:presLayoutVars>
+          <dgm:chMax val="1"/>
+          <dgm:chPref val="1"/>
+        </dgm:presLayoutVars>
+      </dgm:prSet>
+      <dgm:spPr/>
+    </dgm:pt>
+    <dgm:pt modelId="{DCB9F7A7-F5C0-468D-B476-6066461FC8B0}" type="pres">
+      <dgm:prSet presAssocID="{CAA61C63-F29E-4AB8-8490-DC21A46AEDD1}" presName="roleText" presStyleLbl="revTxLt" presStyleIdx="5" presStyleCnt="8">
+        <dgm:presLayoutVars>
+          <dgm:chMax val="0"/>
+        </dgm:presLayoutVars>
+      </dgm:prSet>
+      <dgm:spPr/>
+    </dgm:pt>
+    <dgm:pt modelId="{2B678B5E-9C5A-4F3C-A4B5-A12DD3464D62}" type="pres">
+      <dgm:prSet presAssocID="{CAA61C63-F29E-4AB8-8490-DC21A46AEDD1}" presName="photoCircle" presStyleLbl="ltNode1NoLn" presStyleIdx="2" presStyleCnt="4"/>
+      <dgm:spPr/>
+    </dgm:pt>
+    <dgm:pt modelId="{F7A14308-2391-4A68-8803-BD9AF1274E24}" type="pres">
+      <dgm:prSet presAssocID="{28EAC434-C342-41A5-9DF1-8766E15C3101}" presName="sibTrans" presStyleCnt="0"/>
+      <dgm:spPr/>
+    </dgm:pt>
+    <dgm:pt modelId="{B89BD22E-78D2-4DCF-86C7-7B22F332155A}" type="pres">
+      <dgm:prSet presAssocID="{5AD9A9D0-ADB6-455E-9A0A-FD7AE4DC63E2}" presName="compNode" presStyleCnt="0"/>
+      <dgm:spPr/>
+    </dgm:pt>
+    <dgm:pt modelId="{87ADB2A3-A382-4867-AA58-B5ECCC7D1A98}" type="pres">
+      <dgm:prSet presAssocID="{5AD9A9D0-ADB6-455E-9A0A-FD7AE4DC63E2}" presName="bgCard" presStyleLbl="node1NoLn" presStyleIdx="3" presStyleCnt="4"/>
+      <dgm:spPr/>
+    </dgm:pt>
+    <dgm:pt modelId="{4146AABC-EE3D-42DA-8364-BA3D59A4B097}" type="pres">
+      <dgm:prSet presAssocID="{5AD9A9D0-ADB6-455E-9A0A-FD7AE4DC63E2}" presName="nameText" presStyleLbl="revTxLt" presStyleIdx="6" presStyleCnt="8">
+        <dgm:presLayoutVars>
+          <dgm:chMax val="1"/>
+          <dgm:chPref val="1"/>
+        </dgm:presLayoutVars>
+      </dgm:prSet>
+      <dgm:spPr/>
+    </dgm:pt>
+    <dgm:pt modelId="{B23EAF24-E640-4633-BF03-1716875557B2}" type="pres">
+      <dgm:prSet presAssocID="{5AD9A9D0-ADB6-455E-9A0A-FD7AE4DC63E2}" presName="roleText" presStyleLbl="revTxLt" presStyleIdx="7" presStyleCnt="8">
+        <dgm:presLayoutVars>
+          <dgm:chMax val="0"/>
+        </dgm:presLayoutVars>
+      </dgm:prSet>
+      <dgm:spPr/>
+    </dgm:pt>
+    <dgm:pt modelId="{D3293C81-DDA6-41DD-94D9-8642CE9ED5F9}" type="pres">
+      <dgm:prSet presAssocID="{5AD9A9D0-ADB6-455E-9A0A-FD7AE4DC63E2}" presName="photoCircle" presStyleLbl="ltNode1NoLn" presStyleIdx="3" presStyleCnt="4"/>
+      <dgm:spPr/>
+    </dgm:pt>
+  </dgm:ptLst>
+  <dgm:cxnLst>
+    <dgm:cxn modelId="{F5A46D09-ED12-4B48-99D1-B5028DB727C0}" type="presOf" srcId="{64543702-2944-46D6-A1C0-17F1149962E0}" destId="{C6F059BF-455A-4203-BA47-0D7E9F21B36D}" srcOrd="0" destOrd="0" presId="urn:microsoft.com/office/officeart/2024/layout/MeetTheTeamCardVertical"/>
+    <dgm:cxn modelId="{6275320A-535A-4D0F-963E-5B90DF6731E0}" type="presOf" srcId="{E109CCE7-9CD8-4553-A18A-B1A62BD46DBD}" destId="{DCB9F7A7-F5C0-468D-B476-6066461FC8B0}" srcOrd="0" destOrd="0" presId="urn:microsoft.com/office/officeart/2024/layout/MeetTheTeamCardVertical"/>
+    <dgm:cxn modelId="{2361D710-2472-468C-BE97-50A93A72F7AA}" srcId="{CAA61C63-F29E-4AB8-8490-DC21A46AEDD1}" destId="{E109CCE7-9CD8-4553-A18A-B1A62BD46DBD}" srcOrd="0" destOrd="0" parTransId="{5FA4389B-B532-422F-9111-551DD1606D29}" sibTransId="{0AAEF4FF-78E2-48E7-93D6-D2C8F9F0B09C}"/>
+    <dgm:cxn modelId="{D6454E36-82DC-4437-BCE4-659119D82B13}" srcId="{6E99C52D-ACC9-4644-BFAA-96A58201F41D}" destId="{CAA61C63-F29E-4AB8-8490-DC21A46AEDD1}" srcOrd="2" destOrd="0" parTransId="{E75FC169-1039-40BE-A530-9D67E400518C}" sibTransId="{28EAC434-C342-41A5-9DF1-8766E15C3101}"/>
+    <dgm:cxn modelId="{596DCE40-0DD0-4C31-BF22-38B1FD47FB32}" type="presOf" srcId="{A60FE6FE-471B-429F-A808-29225B208470}" destId="{10E7D2C0-C586-45A1-A676-8D16F1D59169}" srcOrd="0" destOrd="0" presId="urn:microsoft.com/office/officeart/2024/layout/MeetTheTeamCardVertical"/>
+    <dgm:cxn modelId="{5A2BF55D-102F-4C61-BD24-89800F8A591F}" type="presOf" srcId="{6E99C52D-ACC9-4644-BFAA-96A58201F41D}" destId="{15BBBF64-F199-466F-9A9E-BB491D07E4AE}" srcOrd="0" destOrd="0" presId="urn:microsoft.com/office/officeart/2024/layout/MeetTheTeamCardVertical"/>
+    <dgm:cxn modelId="{5306185E-DC3A-46AF-8EF0-7C16B694EAED}" type="presOf" srcId="{5AD9A9D0-ADB6-455E-9A0A-FD7AE4DC63E2}" destId="{4146AABC-EE3D-42DA-8364-BA3D59A4B097}" srcOrd="0" destOrd="0" presId="urn:microsoft.com/office/officeart/2024/layout/MeetTheTeamCardVertical"/>
+    <dgm:cxn modelId="{ECA0F262-A215-434C-A869-E602C5181690}" type="presOf" srcId="{CAA61C63-F29E-4AB8-8490-DC21A46AEDD1}" destId="{E7E0EF7E-E4A4-45DF-B163-A8281D2E72C5}" srcOrd="0" destOrd="0" presId="urn:microsoft.com/office/officeart/2024/layout/MeetTheTeamCardVertical"/>
+    <dgm:cxn modelId="{1AE9014C-AFE2-4ED6-8363-5C61D64A2672}" type="presOf" srcId="{E87025EF-AE7C-4AE7-B225-25E7BD548DDA}" destId="{DE586D1C-C418-43BD-887F-038AFAF0B9BB}" srcOrd="0" destOrd="0" presId="urn:microsoft.com/office/officeart/2024/layout/MeetTheTeamCardVertical"/>
+    <dgm:cxn modelId="{70118F7D-8224-43F8-A65D-8B785D1E74BF}" srcId="{6E99C52D-ACC9-4644-BFAA-96A58201F41D}" destId="{5AD9A9D0-ADB6-455E-9A0A-FD7AE4DC63E2}" srcOrd="3" destOrd="0" parTransId="{DC2B0C7D-22F5-47EF-BC5F-68C03C7E8EC0}" sibTransId="{7317A1CA-F98B-40FF-BC53-3BAA1927BB26}"/>
+    <dgm:cxn modelId="{F7945686-09E5-4B94-8C9E-B9C9270753B2}" srcId="{6E99C52D-ACC9-4644-BFAA-96A58201F41D}" destId="{A60FE6FE-471B-429F-A808-29225B208470}" srcOrd="0" destOrd="0" parTransId="{BCF563AE-95D1-4A90-BC48-838C90165D36}" sibTransId="{70BFA0F0-E95C-4DEC-8FC4-DDB29D78BA7F}"/>
+    <dgm:cxn modelId="{B34D9CA1-0CAF-4C97-8CA3-61D6E9BD108A}" type="presOf" srcId="{3944493F-F978-439B-BD8F-76311AB244B4}" destId="{0E2C2A39-B8CF-44B5-9C8E-A0AD5FE91AD8}" srcOrd="0" destOrd="0" presId="urn:microsoft.com/office/officeart/2024/layout/MeetTheTeamCardVertical"/>
+    <dgm:cxn modelId="{997356C2-3B75-4B83-82C8-46CFC9263C04}" type="presOf" srcId="{981F0F7A-D379-4B69-8DBB-2A53D7C70094}" destId="{B23EAF24-E640-4633-BF03-1716875557B2}" srcOrd="0" destOrd="0" presId="urn:microsoft.com/office/officeart/2024/layout/MeetTheTeamCardVertical"/>
+    <dgm:cxn modelId="{16B56CD4-99FF-432E-9697-C0BC97642B98}" srcId="{5AD9A9D0-ADB6-455E-9A0A-FD7AE4DC63E2}" destId="{981F0F7A-D379-4B69-8DBB-2A53D7C70094}" srcOrd="0" destOrd="0" parTransId="{A9BD8279-9C7E-4230-96AE-13EB8FF89E69}" sibTransId="{E4D5A8A8-77BD-4DED-8713-1D01A6CAF06C}"/>
+    <dgm:cxn modelId="{6DC070DC-8FA1-4CD7-8D19-BB0831D761F7}" srcId="{6E99C52D-ACC9-4644-BFAA-96A58201F41D}" destId="{64543702-2944-46D6-A1C0-17F1149962E0}" srcOrd="1" destOrd="0" parTransId="{18991211-7EB4-42DD-9170-674DC10867D7}" sibTransId="{E0899D51-9EC5-41E9-9760-19F9F331D861}"/>
+    <dgm:cxn modelId="{556718EA-B7CF-4530-8F3D-E1F87AF2E1C5}" srcId="{64543702-2944-46D6-A1C0-17F1149962E0}" destId="{3944493F-F978-439B-BD8F-76311AB244B4}" srcOrd="0" destOrd="0" parTransId="{A35DEBB5-3DC2-47E5-A445-B70A2CF5D176}" sibTransId="{FEB56587-39E0-4678-9C00-9A5FE33A0200}"/>
+    <dgm:cxn modelId="{92D7E0FE-2DEB-4FC0-8566-A7ACC12AC322}" srcId="{A60FE6FE-471B-429F-A808-29225B208470}" destId="{E87025EF-AE7C-4AE7-B225-25E7BD548DDA}" srcOrd="0" destOrd="0" parTransId="{B833F9EA-9E47-4D49-816E-CBAFEC33A7C4}" sibTransId="{69007689-772C-4674-849F-C9F96C01550C}"/>
+    <dgm:cxn modelId="{9CD3A5EE-6EB9-4DA2-8F83-642C6DA7CD2E}" type="presParOf" srcId="{15BBBF64-F199-466F-9A9E-BB491D07E4AE}" destId="{DC96D169-7336-4755-9448-0301E3B4BFBC}" srcOrd="0" destOrd="0" presId="urn:microsoft.com/office/officeart/2024/layout/MeetTheTeamCardVertical"/>
+    <dgm:cxn modelId="{2E57F3BA-29DB-45E1-B271-B9B079218E37}" type="presParOf" srcId="{DC96D169-7336-4755-9448-0301E3B4BFBC}" destId="{DDDE41E9-94A0-4826-B17A-C133A684B02F}" srcOrd="0" destOrd="0" presId="urn:microsoft.com/office/officeart/2024/layout/MeetTheTeamCardVertical"/>
+    <dgm:cxn modelId="{A6F19514-C618-4783-975B-17B3710BF3B1}" type="presParOf" srcId="{DC96D169-7336-4755-9448-0301E3B4BFBC}" destId="{10E7D2C0-C586-45A1-A676-8D16F1D59169}" srcOrd="1" destOrd="0" presId="urn:microsoft.com/office/officeart/2024/layout/MeetTheTeamCardVertical"/>
+    <dgm:cxn modelId="{46CD61FA-3488-4547-96EC-A185CB72DFF9}" type="presParOf" srcId="{DC96D169-7336-4755-9448-0301E3B4BFBC}" destId="{DE586D1C-C418-43BD-887F-038AFAF0B9BB}" srcOrd="2" destOrd="0" presId="urn:microsoft.com/office/officeart/2024/layout/MeetTheTeamCardVertical"/>
+    <dgm:cxn modelId="{50153F73-ADFC-4A5B-B400-6E6B28D99471}" type="presParOf" srcId="{DC96D169-7336-4755-9448-0301E3B4BFBC}" destId="{EE19D97F-5DA6-44A1-A459-27A1CD60B914}" srcOrd="3" destOrd="0" presId="urn:microsoft.com/office/officeart/2024/layout/MeetTheTeamCardVertical"/>
+    <dgm:cxn modelId="{09406C27-18FA-4F6E-9EA6-E91DAB0E9B8E}" type="presParOf" srcId="{15BBBF64-F199-466F-9A9E-BB491D07E4AE}" destId="{59ED88E6-33CA-4468-B7F9-4586C2AF6202}" srcOrd="1" destOrd="0" presId="urn:microsoft.com/office/officeart/2024/layout/MeetTheTeamCardVertical"/>
+    <dgm:cxn modelId="{6DD2FCBB-715A-4E63-8293-2EA8950078B7}" type="presParOf" srcId="{15BBBF64-F199-466F-9A9E-BB491D07E4AE}" destId="{9DB4B3B6-4417-4DBC-95CF-4AAF564F3DA4}" srcOrd="2" destOrd="0" presId="urn:microsoft.com/office/officeart/2024/layout/MeetTheTeamCardVertical"/>
+    <dgm:cxn modelId="{05FE7069-220E-45A7-8054-86E3F5FC64B1}" type="presParOf" srcId="{9DB4B3B6-4417-4DBC-95CF-4AAF564F3DA4}" destId="{D06D9E18-85DD-4BD4-8C91-7823E934F466}" srcOrd="0" destOrd="0" presId="urn:microsoft.com/office/officeart/2024/layout/MeetTheTeamCardVertical"/>
+    <dgm:cxn modelId="{D98ECF22-FE79-4493-93E1-44A49C12C45A}" type="presParOf" srcId="{9DB4B3B6-4417-4DBC-95CF-4AAF564F3DA4}" destId="{C6F059BF-455A-4203-BA47-0D7E9F21B36D}" srcOrd="1" destOrd="0" presId="urn:microsoft.com/office/officeart/2024/layout/MeetTheTeamCardVertical"/>
+    <dgm:cxn modelId="{22B1B8A3-7487-4397-A5FE-D7057B7A5589}" type="presParOf" srcId="{9DB4B3B6-4417-4DBC-95CF-4AAF564F3DA4}" destId="{0E2C2A39-B8CF-44B5-9C8E-A0AD5FE91AD8}" srcOrd="2" destOrd="0" presId="urn:microsoft.com/office/officeart/2024/layout/MeetTheTeamCardVertical"/>
+    <dgm:cxn modelId="{6493DC53-2289-43BD-B92A-DA37827CA315}" type="presParOf" srcId="{9DB4B3B6-4417-4DBC-95CF-4AAF564F3DA4}" destId="{6C2E8EDF-30E0-43D2-A1E5-3EC22C4CCD81}" srcOrd="3" destOrd="0" presId="urn:microsoft.com/office/officeart/2024/layout/MeetTheTeamCardVertical"/>
+    <dgm:cxn modelId="{00EFEE47-8A20-44A9-957F-736D2A7A15C2}" type="presParOf" srcId="{15BBBF64-F199-466F-9A9E-BB491D07E4AE}" destId="{5DE5CCAD-FF59-495E-8C0C-FD19E15F8FA4}" srcOrd="3" destOrd="0" presId="urn:microsoft.com/office/officeart/2024/layout/MeetTheTeamCardVertical"/>
+    <dgm:cxn modelId="{840CCEFC-70A0-4667-BC18-77B50B52D39F}" type="presParOf" srcId="{15BBBF64-F199-466F-9A9E-BB491D07E4AE}" destId="{3F834E17-FC3E-43AC-8E47-41DF6D8849D2}" srcOrd="4" destOrd="0" presId="urn:microsoft.com/office/officeart/2024/layout/MeetTheTeamCardVertical"/>
+    <dgm:cxn modelId="{95689CA2-8CFD-4C8D-91A5-A928B8281BE8}" type="presParOf" srcId="{3F834E17-FC3E-43AC-8E47-41DF6D8849D2}" destId="{D13812A0-E70C-4DF3-8080-C0B65E045ACF}" srcOrd="0" destOrd="0" presId="urn:microsoft.com/office/officeart/2024/layout/MeetTheTeamCardVertical"/>
+    <dgm:cxn modelId="{3688F5D1-6501-47DE-91FA-8AADB59B3BB5}" type="presParOf" srcId="{3F834E17-FC3E-43AC-8E47-41DF6D8849D2}" destId="{E7E0EF7E-E4A4-45DF-B163-A8281D2E72C5}" srcOrd="1" destOrd="0" presId="urn:microsoft.com/office/officeart/2024/layout/MeetTheTeamCardVertical"/>
+    <dgm:cxn modelId="{3A593F31-3F57-4EE3-9C38-BB484F39B94B}" type="presParOf" srcId="{3F834E17-FC3E-43AC-8E47-41DF6D8849D2}" destId="{DCB9F7A7-F5C0-468D-B476-6066461FC8B0}" srcOrd="2" destOrd="0" presId="urn:microsoft.com/office/officeart/2024/layout/MeetTheTeamCardVertical"/>
+    <dgm:cxn modelId="{1BCADCDD-DBEA-486B-B841-686348AFA579}" type="presParOf" srcId="{3F834E17-FC3E-43AC-8E47-41DF6D8849D2}" destId="{2B678B5E-9C5A-4F3C-A4B5-A12DD3464D62}" srcOrd="3" destOrd="0" presId="urn:microsoft.com/office/officeart/2024/layout/MeetTheTeamCardVertical"/>
+    <dgm:cxn modelId="{387D26EA-E9D6-40F7-AA95-FC82C0C0776C}" type="presParOf" srcId="{15BBBF64-F199-466F-9A9E-BB491D07E4AE}" destId="{F7A14308-2391-4A68-8803-BD9AF1274E24}" srcOrd="5" destOrd="0" presId="urn:microsoft.com/office/officeart/2024/layout/MeetTheTeamCardVertical"/>
+    <dgm:cxn modelId="{A41CBDF8-AF7D-4FE8-B9BE-19D07DFA07BF}" type="presParOf" srcId="{15BBBF64-F199-466F-9A9E-BB491D07E4AE}" destId="{B89BD22E-78D2-4DCF-86C7-7B22F332155A}" srcOrd="6" destOrd="0" presId="urn:microsoft.com/office/officeart/2024/layout/MeetTheTeamCardVertical"/>
+    <dgm:cxn modelId="{FABE3408-A197-469A-B908-B0EC4E9F0EEC}" type="presParOf" srcId="{B89BD22E-78D2-4DCF-86C7-7B22F332155A}" destId="{87ADB2A3-A382-4867-AA58-B5ECCC7D1A98}" srcOrd="0" destOrd="0" presId="urn:microsoft.com/office/officeart/2024/layout/MeetTheTeamCardVertical"/>
+    <dgm:cxn modelId="{AE8B9357-82DD-44FD-9459-5DB6B94EA449}" type="presParOf" srcId="{B89BD22E-78D2-4DCF-86C7-7B22F332155A}" destId="{4146AABC-EE3D-42DA-8364-BA3D59A4B097}" srcOrd="1" destOrd="0" presId="urn:microsoft.com/office/officeart/2024/layout/MeetTheTeamCardVertical"/>
+    <dgm:cxn modelId="{04E43DBD-643E-49CD-9BD5-837616BAB965}" type="presParOf" srcId="{B89BD22E-78D2-4DCF-86C7-7B22F332155A}" destId="{B23EAF24-E640-4633-BF03-1716875557B2}" srcOrd="2" destOrd="0" presId="urn:microsoft.com/office/officeart/2024/layout/MeetTheTeamCardVertical"/>
+    <dgm:cxn modelId="{1CF684E6-4668-4BE0-B061-6E81E1F56D34}" type="presParOf" srcId="{B89BD22E-78D2-4DCF-86C7-7B22F332155A}" destId="{D3293C81-DDA6-41DD-94D9-8642CE9ED5F9}" srcOrd="3" destOrd="0" presId="urn:microsoft.com/office/officeart/2024/layout/MeetTheTeamCardVertical"/>
+  </dgm:cxnLst>
+  <dgm:bg/>
+  <dgm:whole/>
+  <dgm:extLst>
+    <a:ext uri="http://schemas.microsoft.com/office/drawing/2008/diagram">
+      <dsp:dataModelExt xmlns:dsp="http://schemas.microsoft.com/office/drawing/2008/diagram" relId="rId7" minVer="http://schemas.openxmlformats.org/drawingml/2006/diagram"/>
+    </a:ext>
+  </dgm:extLst>
+</dgm:dataModel>
+</file>
+
+<file path=ppt/diagrams/drawing1.xml><?xml version="1.0" encoding="utf-8"?>
+<dsp:drawing xmlns:dgm="http://schemas.openxmlformats.org/drawingml/2006/diagram" xmlns:dsp="http://schemas.microsoft.com/office/drawing/2008/diagram" xmlns:a="http://schemas.openxmlformats.org/drawingml/2006/main">
+  <dsp:spTree>
+    <dsp:nvGrpSpPr>
+      <dsp:cNvPr id="0" name=""/>
+      <dsp:cNvGrpSpPr/>
+    </dsp:nvGrpSpPr>
+    <dsp:grpSpPr/>
+    <dsp:sp modelId="{DDDE41E9-94A0-4826-B17A-C133A684B02F}">
+      <dsp:nvSpPr>
+        <dsp:cNvPr id="0" name=""/>
+        <dsp:cNvSpPr/>
+      </dsp:nvSpPr>
+      <dsp:spPr>
+        <a:xfrm>
+          <a:off x="1035" y="801179"/>
+          <a:ext cx="1367578" cy="2461640"/>
+        </a:xfrm>
+        <a:prstGeom prst="roundRect">
+          <a:avLst>
+            <a:gd name="adj" fmla="val 50000"/>
+          </a:avLst>
+        </a:prstGeom>
+        <a:solidFill>
+          <a:schemeClr val="accent1">
+            <a:hueOff val="0"/>
+            <a:satOff val="0"/>
+            <a:lumOff val="0"/>
+            <a:alphaOff val="0"/>
+          </a:schemeClr>
+        </a:solidFill>
+        <a:ln w="6350" cap="flat">
+          <a:solidFill>
+            <a:schemeClr val="lt1">
+              <a:alpha val="0"/>
+              <a:hueOff val="0"/>
+              <a:satOff val="0"/>
+              <a:lumOff val="0"/>
+              <a:alphaOff val="0"/>
+            </a:schemeClr>
+          </a:solidFill>
+        </a:ln>
+        <a:effectLst/>
+        <a:scene3d>
+          <a:camera prst="orthographicFront"/>
+          <a:lightRig rig="threePt" dir="t">
+            <a:rot lat="0" lon="0" rev="7500000"/>
+          </a:lightRig>
+        </a:scene3d>
+        <a:sp3d prstMaterial="plastic">
+          <a:bevelT w="127000" h="25400" prst="relaxedInset"/>
+        </a:sp3d>
+      </dsp:spPr>
+      <dsp:style>
+        <a:lnRef idx="1">
+          <a:scrgbClr r="0" g="0" b="0"/>
+        </a:lnRef>
+        <a:fillRef idx="3">
+          <a:scrgbClr r="0" g="0" b="0"/>
+        </a:fillRef>
+        <a:effectRef idx="2">
+          <a:scrgbClr r="0" g="0" b="0"/>
+        </a:effectRef>
+        <a:fontRef idx="minor">
+          <a:schemeClr val="lt1"/>
+        </a:fontRef>
+      </dsp:style>
+    </dsp:sp>
+    <dsp:sp modelId="{10E7D2C0-C586-45A1-A676-8D16F1D59169}">
+      <dsp:nvSpPr>
+        <dsp:cNvPr id="0" name=""/>
+        <dsp:cNvSpPr/>
+      </dsp:nvSpPr>
+      <dsp:spPr>
+        <a:xfrm>
+          <a:off x="35225" y="1195042"/>
+          <a:ext cx="1299199" cy="273515"/>
+        </a:xfrm>
+        <a:prstGeom prst="rect">
+          <a:avLst/>
+        </a:prstGeom>
+        <a:noFill/>
+        <a:ln>
+          <a:noFill/>
+        </a:ln>
+        <a:effectLst/>
+      </dsp:spPr>
+      <dsp:style>
+        <a:lnRef idx="0">
+          <a:scrgbClr r="0" g="0" b="0"/>
+        </a:lnRef>
+        <a:fillRef idx="0">
+          <a:scrgbClr r="0" g="0" b="0"/>
+        </a:fillRef>
+        <a:effectRef idx="0">
+          <a:scrgbClr r="0" g="0" b="0"/>
+        </a:effectRef>
+        <a:fontRef idx="minor">
+          <a:schemeClr val="lt1"/>
+        </a:fontRef>
+      </dsp:style>
+      <dsp:txBody>
+        <a:bodyPr spcFirstLastPara="0" vert="horz" wrap="square" lIns="0" tIns="0" rIns="0" bIns="0" numCol="1" spcCol="1270" anchor="b" anchorCtr="0">
+          <a:noAutofit/>
+        </a:bodyPr>
+        <a:lstStyle/>
+        <a:p>
+          <a:pPr marL="0" lvl="0" indent="0" algn="ctr" defTabSz="800100">
+            <a:lnSpc>
+              <a:spcPct val="90000"/>
+            </a:lnSpc>
+            <a:spcBef>
+              <a:spcPct val="0"/>
+            </a:spcBef>
+            <a:spcAft>
+              <a:spcPct val="35000"/>
+            </a:spcAft>
+            <a:buNone/>
+            <a:defRPr b="1"/>
+          </a:pPr>
+          <a:endParaRPr lang="zh-CN" altLang="en-US" sz="1800" kern="1200"/>
+        </a:p>
+      </dsp:txBody>
+      <dsp:txXfrm>
+        <a:off x="35225" y="1195042"/>
+        <a:ext cx="1299199" cy="273515"/>
+      </dsp:txXfrm>
+    </dsp:sp>
+    <dsp:sp modelId="{DE586D1C-C418-43BD-887F-038AFAF0B9BB}">
+      <dsp:nvSpPr>
+        <dsp:cNvPr id="0" name=""/>
+        <dsp:cNvSpPr/>
+      </dsp:nvSpPr>
+      <dsp:spPr>
+        <a:xfrm>
+          <a:off x="35225" y="1468557"/>
+          <a:ext cx="1299199" cy="202401"/>
+        </a:xfrm>
+        <a:prstGeom prst="rect">
+          <a:avLst/>
+        </a:prstGeom>
+        <a:noFill/>
+        <a:ln>
+          <a:noFill/>
+        </a:ln>
+        <a:effectLst/>
+      </dsp:spPr>
+      <dsp:style>
+        <a:lnRef idx="0">
+          <a:scrgbClr r="0" g="0" b="0"/>
+        </a:lnRef>
+        <a:fillRef idx="0">
+          <a:scrgbClr r="0" g="0" b="0"/>
+        </a:fillRef>
+        <a:effectRef idx="0">
+          <a:scrgbClr r="0" g="0" b="0"/>
+        </a:effectRef>
+        <a:fontRef idx="minor">
+          <a:schemeClr val="lt1"/>
+        </a:fontRef>
+      </dsp:style>
+      <dsp:txBody>
+        <a:bodyPr spcFirstLastPara="0" vert="horz" wrap="square" lIns="0" tIns="0" rIns="0" bIns="0" numCol="1" spcCol="1270" anchor="b" anchorCtr="0">
+          <a:noAutofit/>
+        </a:bodyPr>
+        <a:lstStyle/>
+        <a:p>
+          <a:pPr marL="0" lvl="0" indent="0" algn="ctr" defTabSz="622300">
+            <a:lnSpc>
+              <a:spcPct val="90000"/>
+            </a:lnSpc>
+            <a:spcBef>
+              <a:spcPct val="0"/>
+            </a:spcBef>
+            <a:spcAft>
+              <a:spcPct val="35000"/>
+            </a:spcAft>
+            <a:buNone/>
+          </a:pPr>
+          <a:endParaRPr lang="zh-CN" altLang="en-US" sz="1400" kern="1200"/>
+        </a:p>
+      </dsp:txBody>
+      <dsp:txXfrm>
+        <a:off x="35225" y="1468557"/>
+        <a:ext cx="1299199" cy="202401"/>
+      </dsp:txXfrm>
+    </dsp:sp>
+    <dsp:sp modelId="{EE19D97F-5DA6-44A1-A459-27A1CD60B914}">
+      <dsp:nvSpPr>
+        <dsp:cNvPr id="0" name=""/>
+        <dsp:cNvSpPr/>
+      </dsp:nvSpPr>
+      <dsp:spPr>
+        <a:xfrm>
+          <a:off x="1035" y="1895242"/>
+          <a:ext cx="1367578" cy="1367578"/>
+        </a:xfrm>
+        <a:prstGeom prst="ellipse">
+          <a:avLst/>
+        </a:prstGeom>
+        <a:solidFill>
+          <a:schemeClr val="accent1">
+            <a:tint val="75000"/>
+            <a:hueOff val="0"/>
+            <a:satOff val="0"/>
+            <a:lumOff val="0"/>
+            <a:alphaOff val="0"/>
+          </a:schemeClr>
+        </a:solidFill>
+        <a:ln w="6350" cap="flat">
+          <a:solidFill>
+            <a:schemeClr val="lt1">
+              <a:alpha val="0"/>
+              <a:hueOff val="0"/>
+              <a:satOff val="0"/>
+              <a:lumOff val="0"/>
+              <a:alphaOff val="0"/>
+            </a:schemeClr>
+          </a:solidFill>
+        </a:ln>
+        <a:effectLst/>
+        <a:scene3d>
+          <a:camera prst="orthographicFront"/>
+          <a:lightRig rig="threePt" dir="t">
+            <a:rot lat="0" lon="0" rev="7500000"/>
+          </a:lightRig>
+        </a:scene3d>
+        <a:sp3d prstMaterial="plastic">
+          <a:bevelT w="127000" h="25400" prst="relaxedInset"/>
+        </a:sp3d>
+      </dsp:spPr>
+      <dsp:style>
+        <a:lnRef idx="1">
+          <a:scrgbClr r="0" g="0" b="0"/>
+        </a:lnRef>
+        <a:fillRef idx="3">
+          <a:scrgbClr r="0" g="0" b="0"/>
+        </a:fillRef>
+        <a:effectRef idx="2">
+          <a:scrgbClr r="0" g="0" b="0"/>
+        </a:effectRef>
+        <a:fontRef idx="minor">
+          <a:schemeClr val="lt1"/>
+        </a:fontRef>
+      </dsp:style>
+    </dsp:sp>
+    <dsp:sp modelId="{D06D9E18-85DD-4BD4-8C91-7823E934F466}">
+      <dsp:nvSpPr>
+        <dsp:cNvPr id="0" name=""/>
+        <dsp:cNvSpPr/>
+      </dsp:nvSpPr>
+      <dsp:spPr>
+        <a:xfrm>
+          <a:off x="1576485" y="801179"/>
+          <a:ext cx="1367578" cy="2461640"/>
+        </a:xfrm>
+        <a:prstGeom prst="roundRect">
+          <a:avLst>
+            <a:gd name="adj" fmla="val 50000"/>
+          </a:avLst>
+        </a:prstGeom>
+        <a:solidFill>
+          <a:schemeClr val="accent1">
+            <a:hueOff val="0"/>
+            <a:satOff val="0"/>
+            <a:lumOff val="0"/>
+            <a:alphaOff val="0"/>
+          </a:schemeClr>
+        </a:solidFill>
+        <a:ln w="6350" cap="flat">
+          <a:solidFill>
+            <a:schemeClr val="lt1">
+              <a:alpha val="0"/>
+              <a:hueOff val="0"/>
+              <a:satOff val="0"/>
+              <a:lumOff val="0"/>
+              <a:alphaOff val="0"/>
+            </a:schemeClr>
+          </a:solidFill>
+        </a:ln>
+        <a:effectLst/>
+        <a:scene3d>
+          <a:camera prst="orthographicFront"/>
+          <a:lightRig rig="threePt" dir="t">
+            <a:rot lat="0" lon="0" rev="7500000"/>
+          </a:lightRig>
+        </a:scene3d>
+        <a:sp3d prstMaterial="plastic">
+          <a:bevelT w="127000" h="25400" prst="relaxedInset"/>
+        </a:sp3d>
+      </dsp:spPr>
+      <dsp:style>
+        <a:lnRef idx="1">
+          <a:scrgbClr r="0" g="0" b="0"/>
+        </a:lnRef>
+        <a:fillRef idx="3">
+          <a:scrgbClr r="0" g="0" b="0"/>
+        </a:fillRef>
+        <a:effectRef idx="2">
+          <a:scrgbClr r="0" g="0" b="0"/>
+        </a:effectRef>
+        <a:fontRef idx="minor">
+          <a:schemeClr val="lt1"/>
+        </a:fontRef>
+      </dsp:style>
+    </dsp:sp>
+    <dsp:sp modelId="{C6F059BF-455A-4203-BA47-0D7E9F21B36D}">
+      <dsp:nvSpPr>
+        <dsp:cNvPr id="0" name=""/>
+        <dsp:cNvSpPr/>
+      </dsp:nvSpPr>
+      <dsp:spPr>
+        <a:xfrm>
+          <a:off x="1610675" y="1195042"/>
+          <a:ext cx="1299199" cy="273515"/>
+        </a:xfrm>
+        <a:prstGeom prst="rect">
+          <a:avLst/>
+        </a:prstGeom>
+        <a:noFill/>
+        <a:ln>
+          <a:noFill/>
+        </a:ln>
+        <a:effectLst/>
+      </dsp:spPr>
+      <dsp:style>
+        <a:lnRef idx="0">
+          <a:scrgbClr r="0" g="0" b="0"/>
+        </a:lnRef>
+        <a:fillRef idx="0">
+          <a:scrgbClr r="0" g="0" b="0"/>
+        </a:fillRef>
+        <a:effectRef idx="0">
+          <a:scrgbClr r="0" g="0" b="0"/>
+        </a:effectRef>
+        <a:fontRef idx="minor">
+          <a:schemeClr val="lt1"/>
+        </a:fontRef>
+      </dsp:style>
+      <dsp:txBody>
+        <a:bodyPr spcFirstLastPara="0" vert="horz" wrap="square" lIns="0" tIns="0" rIns="0" bIns="0" numCol="1" spcCol="1270" anchor="b" anchorCtr="0">
+          <a:noAutofit/>
+        </a:bodyPr>
+        <a:lstStyle/>
+        <a:p>
+          <a:pPr marL="0" lvl="0" indent="0" algn="ctr" defTabSz="800100">
+            <a:lnSpc>
+              <a:spcPct val="90000"/>
+            </a:lnSpc>
+            <a:spcBef>
+              <a:spcPct val="0"/>
+            </a:spcBef>
+            <a:spcAft>
+              <a:spcPct val="35000"/>
+            </a:spcAft>
+            <a:buNone/>
+            <a:defRPr b="1"/>
+          </a:pPr>
+          <a:endParaRPr lang="zh-CN" altLang="en-US" sz="1800" kern="1200"/>
+        </a:p>
+      </dsp:txBody>
+      <dsp:txXfrm>
+        <a:off x="1610675" y="1195042"/>
+        <a:ext cx="1299199" cy="273515"/>
+      </dsp:txXfrm>
+    </dsp:sp>
+    <dsp:sp modelId="{0E2C2A39-B8CF-44B5-9C8E-A0AD5FE91AD8}">
+      <dsp:nvSpPr>
+        <dsp:cNvPr id="0" name=""/>
+        <dsp:cNvSpPr/>
+      </dsp:nvSpPr>
+      <dsp:spPr>
+        <a:xfrm>
+          <a:off x="1610675" y="1468557"/>
+          <a:ext cx="1299199" cy="202401"/>
+        </a:xfrm>
+        <a:prstGeom prst="rect">
+          <a:avLst/>
+        </a:prstGeom>
+        <a:noFill/>
+        <a:ln>
+          <a:noFill/>
+        </a:ln>
+        <a:effectLst/>
+      </dsp:spPr>
+      <dsp:style>
+        <a:lnRef idx="0">
+          <a:scrgbClr r="0" g="0" b="0"/>
+        </a:lnRef>
+        <a:fillRef idx="0">
+          <a:scrgbClr r="0" g="0" b="0"/>
+        </a:fillRef>
+        <a:effectRef idx="0">
+          <a:scrgbClr r="0" g="0" b="0"/>
+        </a:effectRef>
+        <a:fontRef idx="minor">
+          <a:schemeClr val="lt1"/>
+        </a:fontRef>
+      </dsp:style>
+      <dsp:txBody>
+        <a:bodyPr spcFirstLastPara="0" vert="horz" wrap="square" lIns="0" tIns="0" rIns="0" bIns="0" numCol="1" spcCol="1270" anchor="b" anchorCtr="0">
+          <a:noAutofit/>
+        </a:bodyPr>
+        <a:lstStyle/>
+        <a:p>
+          <a:pPr marL="0" lvl="0" indent="0" algn="ctr" defTabSz="622300">
+            <a:lnSpc>
+              <a:spcPct val="90000"/>
+            </a:lnSpc>
+            <a:spcBef>
+              <a:spcPct val="0"/>
+            </a:spcBef>
+            <a:spcAft>
+              <a:spcPct val="35000"/>
+            </a:spcAft>
+            <a:buNone/>
+          </a:pPr>
+          <a:endParaRPr lang="zh-CN" altLang="en-US" sz="1400" kern="1200"/>
+        </a:p>
+      </dsp:txBody>
+      <dsp:txXfrm>
+        <a:off x="1610675" y="1468557"/>
+        <a:ext cx="1299199" cy="202401"/>
+      </dsp:txXfrm>
+    </dsp:sp>
+    <dsp:sp modelId="{6C2E8EDF-30E0-43D2-A1E5-3EC22C4CCD81}">
+      <dsp:nvSpPr>
+        <dsp:cNvPr id="0" name=""/>
+        <dsp:cNvSpPr/>
+      </dsp:nvSpPr>
+      <dsp:spPr>
+        <a:xfrm>
+          <a:off x="1576485" y="1895242"/>
+          <a:ext cx="1367578" cy="1367578"/>
+        </a:xfrm>
+        <a:prstGeom prst="ellipse">
+          <a:avLst/>
+        </a:prstGeom>
+        <a:solidFill>
+          <a:schemeClr val="accent1">
+            <a:tint val="75000"/>
+            <a:hueOff val="0"/>
+            <a:satOff val="0"/>
+            <a:lumOff val="0"/>
+            <a:alphaOff val="0"/>
+          </a:schemeClr>
+        </a:solidFill>
+        <a:ln w="6350" cap="flat">
+          <a:solidFill>
+            <a:schemeClr val="lt1">
+              <a:alpha val="0"/>
+              <a:hueOff val="0"/>
+              <a:satOff val="0"/>
+              <a:lumOff val="0"/>
+              <a:alphaOff val="0"/>
+            </a:schemeClr>
+          </a:solidFill>
+        </a:ln>
+        <a:effectLst/>
+        <a:scene3d>
+          <a:camera prst="orthographicFront"/>
+          <a:lightRig rig="threePt" dir="t">
+            <a:rot lat="0" lon="0" rev="7500000"/>
+          </a:lightRig>
+        </a:scene3d>
+        <a:sp3d prstMaterial="plastic">
+          <a:bevelT w="127000" h="25400" prst="relaxedInset"/>
+        </a:sp3d>
+      </dsp:spPr>
+      <dsp:style>
+        <a:lnRef idx="1">
+          <a:scrgbClr r="0" g="0" b="0"/>
+        </a:lnRef>
+        <a:fillRef idx="3">
+          <a:scrgbClr r="0" g="0" b="0"/>
+        </a:fillRef>
+        <a:effectRef idx="2">
+          <a:scrgbClr r="0" g="0" b="0"/>
+        </a:effectRef>
+        <a:fontRef idx="minor">
+          <a:schemeClr val="lt1"/>
+        </a:fontRef>
+      </dsp:style>
+    </dsp:sp>
+    <dsp:sp modelId="{D13812A0-E70C-4DF3-8080-C0B65E045ACF}">
+      <dsp:nvSpPr>
+        <dsp:cNvPr id="0" name=""/>
+        <dsp:cNvSpPr/>
+      </dsp:nvSpPr>
+      <dsp:spPr>
+        <a:xfrm>
+          <a:off x="3151935" y="801179"/>
+          <a:ext cx="1367578" cy="2461640"/>
+        </a:xfrm>
+        <a:prstGeom prst="roundRect">
+          <a:avLst>
+            <a:gd name="adj" fmla="val 50000"/>
+          </a:avLst>
+        </a:prstGeom>
+        <a:solidFill>
+          <a:schemeClr val="accent1">
+            <a:hueOff val="0"/>
+            <a:satOff val="0"/>
+            <a:lumOff val="0"/>
+            <a:alphaOff val="0"/>
+          </a:schemeClr>
+        </a:solidFill>
+        <a:ln w="6350" cap="flat">
+          <a:solidFill>
+            <a:schemeClr val="lt1">
+              <a:alpha val="0"/>
+              <a:hueOff val="0"/>
+              <a:satOff val="0"/>
+              <a:lumOff val="0"/>
+              <a:alphaOff val="0"/>
+            </a:schemeClr>
+          </a:solidFill>
+        </a:ln>
+        <a:effectLst/>
+        <a:scene3d>
+          <a:camera prst="orthographicFront"/>
+          <a:lightRig rig="threePt" dir="t">
+            <a:rot lat="0" lon="0" rev="7500000"/>
+          </a:lightRig>
+        </a:scene3d>
+        <a:sp3d prstMaterial="plastic">
+          <a:bevelT w="127000" h="25400" prst="relaxedInset"/>
+        </a:sp3d>
+      </dsp:spPr>
+      <dsp:style>
+        <a:lnRef idx="1">
+          <a:scrgbClr r="0" g="0" b="0"/>
+        </a:lnRef>
+        <a:fillRef idx="3">
+          <a:scrgbClr r="0" g="0" b="0"/>
+        </a:fillRef>
+        <a:effectRef idx="2">
+          <a:scrgbClr r="0" g="0" b="0"/>
+        </a:effectRef>
+        <a:fontRef idx="minor">
+          <a:schemeClr val="lt1"/>
+        </a:fontRef>
+      </dsp:style>
+    </dsp:sp>
+    <dsp:sp modelId="{E7E0EF7E-E4A4-45DF-B163-A8281D2E72C5}">
+      <dsp:nvSpPr>
+        <dsp:cNvPr id="0" name=""/>
+        <dsp:cNvSpPr/>
+      </dsp:nvSpPr>
+      <dsp:spPr>
+        <a:xfrm>
+          <a:off x="3186125" y="1195042"/>
+          <a:ext cx="1299199" cy="273515"/>
+        </a:xfrm>
+        <a:prstGeom prst="rect">
+          <a:avLst/>
+        </a:prstGeom>
+        <a:noFill/>
+        <a:ln>
+          <a:noFill/>
+        </a:ln>
+        <a:effectLst/>
+      </dsp:spPr>
+      <dsp:style>
+        <a:lnRef idx="0">
+          <a:scrgbClr r="0" g="0" b="0"/>
+        </a:lnRef>
+        <a:fillRef idx="0">
+          <a:scrgbClr r="0" g="0" b="0"/>
+        </a:fillRef>
+        <a:effectRef idx="0">
+          <a:scrgbClr r="0" g="0" b="0"/>
+        </a:effectRef>
+        <a:fontRef idx="minor">
+          <a:schemeClr val="lt1"/>
+        </a:fontRef>
+      </dsp:style>
+      <dsp:txBody>
+        <a:bodyPr spcFirstLastPara="0" vert="horz" wrap="square" lIns="0" tIns="0" rIns="0" bIns="0" numCol="1" spcCol="1270" anchor="b" anchorCtr="0">
+          <a:noAutofit/>
+        </a:bodyPr>
+        <a:lstStyle/>
+        <a:p>
+          <a:pPr marL="0" lvl="0" indent="0" algn="ctr" defTabSz="800100">
+            <a:lnSpc>
+              <a:spcPct val="90000"/>
+            </a:lnSpc>
+            <a:spcBef>
+              <a:spcPct val="0"/>
+            </a:spcBef>
+            <a:spcAft>
+              <a:spcPct val="35000"/>
+            </a:spcAft>
+            <a:buNone/>
+            <a:defRPr b="1"/>
+          </a:pPr>
+          <a:endParaRPr lang="zh-CN" altLang="en-US" sz="1800" kern="1200"/>
+        </a:p>
+      </dsp:txBody>
+      <dsp:txXfrm>
+        <a:off x="3186125" y="1195042"/>
+        <a:ext cx="1299199" cy="273515"/>
+      </dsp:txXfrm>
+    </dsp:sp>
+    <dsp:sp modelId="{DCB9F7A7-F5C0-468D-B476-6066461FC8B0}">
+      <dsp:nvSpPr>
+        <dsp:cNvPr id="0" name=""/>
+        <dsp:cNvSpPr/>
+      </dsp:nvSpPr>
+      <dsp:spPr>
+        <a:xfrm>
+          <a:off x="3186125" y="1468557"/>
+          <a:ext cx="1299199" cy="202401"/>
+        </a:xfrm>
+        <a:prstGeom prst="rect">
+          <a:avLst/>
+        </a:prstGeom>
+        <a:noFill/>
+        <a:ln>
+          <a:noFill/>
+        </a:ln>
+        <a:effectLst/>
+      </dsp:spPr>
+      <dsp:style>
+        <a:lnRef idx="0">
+          <a:scrgbClr r="0" g="0" b="0"/>
+        </a:lnRef>
+        <a:fillRef idx="0">
+          <a:scrgbClr r="0" g="0" b="0"/>
+        </a:fillRef>
+        <a:effectRef idx="0">
+          <a:scrgbClr r="0" g="0" b="0"/>
+        </a:effectRef>
+        <a:fontRef idx="minor">
+          <a:schemeClr val="lt1"/>
+        </a:fontRef>
+      </dsp:style>
+      <dsp:txBody>
+        <a:bodyPr spcFirstLastPara="0" vert="horz" wrap="square" lIns="0" tIns="0" rIns="0" bIns="0" numCol="1" spcCol="1270" anchor="b" anchorCtr="0">
+          <a:noAutofit/>
+        </a:bodyPr>
+        <a:lstStyle/>
+        <a:p>
+          <a:pPr marL="0" lvl="0" indent="0" algn="ctr" defTabSz="622300">
+            <a:lnSpc>
+              <a:spcPct val="90000"/>
+            </a:lnSpc>
+            <a:spcBef>
+              <a:spcPct val="0"/>
+            </a:spcBef>
+            <a:spcAft>
+              <a:spcPct val="35000"/>
+            </a:spcAft>
+            <a:buNone/>
+          </a:pPr>
+          <a:endParaRPr lang="zh-CN" altLang="en-US" sz="1400" kern="1200"/>
+        </a:p>
+      </dsp:txBody>
+      <dsp:txXfrm>
+        <a:off x="3186125" y="1468557"/>
+        <a:ext cx="1299199" cy="202401"/>
+      </dsp:txXfrm>
+    </dsp:sp>
+    <dsp:sp modelId="{2B678B5E-9C5A-4F3C-A4B5-A12DD3464D62}">
+      <dsp:nvSpPr>
+        <dsp:cNvPr id="0" name=""/>
+        <dsp:cNvSpPr/>
+      </dsp:nvSpPr>
+      <dsp:spPr>
+        <a:xfrm>
+          <a:off x="3151935" y="1895242"/>
+          <a:ext cx="1367578" cy="1367578"/>
+        </a:xfrm>
+        <a:prstGeom prst="ellipse">
+          <a:avLst/>
+        </a:prstGeom>
+        <a:solidFill>
+          <a:schemeClr val="accent1">
+            <a:tint val="75000"/>
+            <a:hueOff val="0"/>
+            <a:satOff val="0"/>
+            <a:lumOff val="0"/>
+            <a:alphaOff val="0"/>
+          </a:schemeClr>
+        </a:solidFill>
+        <a:ln w="6350" cap="flat">
+          <a:solidFill>
+            <a:schemeClr val="lt1">
+              <a:alpha val="0"/>
+              <a:hueOff val="0"/>
+              <a:satOff val="0"/>
+              <a:lumOff val="0"/>
+              <a:alphaOff val="0"/>
+            </a:schemeClr>
+          </a:solidFill>
+        </a:ln>
+        <a:effectLst/>
+        <a:scene3d>
+          <a:camera prst="orthographicFront"/>
+          <a:lightRig rig="threePt" dir="t">
+            <a:rot lat="0" lon="0" rev="7500000"/>
+          </a:lightRig>
+        </a:scene3d>
+        <a:sp3d prstMaterial="plastic">
+          <a:bevelT w="127000" h="25400" prst="relaxedInset"/>
+        </a:sp3d>
+      </dsp:spPr>
+      <dsp:style>
+        <a:lnRef idx="1">
+          <a:scrgbClr r="0" g="0" b="0"/>
+        </a:lnRef>
+        <a:fillRef idx="3">
+          <a:scrgbClr r="0" g="0" b="0"/>
+        </a:fillRef>
+        <a:effectRef idx="2">
+          <a:scrgbClr r="0" g="0" b="0"/>
+        </a:effectRef>
+        <a:fontRef idx="minor">
+          <a:schemeClr val="lt1"/>
+        </a:fontRef>
+      </dsp:style>
+    </dsp:sp>
+    <dsp:sp modelId="{87ADB2A3-A382-4867-AA58-B5ECCC7D1A98}">
+      <dsp:nvSpPr>
+        <dsp:cNvPr id="0" name=""/>
+        <dsp:cNvSpPr/>
+      </dsp:nvSpPr>
+      <dsp:spPr>
+        <a:xfrm>
+          <a:off x="4727385" y="801179"/>
+          <a:ext cx="1367578" cy="2461640"/>
+        </a:xfrm>
+        <a:prstGeom prst="roundRect">
+          <a:avLst>
+            <a:gd name="adj" fmla="val 50000"/>
+          </a:avLst>
+        </a:prstGeom>
+        <a:solidFill>
+          <a:schemeClr val="accent1">
+            <a:hueOff val="0"/>
+            <a:satOff val="0"/>
+            <a:lumOff val="0"/>
+            <a:alphaOff val="0"/>
+          </a:schemeClr>
+        </a:solidFill>
+        <a:ln w="6350" cap="flat">
+          <a:solidFill>
+            <a:schemeClr val="lt1">
+              <a:alpha val="0"/>
+              <a:hueOff val="0"/>
+              <a:satOff val="0"/>
+              <a:lumOff val="0"/>
+              <a:alphaOff val="0"/>
+            </a:schemeClr>
+          </a:solidFill>
+        </a:ln>
+        <a:effectLst/>
+        <a:scene3d>
+          <a:camera prst="orthographicFront"/>
+          <a:lightRig rig="threePt" dir="t">
+            <a:rot lat="0" lon="0" rev="7500000"/>
+          </a:lightRig>
+        </a:scene3d>
+        <a:sp3d prstMaterial="plastic">
+          <a:bevelT w="127000" h="25400" prst="relaxedInset"/>
+        </a:sp3d>
+      </dsp:spPr>
+      <dsp:style>
+        <a:lnRef idx="1">
+          <a:scrgbClr r="0" g="0" b="0"/>
+        </a:lnRef>
+        <a:fillRef idx="3">
+          <a:scrgbClr r="0" g="0" b="0"/>
+        </a:fillRef>
+        <a:effectRef idx="2">
+          <a:scrgbClr r="0" g="0" b="0"/>
+        </a:effectRef>
+        <a:fontRef idx="minor">
+          <a:schemeClr val="lt1"/>
+        </a:fontRef>
+      </dsp:style>
+    </dsp:sp>
+    <dsp:sp modelId="{4146AABC-EE3D-42DA-8364-BA3D59A4B097}">
+      <dsp:nvSpPr>
+        <dsp:cNvPr id="0" name=""/>
+        <dsp:cNvSpPr/>
+      </dsp:nvSpPr>
+      <dsp:spPr>
+        <a:xfrm>
+          <a:off x="4761575" y="1195042"/>
+          <a:ext cx="1299199" cy="273515"/>
+        </a:xfrm>
+        <a:prstGeom prst="rect">
+          <a:avLst/>
+        </a:prstGeom>
+        <a:noFill/>
+        <a:ln>
+          <a:noFill/>
+        </a:ln>
+        <a:effectLst/>
+      </dsp:spPr>
+      <dsp:style>
+        <a:lnRef idx="0">
+          <a:scrgbClr r="0" g="0" b="0"/>
+        </a:lnRef>
+        <a:fillRef idx="0">
+          <a:scrgbClr r="0" g="0" b="0"/>
+        </a:fillRef>
+        <a:effectRef idx="0">
+          <a:scrgbClr r="0" g="0" b="0"/>
+        </a:effectRef>
+        <a:fontRef idx="minor">
+          <a:schemeClr val="lt1"/>
+        </a:fontRef>
+      </dsp:style>
+      <dsp:txBody>
+        <a:bodyPr spcFirstLastPara="0" vert="horz" wrap="square" lIns="0" tIns="0" rIns="0" bIns="0" numCol="1" spcCol="1270" anchor="b" anchorCtr="0">
+          <a:noAutofit/>
+        </a:bodyPr>
+        <a:lstStyle/>
+        <a:p>
+          <a:pPr marL="0" lvl="0" indent="0" algn="ctr" defTabSz="800100">
+            <a:lnSpc>
+              <a:spcPct val="90000"/>
+            </a:lnSpc>
+            <a:spcBef>
+              <a:spcPct val="0"/>
+            </a:spcBef>
+            <a:spcAft>
+              <a:spcPct val="35000"/>
+            </a:spcAft>
+            <a:buNone/>
+            <a:defRPr b="1"/>
+          </a:pPr>
+          <a:endParaRPr lang="zh-CN" altLang="en-US" sz="1800" kern="1200"/>
+        </a:p>
+      </dsp:txBody>
+      <dsp:txXfrm>
+        <a:off x="4761575" y="1195042"/>
+        <a:ext cx="1299199" cy="273515"/>
+      </dsp:txXfrm>
+    </dsp:sp>
+    <dsp:sp modelId="{B23EAF24-E640-4633-BF03-1716875557B2}">
+      <dsp:nvSpPr>
+        <dsp:cNvPr id="0" name=""/>
+        <dsp:cNvSpPr/>
+      </dsp:nvSpPr>
+      <dsp:spPr>
+        <a:xfrm>
+          <a:off x="4761575" y="1468557"/>
+          <a:ext cx="1299199" cy="202401"/>
+        </a:xfrm>
+        <a:prstGeom prst="rect">
+          <a:avLst/>
+        </a:prstGeom>
+        <a:noFill/>
+        <a:ln>
+          <a:noFill/>
+        </a:ln>
+        <a:effectLst/>
+      </dsp:spPr>
+      <dsp:style>
+        <a:lnRef idx="0">
+          <a:scrgbClr r="0" g="0" b="0"/>
+        </a:lnRef>
+        <a:fillRef idx="0">
+          <a:scrgbClr r="0" g="0" b="0"/>
+        </a:fillRef>
+        <a:effectRef idx="0">
+          <a:scrgbClr r="0" g="0" b="0"/>
+        </a:effectRef>
+        <a:fontRef idx="minor">
+          <a:schemeClr val="lt1"/>
+        </a:fontRef>
+      </dsp:style>
+      <dsp:txBody>
+        <a:bodyPr spcFirstLastPara="0" vert="horz" wrap="square" lIns="0" tIns="0" rIns="0" bIns="0" numCol="1" spcCol="1270" anchor="b" anchorCtr="0">
+          <a:noAutofit/>
+        </a:bodyPr>
+        <a:lstStyle/>
+        <a:p>
+          <a:pPr marL="0" lvl="0" indent="0" algn="ctr" defTabSz="622300">
+            <a:lnSpc>
+              <a:spcPct val="90000"/>
+            </a:lnSpc>
+            <a:spcBef>
+              <a:spcPct val="0"/>
+            </a:spcBef>
+            <a:spcAft>
+              <a:spcPct val="35000"/>
+            </a:spcAft>
+            <a:buNone/>
+          </a:pPr>
+          <a:endParaRPr lang="zh-CN" altLang="en-US" sz="1400" kern="1200"/>
+        </a:p>
+      </dsp:txBody>
+      <dsp:txXfrm>
+        <a:off x="4761575" y="1468557"/>
+        <a:ext cx="1299199" cy="202401"/>
+      </dsp:txXfrm>
+    </dsp:sp>
+    <dsp:sp modelId="{D3293C81-DDA6-41DD-94D9-8642CE9ED5F9}">
+      <dsp:nvSpPr>
+        <dsp:cNvPr id="0" name=""/>
+        <dsp:cNvSpPr/>
+      </dsp:nvSpPr>
+      <dsp:spPr>
+        <a:xfrm>
+          <a:off x="4727385" y="1895242"/>
+          <a:ext cx="1367578" cy="1367578"/>
+        </a:xfrm>
+        <a:prstGeom prst="ellipse">
+          <a:avLst/>
+        </a:prstGeom>
+        <a:solidFill>
+          <a:schemeClr val="accent1">
+            <a:tint val="75000"/>
+            <a:hueOff val="0"/>
+            <a:satOff val="0"/>
+            <a:lumOff val="0"/>
+            <a:alphaOff val="0"/>
+          </a:schemeClr>
+        </a:solidFill>
+        <a:ln w="6350" cap="flat">
+          <a:solidFill>
+            <a:schemeClr val="lt1">
+              <a:alpha val="0"/>
+              <a:hueOff val="0"/>
+              <a:satOff val="0"/>
+              <a:lumOff val="0"/>
+              <a:alphaOff val="0"/>
+            </a:schemeClr>
+          </a:solidFill>
+        </a:ln>
+        <a:effectLst/>
+        <a:scene3d>
+          <a:camera prst="orthographicFront"/>
+          <a:lightRig rig="threePt" dir="t">
+            <a:rot lat="0" lon="0" rev="7500000"/>
+          </a:lightRig>
+        </a:scene3d>
+        <a:sp3d prstMaterial="plastic">
+          <a:bevelT w="127000" h="25400" prst="relaxedInset"/>
+        </a:sp3d>
+      </dsp:spPr>
+      <dsp:style>
+        <a:lnRef idx="1">
+          <a:scrgbClr r="0" g="0" b="0"/>
+        </a:lnRef>
+        <a:fillRef idx="3">
+          <a:scrgbClr r="0" g="0" b="0"/>
+        </a:fillRef>
+        <a:effectRef idx="2">
+          <a:scrgbClr r="0" g="0" b="0"/>
+        </a:effectRef>
+        <a:fontRef idx="minor">
+          <a:schemeClr val="lt1"/>
+        </a:fontRef>
+      </dsp:style>
+    </dsp:sp>
+  </dsp:spTree>
+</dsp:drawing>
+</file>
+
+<file path=ppt/diagrams/layout1.xml><?xml version="1.0" encoding="utf-8"?>
+<dgm:layoutDef xmlns:dgm="http://schemas.openxmlformats.org/drawingml/2006/diagram" xmlns:a="http://schemas.openxmlformats.org/drawingml/2006/main" uniqueId="urn:microsoft.com/office/officeart/2024/layout/MeetTheTeamCardVertical">
+  <dgm:title val=""/>
+  <dgm:desc val=""/>
+  <dgm:catLst>
+    <dgm:cat type="meettheteam" pri="102"/>
+    <dgm:cat type="pictureconvert" pri="33000"/>
+  </dgm:catLst>
+  <dgm:sampData>
+    <dgm:dataModel>
+      <dgm:ptLst>
+        <dgm:pt modelId="0" type="doc"/>
+        <dgm:pt modelId="10">
+          <dgm:prSet phldrT="Name" phldr="1"/>
+        </dgm:pt>
+        <dgm:pt modelId="11">
+          <dgm:prSet phldrT="Role" phldr="1"/>
+        </dgm:pt>
+        <dgm:pt modelId="20">
+          <dgm:prSet phldrT="Name" phldr="1"/>
+        </dgm:pt>
+        <dgm:pt modelId="21">
+          <dgm:prSet phldrT="Role" phldr="1"/>
+        </dgm:pt>
+        <dgm:pt modelId="30">
+          <dgm:prSet phldrT="Name" phldr="1"/>
+        </dgm:pt>
+        <dgm:pt modelId="31">
+          <dgm:prSet phldrT="Role" phldr="1"/>
+        </dgm:pt>
+        <dgm:pt modelId="40">
+          <dgm:prSet phldrT="Name" phldr="1"/>
+        </dgm:pt>
+        <dgm:pt modelId="41">
+          <dgm:prSet phldrT="Role" phldr="1"/>
+        </dgm:pt>
+      </dgm:ptLst>
+      <dgm:cxnLst>
+        <dgm:cxn modelId="100" srcId="0" destId="10" srcOrd="0" destOrd="0"/>
+        <dgm:cxn modelId="101" srcId="10" destId="11" srcOrd="0" destOrd="0"/>
+        <dgm:cxn modelId="102" srcId="0" destId="20" srcOrd="1" destOrd="0"/>
+        <dgm:cxn modelId="103" srcId="20" destId="21" srcOrd="0" destOrd="0"/>
+        <dgm:cxn modelId="104" srcId="0" destId="30" srcOrd="2" destOrd="0"/>
+        <dgm:cxn modelId="105" srcId="30" destId="31" srcOrd="0" destOrd="0"/>
+        <dgm:cxn modelId="106" srcId="0" destId="40" srcOrd="3" destOrd="0"/>
+        <dgm:cxn modelId="107" srcId="40" destId="41" srcOrd="0" destOrd="0"/>
+      </dgm:cxnLst>
+      <dgm:bg/>
+      <dgm:whole/>
+    </dgm:dataModel>
+  </dgm:sampData>
+  <dgm:styleData useDef="1">
+    <dgm:dataModel>
+      <dgm:ptLst/>
+      <dgm:bg/>
+      <dgm:whole/>
+    </dgm:dataModel>
+  </dgm:styleData>
+  <dgm:clrData useDef="1">
+    <dgm:dataModel>
+      <dgm:ptLst/>
+      <dgm:bg/>
+      <dgm:whole/>
+    </dgm:dataModel>
+  </dgm:clrData>
+  <dgm:layoutNode name="root">
+    <dgm:varLst>
+      <dgm:dir/>
+      <dgm:resizeHandles val="exact"/>
+    </dgm:varLst>
+    <dgm:choose name="Name0">
+      <dgm:if name="Name1" axis="self" func="var" arg="dir" op="equ" val="norm">
+        <dgm:alg type="snake">
+          <dgm:param type="grDir" val="tL"/>
+          <dgm:param type="flowDir" val="row"/>
+          <dgm:param type="contDir" val="sameDir"/>
+          <dgm:param type="off" val="ctr"/>
+          <dgm:param type="vertAlign" val="mid"/>
+          <dgm:param type="horzAlign" val="ctr"/>
+        </dgm:alg>
+      </dgm:if>
+      <dgm:else name="Name2">
+        <dgm:alg type="snake">
+          <dgm:param type="grDir" val="tR"/>
+          <dgm:param type="flowDir" val="row"/>
+          <dgm:param type="contDir" val="sameDir"/>
+          <dgm:param type="off" val="ctr"/>
+          <dgm:param type="vertAlign" val="mid"/>
+          <dgm:param type="horzAlign" val="ctr"/>
+        </dgm:alg>
+      </dgm:else>
+    </dgm:choose>
+    <dgm:shape xmlns:r="http://schemas.openxmlformats.org/officeDocument/2006/relationships" r:blip="">
+      <dgm:adjLst/>
+    </dgm:shape>
+    <dgm:presOf/>
+    <dgm:choose name="Name3">
+      <dgm:if name="Name4" axis="ch" ptType="node" func="cnt" op="lte" val="2">
+        <dgm:constrLst>
+          <dgm:constr type="h" for="ch" forName="compNode" refType="h" fact="0.4"/>
+          <dgm:constr type="w" for="ch" forName="compNode" val="100"/>
+          <dgm:constr type="w" for="ch" forName="sibTrans" refType="w" refFor="ch" refForName="compNode" fact="0.152"/>
+          <dgm:constr type="sp" refType="w" refFor="ch" refForName="compNode" op="equ" fact="0.25"/>
+          <dgm:constr type="primFontSz" for="des" forName="nameText" op="equ" val="18"/>
+          <dgm:constr type="primFontSz" for="des" forName="roleText" op="equ" val="14"/>
+          <dgm:constr type="h" for="des" forName="compNode" op="equ"/>
+          <dgm:constr type="h" for="des" forName="nameText" op="equ"/>
+          <dgm:constr type="h" for="des" forName="roleText" op="equ"/>
+        </dgm:constrLst>
+      </dgm:if>
+      <dgm:if name="Name5" axis="ch" ptType="node" func="cnt" op="lte" val="3">
+        <dgm:constrLst>
+          <dgm:constr type="h" for="ch" forName="compNode" refType="h" fact="0.4"/>
+          <dgm:constr type="w" for="ch" forName="compNode" val="100"/>
+          <dgm:constr type="w" for="ch" forName="sibTrans" refType="w" refFor="ch" refForName="compNode" fact="0.152"/>
+          <dgm:constr type="sp" refType="w" refFor="ch" refForName="compNode" op="equ" fact="0.25"/>
+          <dgm:constr type="primFontSz" for="des" forName="nameText" op="equ" val="18"/>
+          <dgm:constr type="primFontSz" for="des" forName="roleText" op="equ" val="14"/>
+          <dgm:constr type="h" for="des" forName="compNode" op="equ"/>
+          <dgm:constr type="h" for="des" forName="nameText" op="equ"/>
+          <dgm:constr type="h" for="des" forName="roleText" op="equ"/>
+        </dgm:constrLst>
+      </dgm:if>
+      <dgm:if name="Name6" axis="ch" ptType="node" func="cnt" op="lte" val="4">
+        <dgm:constrLst>
+          <dgm:constr type="h" for="ch" forName="compNode" refType="h" fact="0.4"/>
+          <dgm:constr type="w" for="ch" forName="compNode" refType="w"/>
+          <dgm:constr type="w" for="ch" forName="sibTrans" refType="w" refFor="ch" refForName="compNode" fact="0.152"/>
+          <dgm:constr type="sp" refType="w" refFor="ch" refForName="compNode" op="equ" fact="0.25"/>
+          <dgm:constr type="primFontSz" for="des" forName="nameText" op="equ" val="18"/>
+          <dgm:constr type="primFontSz" for="des" forName="roleText" op="equ" val="14"/>
+          <dgm:constr type="h" for="des" forName="compNode" op="equ"/>
+          <dgm:constr type="h" for="des" forName="nameText" op="equ"/>
+          <dgm:constr type="h" for="des" forName="roleText" op="equ"/>
+        </dgm:constrLst>
+      </dgm:if>
+      <dgm:else name="Name7">
+        <dgm:constrLst>
+          <dgm:constr type="h" for="ch" forName="compNode" refType="h" fact="0.4"/>
+          <dgm:constr type="w" for="ch" forName="compNode" refType="w"/>
+          <dgm:constr type="w" for="ch" forName="sibTrans" refType="w" refFor="ch" refForName="compNode" fact="0.152"/>
+          <dgm:constr type="sp" refType="w" refFor="ch" refForName="compNode" op="equ" fact="0.25"/>
+          <dgm:constr type="primFontSz" for="des" forName="nameText" op="equ" val="18"/>
+          <dgm:constr type="primFontSz" for="des" forName="roleText" op="equ" val="14"/>
+          <dgm:constr type="h" for="des" forName="compNode" op="equ"/>
+          <dgm:constr type="h" for="des" forName="nameText" op="equ"/>
+          <dgm:constr type="h" for="des" forName="roleText" op="equ"/>
+        </dgm:constrLst>
+      </dgm:else>
+    </dgm:choose>
+    <dgm:ruleLst>
+      <dgm:rule type="w" for="ch" forName="compNode" val="50" fact="NaN" max="NaN"/>
+    </dgm:ruleLst>
+    <dgm:forEach name="Name8" axis="ch" ptType="node">
+      <dgm:layoutNode name="compNode">
+        <dgm:alg type="composite"/>
+        <dgm:shape xmlns:r="http://schemas.openxmlformats.org/officeDocument/2006/relationships" r:blip="">
+          <dgm:adjLst/>
+        </dgm:shape>
+        <dgm:presOf axis="self"/>
+        <dgm:constrLst>
+          <dgm:constr type="w" for="ch" forName="bgCard" refType="w"/>
+          <dgm:constr type="h" for="ch" forName="bgCard" refType="w" refFor="ch" refForName="bgCard" fact="1.8"/>
+          <dgm:constr type="t" for="ch" forName="bgCard"/>
+          <dgm:constr type="l" for="ch" forName="bgCard"/>
+          <dgm:constr type="w" for="ch" forName="nameText" refType="w" fact="0.95"/>
+          <dgm:constr type="h" for="ch" forName="nameText" val="10"/>
+          <dgm:constr type="ctrX" for="ch" forName="nameText" refType="w" fact="0.5"/>
+          <dgm:constr type="t" for="ch" forName="nameText" refType="h" refFor="ch" refForName="bgCard" fact="0.16"/>
+          <dgm:constr type="w" for="ch" forName="roleText" refType="w" fact="0.95"/>
+          <dgm:constr type="h" for="ch" forName="roleText" val="7.4"/>
+          <dgm:constr type="ctrX" for="ch" forName="roleText" refType="w" fact="0.5"/>
+          <dgm:constr type="t" for="ch" forName="roleText" refType="b" refFor="ch" refForName="nameText"/>
+          <dgm:constr type="w" for="ch" forName="photoCircle" refType="w"/>
+          <dgm:constr type="h" for="ch" forName="photoCircle" refType="w" refFor="ch" refForName="photoCircle"/>
+          <dgm:constr type="ctrX" for="ch" forName="photoCircle" refType="w" fact="0.5"/>
+          <dgm:constr type="b" for="ch" forName="photoCircle" refType="b" refFor="ch" refForName="bgCard"/>
+        </dgm:constrLst>
+        <dgm:ruleLst>
+          <dgm:rule type="h" val="INF" fact="NaN" max="NaN"/>
+        </dgm:ruleLst>
+        <dgm:layoutNode name="bgCard" styleLbl="node1NoLn">
+          <dgm:alg type="sp"/>
+          <dgm:shape xmlns:r="http://schemas.openxmlformats.org/officeDocument/2006/relationships" type="roundRect" r:blip="">
+            <dgm:adjLst>
+              <dgm:adj idx="1" val="0.5"/>
+            </dgm:adjLst>
+          </dgm:shape>
+          <dgm:presOf/>
+          <dgm:constrLst/>
+          <dgm:ruleLst/>
+        </dgm:layoutNode>
+        <dgm:layoutNode name="nameText" styleLbl="revTxLt">
+          <dgm:varLst>
+            <dgm:chMax val="1"/>
+            <dgm:chPref val="1"/>
+          </dgm:varLst>
+          <dgm:alg type="tx">
+            <dgm:param type="txAnchorVert" val="b"/>
+            <dgm:param type="txAnchorHorzCh" val="ctr"/>
+          </dgm:alg>
+          <dgm:shape xmlns:r="http://schemas.openxmlformats.org/officeDocument/2006/relationships" type="rect" r:blip="">
+            <dgm:adjLst/>
+          </dgm:shape>
+          <dgm:presOf axis="self" ptType="node"/>
+          <dgm:constrLst>
+            <dgm:constr type="lMarg"/>
+            <dgm:constr type="rMarg"/>
+            <dgm:constr type="tMarg"/>
+            <dgm:constr type="bMarg"/>
+          </dgm:constrLst>
+          <dgm:ruleLst>
+            <dgm:rule type="primFontSz" val="5" fact="NaN" max="NaN"/>
+            <dgm:rule type="h" val="INF" fact="NaN" max="NaN"/>
+          </dgm:ruleLst>
+        </dgm:layoutNode>
+        <dgm:layoutNode name="roleText" styleLbl="revTxLt">
+          <dgm:varLst>
+            <dgm:chMax val="0"/>
+          </dgm:varLst>
+          <dgm:alg type="tx">
+            <dgm:param type="txAnchorVert" val="b"/>
+            <dgm:param type="txAnchorHorzCh" val="ctr"/>
+          </dgm:alg>
+          <dgm:shape xmlns:r="http://schemas.openxmlformats.org/officeDocument/2006/relationships" type="rect" r:blip="">
+            <dgm:adjLst/>
+          </dgm:shape>
+          <dgm:presOf axis="des" ptType="node"/>
+          <dgm:constrLst>
+            <dgm:constr type="lMarg"/>
+            <dgm:constr type="rMarg"/>
+            <dgm:constr type="tMarg"/>
+            <dgm:constr type="bMarg"/>
+          </dgm:constrLst>
+          <dgm:ruleLst>
+            <dgm:rule type="primFontSz" val="5" fact="NaN" max="NaN"/>
+            <dgm:rule type="h" val="INF" fact="NaN" max="NaN"/>
+          </dgm:ruleLst>
+        </dgm:layoutNode>
+        <dgm:layoutNode name="photoCircle" styleLbl="ltNode1NoLn">
+          <dgm:alg type="sp"/>
+          <dgm:shape xmlns:r="http://schemas.openxmlformats.org/officeDocument/2006/relationships" type="ellipse" r:blip="" blipPhldr="1">
+            <dgm:adjLst/>
+          </dgm:shape>
+          <dgm:presOf/>
+          <dgm:constrLst/>
+          <dgm:ruleLst/>
+        </dgm:layoutNode>
+      </dgm:layoutNode>
+      <dgm:forEach name="Name9" axis="followSib" ptType="sibTrans" cnt="1">
+        <dgm:layoutNode name="sibTrans">
+          <dgm:alg type="sp"/>
+          <dgm:shape xmlns:r="http://schemas.openxmlformats.org/officeDocument/2006/relationships" r:blip="">
+            <dgm:adjLst/>
+          </dgm:shape>
+          <dgm:presOf axis="self"/>
+          <dgm:constrLst/>
+          <dgm:ruleLst/>
+        </dgm:layoutNode>
+      </dgm:forEach>
+    </dgm:forEach>
+  </dgm:layoutNode>
+  <dgm:extLst>
+    <a:ext uri="{68A01E43-0DF5-4B5B-8FA6-DAF915123BFB}">
+      <dgm1612:lstStyle xmlns:dgm1612="http://schemas.microsoft.com/office/drawing/2016/12/diagram">
+        <a:lvl1pPr>
+          <a:defRPr b="1"/>
+        </a:lvl1pPr>
+      </dgm1612:lstStyle>
+    </a:ext>
+  </dgm:extLst>
+</dgm:layoutDef>
+</file>
+
+<file path=ppt/diagrams/quickStyle1.xml><?xml version="1.0" encoding="utf-8"?>
+<dgm:styleDef xmlns:dgm="http://schemas.openxmlformats.org/drawingml/2006/diagram" xmlns:a="http://schemas.openxmlformats.org/drawingml/2006/main" uniqueId="urn:microsoft.com/office/officeart/2005/8/quickstyle/3d2">
+  <dgm:title val=""/>
+  <dgm:desc val=""/>
+  <dgm:catLst>
+    <dgm:cat type="3D" pri="11200"/>
+  </dgm:catLst>
+  <dgm:scene3d>
+    <a:camera prst="orthographicFront"/>
+    <a:lightRig rig="threePt" dir="t"/>
+  </dgm:scene3d>
+  <dgm:styleLbl name="node0">
+    <dgm:scene3d>
+      <a:camera prst="orthographicFront"/>
+      <a:lightRig rig="threePt" dir="t">
+        <a:rot lat="0" lon="0" rev="7500000"/>
+      </a:lightRig>
+    </dgm:scene3d>
+    <dgm:sp3d prstMaterial="plastic">
+      <a:bevelT w="127000" h="25400" prst="relaxedInset"/>
+    </dgm:sp3d>
+    <dgm:txPr/>
+    <dgm:style>
+      <a:lnRef idx="0">
+        <a:scrgbClr r="0" g="0" b="0"/>
+      </a:lnRef>
+      <a:fillRef idx="3">
+        <a:scrgbClr r="0" g="0" b="0"/>
+      </a:fillRef>
+      <a:effectRef idx="2">
+        <a:scrgbClr r="0" g="0" b="0"/>
+      </a:effectRef>
+      <a:fontRef idx="minor">
+        <a:schemeClr val="lt1"/>
+      </a:fontRef>
+    </dgm:style>
+  </dgm:styleLbl>
+  <dgm:styleLbl name="node0NoLn">
+    <dgm:scene3d>
+      <a:camera prst="orthographicFront"/>
+      <a:lightRig rig="threePt" dir="t">
+        <a:rot lat="0" lon="0" rev="7500000"/>
+      </a:lightRig>
+    </dgm:scene3d>
+    <dgm:sp3d prstMaterial="plastic">
+      <a:bevelT w="127000" h="25400" prst="relaxedInset"/>
+    </dgm:sp3d>
+    <dgm:txPr/>
+    <dgm:style>
+      <a:lnRef idx="1">
+        <a:scrgbClr r="0" g="0" b="0"/>
+      </a:lnRef>
+      <a:fillRef idx="3">
+        <a:scrgbClr r="0" g="0" b="0"/>
+      </a:fillRef>
+      <a:effectRef idx="2">
+        <a:scrgbClr r="0" g="0" b="0"/>
+      </a:effectRef>
+      <a:fontRef idx="minor">
+        <a:schemeClr val="lt1"/>
+      </a:fontRef>
+    </dgm:style>
+  </dgm:styleLbl>
+  <dgm:styleLbl name="lnNode1">
+    <dgm:scene3d>
+      <a:camera prst="orthographicFront"/>
+      <a:lightRig rig="threePt" dir="t">
+        <a:rot lat="0" lon="0" rev="7500000"/>
+      </a:lightRig>
+    </dgm:scene3d>
+    <dgm:sp3d prstMaterial="plastic">
+      <a:bevelT w="127000" h="25400" prst="relaxedInset"/>
+    </dgm:sp3d>
+    <dgm:txPr/>
+    <dgm:style>
+      <a:lnRef idx="1">
+        <a:scrgbClr r="0" g="0" b="0"/>
+      </a:lnRef>
+      <a:fillRef idx="3">
+        <a:scrgbClr r="0" g="0" b="0"/>
+      </a:fillRef>
+      <a:effectRef idx="2">
+        <a:scrgbClr r="0" g="0" b="0"/>
+      </a:effectRef>
+      <a:fontRef idx="minor">
+        <a:schemeClr val="lt1"/>
+      </a:fontRef>
+    </dgm:style>
+  </dgm:styleLbl>
+  <dgm:styleLbl name="vennNode1">
+    <dgm:scene3d>
+      <a:camera prst="orthographicFront"/>
+      <a:lightRig rig="threePt" dir="t">
+        <a:rot lat="0" lon="0" rev="7500000"/>
+      </a:lightRig>
+    </dgm:scene3d>
+    <dgm:sp3d prstMaterial="plastic">
+      <a:bevelT w="127000" h="25400" prst="relaxedInset"/>
+    </dgm:sp3d>
+    <dgm:txPr/>
+    <dgm:style>
+      <a:lnRef idx="0">
+        <a:scrgbClr r="0" g="0" b="0"/>
+      </a:lnRef>
+      <a:fillRef idx="3">
+        <a:scrgbClr r="0" g="0" b="0"/>
+      </a:fillRef>
+      <a:effectRef idx="2">
+        <a:scrgbClr r="0" g="0" b="0"/>
+      </a:effectRef>
+      <a:fontRef idx="minor">
+        <a:schemeClr val="tx1"/>
+      </a:fontRef>
+    </dgm:style>
+  </dgm:styleLbl>
+  <dgm:styleLbl name="alingNode1">
+    <dgm:scene3d>
+      <a:camera prst="orthographicFront"/>
+      <a:lightRig rig="threePt" dir="t">
+        <a:rot lat="0" lon="0" rev="7500000"/>
+      </a:lightRig>
+    </dgm:scene3d>
+    <dgm:sp3d prstMaterial="plastic">
+      <a:bevelT w="127000" h="25400" prst="relaxedInset"/>
+    </dgm:sp3d>
+    <dgm:txPr/>
+    <dgm:style>
+      <a:lnRef idx="0">
+        <a:scrgbClr r="0" g="0" b="0"/>
+      </a:lnRef>
+      <a:fillRef idx="3">
+        <a:scrgbClr r="0" g="0" b="0"/>
+      </a:fillRef>
+      <a:effectRef idx="2">
+        <a:scrgbClr r="0" g="0" b="0"/>
+      </a:effectRef>
+      <a:fontRef idx="minor">
+        <a:schemeClr val="lt1"/>
+      </a:fontRef>
+    </dgm:style>
+  </dgm:styleLbl>
+  <dgm:styleLbl name="node1">
+    <dgm:scene3d>
+      <a:camera prst="orthographicFront"/>
+      <a:lightRig rig="threePt" dir="t">
+        <a:rot lat="0" lon="0" rev="7500000"/>
+      </a:lightRig>
+    </dgm:scene3d>
+    <dgm:sp3d prstMaterial="plastic">
+      <a:bevelT w="127000" h="25400" prst="relaxedInset"/>
+    </dgm:sp3d>
+    <dgm:txPr/>
+    <dgm:style>
+      <a:lnRef idx="0">
+        <a:scrgbClr r="0" g="0" b="0"/>
+      </a:lnRef>
+      <a:fillRef idx="3">
+        <a:scrgbClr r="0" g="0" b="0"/>
+      </a:fillRef>
+      <a:effectRef idx="2">
+        <a:scrgbClr r="0" g="0" b="0"/>
+      </a:effectRef>
+      <a:fontRef idx="minor">
+        <a:schemeClr val="lt1"/>
+      </a:fontRef>
+    </dgm:style>
+  </dgm:styleLbl>
+  <dgm:styleLbl name="node1NoLn">
+    <dgm:scene3d>
+      <a:camera prst="orthographicFront"/>
+      <a:lightRig rig="threePt" dir="t">
+        <a:rot lat="0" lon="0" rev="7500000"/>
+      </a:lightRig>
+    </dgm:scene3d>
+    <dgm:sp3d prstMaterial="plastic">
+      <a:bevelT w="127000" h="25400" prst="relaxedInset"/>
+    </dgm:sp3d>
+    <dgm:txPr/>
+    <dgm:style>
+      <a:lnRef idx="1">
+        <a:scrgbClr r="0" g="0" b="0"/>
+      </a:lnRef>
+      <a:fillRef idx="3">
+        <a:scrgbClr r="0" g="0" b="0"/>
+      </a:fillRef>
+      <a:effectRef idx="2">
+        <a:scrgbClr r="0" g="0" b="0"/>
+      </a:effectRef>
+      <a:fontRef idx="minor">
+        <a:schemeClr val="lt1"/>
+      </a:fontRef>
+    </dgm:style>
+  </dgm:styleLbl>
+  <dgm:styleLbl name="ltNode1NoLn">
+    <dgm:scene3d>
+      <a:camera prst="orthographicFront"/>
+      <a:lightRig rig="threePt" dir="t">
+        <a:rot lat="0" lon="0" rev="7500000"/>
+      </a:lightRig>
+    </dgm:scene3d>
+    <dgm:sp3d prstMaterial="plastic">
+      <a:bevelT w="127000" h="25400" prst="relaxedInset"/>
+    </dgm:sp3d>
+    <dgm:txPr/>
+    <dgm:style>
+      <a:lnRef idx="1">
+        <a:scrgbClr r="0" g="0" b="0"/>
+      </a:lnRef>
+      <a:fillRef idx="3">
+        <a:scrgbClr r="0" g="0" b="0"/>
+      </a:fillRef>
+      <a:effectRef idx="2">
+        <a:scrgbClr r="0" g="0" b="0"/>
+      </a:effectRef>
+      <a:fontRef idx="minor">
+        <a:schemeClr val="lt1"/>
+      </a:fontRef>
+    </dgm:style>
+  </dgm:styleLbl>
+  <dgm:styleLbl name="node2">
+    <dgm:scene3d>
+      <a:camera prst="orthographicFront"/>
+      <a:lightRig rig="threePt" dir="t">
+        <a:rot lat="0" lon="0" rev="7500000"/>
+      </a:lightRig>
+    </dgm:scene3d>
+    <dgm:sp3d prstMaterial="plastic">
+      <a:bevelT w="127000" h="25400" prst="relaxedInset"/>
+    </dgm:sp3d>
+    <dgm:txPr/>
+    <dgm:style>
+      <a:lnRef idx="0">
+        <a:scrgbClr r="0" g="0" b="0"/>
+      </a:lnRef>
+      <a:fillRef idx="3">
+        <a:scrgbClr r="0" g="0" b="0"/>
+      </a:fillRef>
+      <a:effectRef idx="2">
+        <a:scrgbClr r="0" g="0" b="0"/>
+      </a:effectRef>
+      <a:fontRef idx="minor">
+        <a:schemeClr val="lt1"/>
+      </a:fontRef>
+    </dgm:style>
+  </dgm:styleLbl>
+  <dgm:styleLbl name="node2NoLn">
+    <dgm:scene3d>
+      <a:camera prst="orthographicFront"/>
+      <a:lightRig rig="threePt" dir="t">
+        <a:rot lat="0" lon="0" rev="7500000"/>
+      </a:lightRig>
+    </dgm:scene3d>
+    <dgm:sp3d prstMaterial="plastic">
+      <a:bevelT w="127000" h="25400" prst="relaxedInset"/>
+    </dgm:sp3d>
+    <dgm:txPr/>
+    <dgm:style>
+      <a:lnRef idx="1">
+        <a:scrgbClr r="0" g="0" b="0"/>
+      </a:lnRef>
+      <a:fillRef idx="3">
+        <a:scrgbClr r="0" g="0" b="0"/>
+      </a:fillRef>
+      <a:effectRef idx="2">
+        <a:scrgbClr r="0" g="0" b="0"/>
+      </a:effectRef>
+      <a:fontRef idx="minor">
+        <a:schemeClr val="lt1"/>
+      </a:fontRef>
+    </dgm:style>
+  </dgm:styleLbl>
+  <dgm:styleLbl name="node3">
+    <dgm:scene3d>
+      <a:camera prst="orthographicFront"/>
+      <a:lightRig rig="threePt" dir="t">
+        <a:rot lat="0" lon="0" rev="7500000"/>
+      </a:lightRig>
+    </dgm:scene3d>
+    <dgm:sp3d prstMaterial="plastic">
+      <a:bevelT w="127000" h="25400" prst="relaxedInset"/>
+    </dgm:sp3d>
+    <dgm:txPr/>
+    <dgm:style>
+      <a:lnRef idx="0">
+        <a:scrgbClr r="0" g="0" b="0"/>
+      </a:lnRef>
+      <a:fillRef idx="3">
+        <a:scrgbClr r="0" g="0" b="0"/>
+      </a:fillRef>
+      <a:effectRef idx="2">
+        <a:scrgbClr r="0" g="0" b="0"/>
+      </a:effectRef>
+      <a:fontRef idx="minor">
+        <a:schemeClr val="lt1"/>
+      </a:fontRef>
+    </dgm:style>
+  </dgm:styleLbl>
+  <dgm:styleLbl name="node3NoLn">
+    <dgm:scene3d>
+      <a:camera prst="orthographicFront"/>
+      <a:lightRig rig="threePt" dir="t">
+        <a:rot lat="0" lon="0" rev="7500000"/>
+      </a:lightRig>
+    </dgm:scene3d>
+    <dgm:sp3d prstMaterial="plastic">
+      <a:bevelT w="127000" h="25400" prst="relaxedInset"/>
+    </dgm:sp3d>
+    <dgm:txPr/>
+    <dgm:style>
+      <a:lnRef idx="1">
+        <a:scrgbClr r="0" g="0" b="0"/>
+      </a:lnRef>
+      <a:fillRef idx="3">
+        <a:scrgbClr r="0" g="0" b="0"/>
+      </a:fillRef>
+      <a:effectRef idx="2">
+        <a:scrgbClr r="0" g="0" b="0"/>
+      </a:effectRef>
+      <a:fontRef idx="minor">
+        <a:schemeClr val="lt1"/>
+      </a:fontRef>
+    </dgm:style>
+  </dgm:styleLbl>
+  <dgm:styleLbl name="node4">
+    <dgm:scene3d>
+      <a:camera prst="orthographicFront"/>
+      <a:lightRig rig="threePt" dir="t">
+        <a:rot lat="0" lon="0" rev="7500000"/>
+      </a:lightRig>
+    </dgm:scene3d>
+    <dgm:sp3d prstMaterial="plastic">
+      <a:bevelT w="127000" h="25400" prst="relaxedInset"/>
+    </dgm:sp3d>
+    <dgm:txPr/>
+    <dgm:style>
+      <a:lnRef idx="0">
+        <a:scrgbClr r="0" g="0" b="0"/>
+      </a:lnRef>
+      <a:fillRef idx="3">
+        <a:scrgbClr r="0" g="0" b="0"/>
+      </a:fillRef>
+      <a:effectRef idx="2">
+        <a:scrgbClr r="0" g="0" b="0"/>
+      </a:effectRef>
+      <a:fontRef idx="minor">
+        <a:schemeClr val="lt1"/>
+      </a:fontRef>
+    </dgm:style>
+  </dgm:styleLbl>
+  <dgm:styleLbl name="node4NoLn">
+    <dgm:scene3d>
+      <a:camera prst="orthographicFront"/>
+      <a:lightRig rig="threePt" dir="t">
+        <a:rot lat="0" lon="0" rev="7500000"/>
+      </a:lightRig>
+    </dgm:scene3d>
+    <dgm:sp3d prstMaterial="plastic">
+      <a:bevelT w="127000" h="25400" prst="relaxedInset"/>
+    </dgm:sp3d>
+    <dgm:txPr/>
+    <dgm:style>
+      <a:lnRef idx="1">
+        <a:scrgbClr r="0" g="0" b="0"/>
+      </a:lnRef>
+      <a:fillRef idx="3">
+        <a:scrgbClr r="0" g="0" b="0"/>
+      </a:fillRef>
+      <a:effectRef idx="2">
+        <a:scrgbClr r="0" g="0" b="0"/>
+      </a:effectRef>
+      <a:fontRef idx="minor">
+        <a:schemeClr val="lt1"/>
+      </a:fontRef>
+    </dgm:style>
+  </dgm:styleLbl>
+  <dgm:styleLbl name="fgImgPlace1">
+    <dgm:scene3d>
+      <a:camera prst="orthographicFront"/>
+      <a:lightRig rig="threePt" dir="t">
+        <a:rot lat="0" lon="0" rev="7500000"/>
+      </a:lightRig>
+    </dgm:scene3d>
+    <dgm:sp3d z="152400" extrusionH="63500" prstMaterial="matte">
+      <a:bevelT w="50800" h="19050" prst="relaxedInset"/>
+      <a:contourClr>
+        <a:schemeClr val="bg1"/>
+      </a:contourClr>
+    </dgm:sp3d>
+    <dgm:txPr/>
+    <dgm:style>
+      <a:lnRef idx="0">
+        <a:scrgbClr r="0" g="0" b="0"/>
+      </a:lnRef>
+      <a:fillRef idx="1">
+        <a:scrgbClr r="0" g="0" b="0"/>
+      </a:fillRef>
+      <a:effectRef idx="0">
+        <a:scrgbClr r="0" g="0" b="0"/>
+      </a:effectRef>
+      <a:fontRef idx="minor"/>
+    </dgm:style>
+  </dgm:styleLbl>
+  <dgm:styleLbl name="alignImgPlace1">
+    <dgm:scene3d>
+      <a:camera prst="orthographicFront"/>
+      <a:lightRig rig="threePt" dir="t">
+        <a:rot lat="0" lon="0" rev="7500000"/>
+      </a:lightRig>
+    </dgm:scene3d>
+    <dgm:sp3d z="254000" extrusionH="63500" contourW="12700" prstMaterial="matte">
+      <a:contourClr>
+        <a:schemeClr val="lt1"/>
+      </a:contourClr>
+    </dgm:sp3d>
+    <dgm:txPr/>
+    <dgm:style>
+      <a:lnRef idx="0">
+        <a:scrgbClr r="0" g="0" b="0"/>
+      </a:lnRef>
+      <a:fillRef idx="1">
+        <a:scrgbClr r="0" g="0" b="0"/>
+      </a:fillRef>
+      <a:effectRef idx="0">
+        <a:scrgbClr r="0" g="0" b="0"/>
+      </a:effectRef>
+      <a:fontRef idx="minor"/>
+    </dgm:style>
+  </dgm:styleLbl>
+  <dgm:styleLbl name="bgImgPlace1">
+    <dgm:scene3d>
+      <a:camera prst="orthographicFront"/>
+      <a:lightRig rig="threePt" dir="t">
+        <a:rot lat="0" lon="0" rev="7500000"/>
+      </a:lightRig>
+    </dgm:scene3d>
+    <dgm:sp3d z="-152400" extrusionH="63500" contourW="12700" prstMaterial="matte">
+      <a:contourClr>
+        <a:schemeClr val="lt1"/>
+      </a:contourClr>
+    </dgm:sp3d>
+    <dgm:txPr/>
+    <dgm:style>
+      <a:lnRef idx="0">
+        <a:scrgbClr r="0" g="0" b="0"/>
+      </a:lnRef>
+      <a:fillRef idx="1">
+        <a:scrgbClr r="0" g="0" b="0"/>
+      </a:fillRef>
+      <a:effectRef idx="0">
+        <a:scrgbClr r="0" g="0" b="0"/>
+      </a:effectRef>
+      <a:fontRef idx="minor"/>
+    </dgm:style>
+  </dgm:styleLbl>
+  <dgm:styleLbl name="sibTrans2D1">
+    <dgm:scene3d>
+      <a:camera prst="orthographicFront"/>
+      <a:lightRig rig="threePt" dir="t">
+        <a:rot lat="0" lon="0" rev="7500000"/>
+      </a:lightRig>
+    </dgm:scene3d>
+    <dgm:sp3d z="-70000" extrusionH="63500" prstMaterial="matte">
+      <a:bevelT w="25400" h="6350" prst="relaxedInset"/>
+      <a:contourClr>
+        <a:schemeClr val="bg1"/>
+      </a:contourClr>
+    </dgm:sp3d>
+    <dgm:txPr/>
+    <dgm:style>
+      <a:lnRef idx="0">
+        <a:scrgbClr r="0" g="0" b="0"/>
+      </a:lnRef>
+      <a:fillRef idx="1">
+        <a:scrgbClr r="0" g="0" b="0"/>
+      </a:fillRef>
+      <a:effectRef idx="2">
+        <a:scrgbClr r="0" g="0" b="0"/>
+      </a:effectRef>
+      <a:fontRef idx="minor">
+        <a:schemeClr val="lt1"/>
+      </a:fontRef>
+    </dgm:style>
+  </dgm:styleLbl>
+  <dgm:styleLbl name="fgSibTrans2D1">
+    <dgm:scene3d>
+      <a:camera prst="orthographicFront"/>
+      <a:lightRig rig="threePt" dir="t">
+        <a:rot lat="0" lon="0" rev="7500000"/>
+      </a:lightRig>
+    </dgm:scene3d>
+    <dgm:sp3d z="152400" extrusionH="63500" prstMaterial="matte">
+      <a:bevelT w="25400" h="6350" prst="relaxedInset"/>
+      <a:contourClr>
+        <a:schemeClr val="bg1"/>
+      </a:contourClr>
+    </dgm:sp3d>
+    <dgm:txPr/>
+    <dgm:style>
+      <a:lnRef idx="0">
+        <a:scrgbClr r="0" g="0" b="0"/>
+      </a:lnRef>
+      <a:fillRef idx="1">
+        <a:scrgbClr r="0" g="0" b="0"/>
+      </a:fillRef>
+      <a:effectRef idx="2">
+        <a:scrgbClr r="0" g="0" b="0"/>
+      </a:effectRef>
+      <a:fontRef idx="minor">
+        <a:schemeClr val="lt1"/>
+      </a:fontRef>
+    </dgm:style>
+  </dgm:styleLbl>
+  <dgm:styleLbl name="bgSibTrans2D1">
+    <dgm:scene3d>
+      <a:camera prst="orthographicFront"/>
+      <a:lightRig rig="threePt" dir="t">
+        <a:rot lat="0" lon="0" rev="7500000"/>
+      </a:lightRig>
+    </dgm:scene3d>
+    <dgm:sp3d z="-152400" extrusionH="63500" prstMaterial="matte">
+      <a:bevelT w="25400" h="6350" prst="relaxedInset"/>
+      <a:contourClr>
+        <a:schemeClr val="bg1"/>
+      </a:contourClr>
+    </dgm:sp3d>
+    <dgm:txPr/>
+    <dgm:style>
+      <a:lnRef idx="0">
+        <a:scrgbClr r="0" g="0" b="0"/>
+      </a:lnRef>
+      <a:fillRef idx="1">
+        <a:scrgbClr r="0" g="0" b="0"/>
+      </a:fillRef>
+      <a:effectRef idx="2">
+        <a:scrgbClr r="0" g="0" b="0"/>
+      </a:effectRef>
+      <a:fontRef idx="minor">
+        <a:schemeClr val="lt1"/>
+      </a:fontRef>
+    </dgm:style>
+  </dgm:styleLbl>
+  <dgm:styleLbl name="sibTrans1D1">
+    <dgm:scene3d>
+      <a:camera prst="orthographicFront"/>
+      <a:lightRig rig="threePt" dir="t">
+        <a:rot lat="0" lon="0" rev="7500000"/>
+      </a:lightRig>
+    </dgm:scene3d>
+    <dgm:sp3d z="-40000" prstMaterial="matte"/>
+    <dgm:txPr/>
+    <dgm:style>
+      <a:lnRef idx="1">
+        <a:scrgbClr r="0" g="0" b="0"/>
+      </a:lnRef>
+      <a:fillRef idx="0">
+        <a:scrgbClr r="0" g="0" b="0"/>
+      </a:fillRef>
+      <a:effectRef idx="0">
+        <a:scrgbClr r="0" g="0" b="0"/>
+      </a:effectRef>
+      <a:fontRef idx="minor"/>
+    </dgm:style>
+  </dgm:styleLbl>
+  <dgm:styleLbl name="callout">
+    <dgm:scene3d>
+      <a:camera prst="orthographicFront"/>
+      <a:lightRig rig="threePt" dir="t">
+        <a:rot lat="0" lon="0" rev="7500000"/>
+      </a:lightRig>
+    </dgm:scene3d>
+    <dgm:sp3d z="127000" prstMaterial="matte"/>
+    <dgm:txPr/>
+    <dgm:style>
+      <a:lnRef idx="2">
+        <a:scrgbClr r="0" g="0" b="0"/>
+      </a:lnRef>
+      <a:fillRef idx="1">
+        <a:scrgbClr r="0" g="0" b="0"/>
+      </a:fillRef>
+      <a:effectRef idx="0">
+        <a:scrgbClr r="0" g="0" b="0"/>
+      </a:effectRef>
+      <a:fontRef idx="minor"/>
+    </dgm:style>
+  </dgm:styleLbl>
+  <dgm:styleLbl name="asst0">
+    <dgm:scene3d>
+      <a:camera prst="orthographicFront"/>
+      <a:lightRig rig="threePt" dir="t">
+        <a:rot lat="0" lon="0" rev="7500000"/>
+      </a:lightRig>
+    </dgm:scene3d>
+    <dgm:sp3d prstMaterial="plastic">
+      <a:bevelT w="127000" h="25400" prst="relaxedInset"/>
+    </dgm:sp3d>
+    <dgm:txPr/>
+    <dgm:style>
+      <a:lnRef idx="0">
+        <a:scrgbClr r="0" g="0" b="0"/>
+      </a:lnRef>
+      <a:fillRef idx="3">
+        <a:scrgbClr r="0" g="0" b="0"/>
+      </a:fillRef>
+      <a:effectRef idx="2">
+        <a:scrgbClr r="0" g="0" b="0"/>
+      </a:effectRef>
+      <a:fontRef idx="minor">
+        <a:schemeClr val="lt1"/>
+      </a:fontRef>
+    </dgm:style>
+  </dgm:styleLbl>
+  <dgm:styleLbl name="asst1">
+    <dgm:scene3d>
+      <a:camera prst="orthographicFront"/>
+      <a:lightRig rig="threePt" dir="t">
+        <a:rot lat="0" lon="0" rev="7500000"/>
+      </a:lightRig>
+    </dgm:scene3d>
+    <dgm:sp3d prstMaterial="plastic">
+      <a:bevelT w="127000" h="25400" prst="relaxedInset"/>
+    </dgm:sp3d>
+    <dgm:txPr/>
+    <dgm:style>
+      <a:lnRef idx="0">
+        <a:scrgbClr r="0" g="0" b="0"/>
+      </a:lnRef>
+      <a:fillRef idx="3">
+        <a:scrgbClr r="0" g="0" b="0"/>
+      </a:fillRef>
+      <a:effectRef idx="2">
+        <a:scrgbClr r="0" g="0" b="0"/>
+      </a:effectRef>
+      <a:fontRef idx="minor">
+        <a:schemeClr val="lt1"/>
+      </a:fontRef>
+    </dgm:style>
+  </dgm:styleLbl>
+  <dgm:styleLbl name="asst2">
+    <dgm:scene3d>
+      <a:camera prst="orthographicFront"/>
+      <a:lightRig rig="threePt" dir="t">
+        <a:rot lat="0" lon="0" rev="7500000"/>
+      </a:lightRig>
+    </dgm:scene3d>
+    <dgm:sp3d prstMaterial="plastic">
+      <a:bevelT w="127000" h="25400" prst="relaxedInset"/>
+    </dgm:sp3d>
+    <dgm:txPr/>
+    <dgm:style>
+      <a:lnRef idx="0">
+        <a:scrgbClr r="0" g="0" b="0"/>
+      </a:lnRef>
+      <a:fillRef idx="3">
+        <a:scrgbClr r="0" g="0" b="0"/>
+      </a:fillRef>
+      <a:effectRef idx="2">
+        <a:scrgbClr r="0" g="0" b="0"/>
+      </a:effectRef>
+      <a:fontRef idx="minor">
+        <a:schemeClr val="lt1"/>
+      </a:fontRef>
+    </dgm:style>
+  </dgm:styleLbl>
+  <dgm:styleLbl name="asst3">
+    <dgm:scene3d>
+      <a:camera prst="orthographicFront"/>
+      <a:lightRig rig="threePt" dir="t">
+        <a:rot lat="0" lon="0" rev="7500000"/>
+      </a:lightRig>
+    </dgm:scene3d>
+    <dgm:sp3d prstMaterial="plastic">
+      <a:bevelT w="127000" h="25400" prst="relaxedInset"/>
+    </dgm:sp3d>
+    <dgm:txPr/>
+    <dgm:style>
+      <a:lnRef idx="0">
+        <a:scrgbClr r="0" g="0" b="0"/>
+      </a:lnRef>
+      <a:fillRef idx="3">
+        <a:scrgbClr r="0" g="0" b="0"/>
+      </a:fillRef>
+      <a:effectRef idx="2">
+        <a:scrgbClr r="0" g="0" b="0"/>
+      </a:effectRef>
+      <a:fontRef idx="minor">
+        <a:schemeClr val="lt1"/>
+      </a:fontRef>
+    </dgm:style>
+  </dgm:styleLbl>
+  <dgm:styleLbl name="parChTrans2D1">
+    <dgm:scene3d>
+      <a:camera prst="orthographicFront"/>
+      <a:lightRig rig="threePt" dir="t">
+        <a:rot lat="0" lon="0" rev="7500000"/>
+      </a:lightRig>
+    </dgm:scene3d>
+    <dgm:sp3d extrusionH="63500" prstMaterial="matte">
+      <a:bevelT w="50800" h="19050" prst="relaxedInset"/>
+      <a:contourClr>
+        <a:schemeClr val="bg1"/>
+      </a:contourClr>
+    </dgm:sp3d>
+    <dgm:txPr/>
+    <dgm:style>
+      <a:lnRef idx="0">
+        <a:scrgbClr r="0" g="0" b="0"/>
+      </a:lnRef>
+      <a:fillRef idx="1">
+        <a:scrgbClr r="0" g="0" b="0"/>
+      </a:fillRef>
+      <a:effectRef idx="2">
+        <a:scrgbClr r="0" g="0" b="0"/>
+      </a:effectRef>
+      <a:fontRef idx="minor">
+        <a:schemeClr val="lt1"/>
+      </a:fontRef>
+    </dgm:style>
+  </dgm:styleLbl>
+  <dgm:styleLbl name="parChTrans2D2">
+    <dgm:scene3d>
+      <a:camera prst="orthographicFront"/>
+      <a:lightRig rig="threePt" dir="t">
+        <a:rot lat="0" lon="0" rev="7500000"/>
+      </a:lightRig>
+    </dgm:scene3d>
+    <dgm:sp3d extrusionH="63500" prstMaterial="matte">
+      <a:bevelT w="50800" h="19050" prst="relaxedInset"/>
+      <a:contourClr>
+        <a:schemeClr val="bg1"/>
+      </a:contourClr>
+    </dgm:sp3d>
+    <dgm:txPr/>
+    <dgm:style>
+      <a:lnRef idx="0">
+        <a:scrgbClr r="0" g="0" b="0"/>
+      </a:lnRef>
+      <a:fillRef idx="1">
+        <a:scrgbClr r="0" g="0" b="0"/>
+      </a:fillRef>
+      <a:effectRef idx="0">
+        <a:scrgbClr r="0" g="0" b="0"/>
+      </a:effectRef>
+      <a:fontRef idx="minor">
+        <a:schemeClr val="lt1"/>
+      </a:fontRef>
+    </dgm:style>
+  </dgm:styleLbl>
+  <dgm:styleLbl name="parChTrans2D3">
+    <dgm:scene3d>
+      <a:camera prst="orthographicFront"/>
+      <a:lightRig rig="threePt" dir="t">
+        <a:rot lat="0" lon="0" rev="7500000"/>
+      </a:lightRig>
+    </dgm:scene3d>
+    <dgm:sp3d z="60000" prstMaterial="flat">
+      <a:bevelT w="120900" h="88900"/>
+    </dgm:sp3d>
+    <dgm:txPr/>
+    <dgm:style>
+      <a:lnRef idx="0">
+        <a:scrgbClr r="0" g="0" b="0"/>
+      </a:lnRef>
+      <a:fillRef idx="3">
+        <a:scrgbClr r="0" g="0" b="0"/>
+      </a:fillRef>
+      <a:effectRef idx="1">
+        <a:scrgbClr r="0" g="0" b="0"/>
+      </a:effectRef>
+      <a:fontRef idx="minor">
+        <a:schemeClr val="lt1"/>
+      </a:fontRef>
+    </dgm:style>
+  </dgm:styleLbl>
+  <dgm:styleLbl name="parChTrans2D4">
+    <dgm:scene3d>
+      <a:camera prst="orthographicFront"/>
+      <a:lightRig rig="threePt" dir="t">
+        <a:rot lat="0" lon="0" rev="7500000"/>
+      </a:lightRig>
+    </dgm:scene3d>
+    <dgm:sp3d z="60000" prstMaterial="flat">
+      <a:bevelT w="120900" h="88900"/>
+    </dgm:sp3d>
+    <dgm:txPr/>
+    <dgm:style>
+      <a:lnRef idx="0">
+        <a:scrgbClr r="0" g="0" b="0"/>
+      </a:lnRef>
+      <a:fillRef idx="3">
+        <a:scrgbClr r="0" g="0" b="0"/>
+      </a:fillRef>
+      <a:effectRef idx="1">
+        <a:scrgbClr r="0" g="0" b="0"/>
+      </a:effectRef>
+      <a:fontRef idx="minor">
+        <a:schemeClr val="lt1"/>
+      </a:fontRef>
+    </dgm:style>
+  </dgm:styleLbl>
+  <dgm:styleLbl name="parChTrans1D1">
+    <dgm:scene3d>
+      <a:camera prst="orthographicFront"/>
+      <a:lightRig rig="threePt" dir="t">
+        <a:rot lat="0" lon="0" rev="7500000"/>
+      </a:lightRig>
+    </dgm:scene3d>
+    <dgm:sp3d z="-40000" prstMaterial="matte"/>
+    <dgm:txPr/>
+    <dgm:style>
+      <a:lnRef idx="2">
+        <a:scrgbClr r="0" g="0" b="0"/>
+      </a:lnRef>
+      <a:fillRef idx="0">
+        <a:scrgbClr r="0" g="0" b="0"/>
+      </a:fillRef>
+      <a:effectRef idx="0">
+        <a:scrgbClr r="0" g="0" b="0"/>
+      </a:effectRef>
+      <a:fontRef idx="minor"/>
+    </dgm:style>
+  </dgm:styleLbl>
+  <dgm:styleLbl name="parChTrans1D2">
+    <dgm:scene3d>
+      <a:camera prst="orthographicFront"/>
+      <a:lightRig rig="threePt" dir="t">
+        <a:rot lat="0" lon="0" rev="7500000"/>
+      </a:lightRig>
+    </dgm:scene3d>
+    <dgm:sp3d z="-40000" prstMaterial="matte"/>
+    <dgm:txPr/>
+    <dgm:style>
+      <a:lnRef idx="2">
+        <a:scrgbClr r="0" g="0" b="0"/>
+      </a:lnRef>
+      <a:fillRef idx="0">
+        <a:scrgbClr r="0" g="0" b="0"/>
+      </a:fillRef>
+      <a:effectRef idx="0">
+        <a:scrgbClr r="0" g="0" b="0"/>
+      </a:effectRef>
+      <a:fontRef idx="minor"/>
+    </dgm:style>
+  </dgm:styleLbl>
+  <dgm:styleLbl name="parChTrans1D3">
+    <dgm:scene3d>
+      <a:camera prst="orthographicFront"/>
+      <a:lightRig rig="threePt" dir="t">
+        <a:rot lat="0" lon="0" rev="7500000"/>
+      </a:lightRig>
+    </dgm:scene3d>
+    <dgm:sp3d z="-40000" prstMaterial="matte"/>
+    <dgm:txPr/>
+    <dgm:style>
+      <a:lnRef idx="2">
+        <a:scrgbClr r="0" g="0" b="0"/>
+      </a:lnRef>
+      <a:fillRef idx="0">
+        <a:scrgbClr r="0" g="0" b="0"/>
+      </a:fillRef>
+      <a:effectRef idx="0">
+        <a:scrgbClr r="0" g="0" b="0"/>
+      </a:effectRef>
+      <a:fontRef idx="minor"/>
+    </dgm:style>
+  </dgm:styleLbl>
+  <dgm:styleLbl name="parChTrans1D4">
+    <dgm:scene3d>
+      <a:camera prst="orthographicFront"/>
+      <a:lightRig rig="threePt" dir="t">
+        <a:rot lat="0" lon="0" rev="7500000"/>
+      </a:lightRig>
+    </dgm:scene3d>
+    <dgm:sp3d z="-40000" prstMaterial="matte"/>
+    <dgm:txPr/>
+    <dgm:style>
+      <a:lnRef idx="2">
+        <a:scrgbClr r="0" g="0" b="0"/>
+      </a:lnRef>
+      <a:fillRef idx="0">
+        <a:scrgbClr r="0" g="0" b="0"/>
+      </a:fillRef>
+      <a:effectRef idx="0">
+        <a:scrgbClr r="0" g="0" b="0"/>
+      </a:effectRef>
+      <a:fontRef idx="minor"/>
+    </dgm:style>
+  </dgm:styleLbl>
+  <dgm:styleLbl name="fgAcc1">
+    <dgm:scene3d>
+      <a:camera prst="orthographicFront"/>
+      <a:lightRig rig="threePt" dir="t">
+        <a:rot lat="0" lon="0" rev="7500000"/>
+      </a:lightRig>
+    </dgm:scene3d>
+    <dgm:sp3d z="152400" extrusionH="63500" prstMaterial="dkEdge">
+      <a:bevelT w="135400" h="16350" prst="relaxedInset"/>
+      <a:contourClr>
+        <a:schemeClr val="bg1"/>
+      </a:contourClr>
+    </dgm:sp3d>
+    <dgm:txPr/>
+    <dgm:style>
+      <a:lnRef idx="1">
+        <a:scrgbClr r="0" g="0" b="0"/>
+      </a:lnRef>
+      <a:fillRef idx="1">
+        <a:scrgbClr r="0" g="0" b="0"/>
+      </a:fillRef>
+      <a:effectRef idx="2">
+        <a:scrgbClr r="0" g="0" b="0"/>
+      </a:effectRef>
+      <a:fontRef idx="minor"/>
+    </dgm:style>
+  </dgm:styleLbl>
+  <dgm:styleLbl name="conFgAcc1">
+    <dgm:scene3d>
+      <a:camera prst="orthographicFront"/>
+      <a:lightRig rig="threePt" dir="t">
+        <a:rot lat="0" lon="0" rev="7500000"/>
+      </a:lightRig>
+    </dgm:scene3d>
+    <dgm:sp3d z="152400" extrusionH="63500" prstMaterial="dkEdge">
+      <a:bevelT w="135400" h="16350" prst="relaxedInset"/>
+      <a:contourClr>
+        <a:schemeClr val="bg1"/>
+      </a:contourClr>
+    </dgm:sp3d>
+    <dgm:txPr/>
+    <dgm:style>
+      <a:lnRef idx="1">
+        <a:scrgbClr r="0" g="0" b="0"/>
+      </a:lnRef>
+      <a:fillRef idx="1">
+        <a:scrgbClr r="0" g="0" b="0"/>
+      </a:fillRef>
+      <a:effectRef idx="2">
+        <a:scrgbClr r="0" g="0" b="0"/>
+      </a:effectRef>
+      <a:fontRef idx="minor"/>
+    </dgm:style>
+  </dgm:styleLbl>
+  <dgm:styleLbl name="alignAcc1">
+    <dgm:scene3d>
+      <a:camera prst="orthographicFront"/>
+      <a:lightRig rig="threePt" dir="t">
+        <a:rot lat="0" lon="0" rev="7500000"/>
+      </a:lightRig>
+    </dgm:scene3d>
+    <dgm:sp3d extrusionH="190500" prstMaterial="dkEdge">
+      <a:bevelT w="135400" h="16350" prst="relaxedInset"/>
+      <a:contourClr>
+        <a:schemeClr val="bg1"/>
+      </a:contourClr>
+    </dgm:sp3d>
+    <dgm:txPr/>
+    <dgm:style>
+      <a:lnRef idx="1">
+        <a:scrgbClr r="0" g="0" b="0"/>
+      </a:lnRef>
+      <a:fillRef idx="1">
+        <a:scrgbClr r="0" g="0" b="0"/>
+      </a:fillRef>
+      <a:effectRef idx="2">
+        <a:scrgbClr r="0" g="0" b="0"/>
+      </a:effectRef>
+      <a:fontRef idx="minor"/>
+    </dgm:style>
+  </dgm:styleLbl>
+  <dgm:styleLbl name="trAlignAcc1">
+    <dgm:scene3d>
+      <a:camera prst="orthographicFront"/>
+      <a:lightRig rig="threePt" dir="t">
+        <a:rot lat="0" lon="0" rev="7500000"/>
+      </a:lightRig>
+    </dgm:scene3d>
+    <dgm:sp3d prstMaterial="plastic">
+      <a:bevelT w="127000" h="35400"/>
+    </dgm:sp3d>
+    <dgm:txPr/>
+    <dgm:style>
+      <a:lnRef idx="1">
+        <a:scrgbClr r="0" g="0" b="0"/>
+      </a:lnRef>
+      <a:fillRef idx="1">
+        <a:scrgbClr r="0" g="0" b="0"/>
+      </a:fillRef>
+      <a:effectRef idx="2">
+        <a:scrgbClr r="0" g="0" b="0"/>
+      </a:effectRef>
+      <a:fontRef idx="minor">
+        <a:schemeClr val="lt1"/>
+      </a:fontRef>
+    </dgm:style>
+  </dgm:styleLbl>
+  <dgm:styleLbl name="bgAcc1">
+    <dgm:scene3d>
+      <a:camera prst="orthographicFront"/>
+      <a:lightRig rig="threePt" dir="t">
+        <a:rot lat="0" lon="0" rev="7500000"/>
+      </a:lightRig>
+    </dgm:scene3d>
+    <dgm:sp3d z="-152400" extrusionH="63500" prstMaterial="dkEdge">
+      <a:bevelT w="124450" h="16350" prst="relaxedInset"/>
+      <a:contourClr>
+        <a:schemeClr val="bg1"/>
+      </a:contourClr>
+    </dgm:sp3d>
+    <dgm:txPr/>
+    <dgm:style>
+      <a:lnRef idx="1">
+        <a:scrgbClr r="0" g="0" b="0"/>
+      </a:lnRef>
+      <a:fillRef idx="1">
+        <a:scrgbClr r="0" g="0" b="0"/>
+      </a:fillRef>
+      <a:effectRef idx="0">
+        <a:scrgbClr r="0" g="0" b="0"/>
+      </a:effectRef>
+      <a:fontRef idx="minor"/>
+    </dgm:style>
+  </dgm:styleLbl>
+  <dgm:styleLbl name="solidFgAcc1">
+    <dgm:scene3d>
+      <a:camera prst="orthographicFront"/>
+      <a:lightRig rig="threePt" dir="t">
+        <a:rot lat="0" lon="0" rev="7500000"/>
+      </a:lightRig>
+    </dgm:scene3d>
+    <dgm:sp3d z="152400" extrusionH="63500" prstMaterial="dkEdge">
+      <a:bevelT w="120800" h="19050" prst="relaxedInset"/>
+      <a:contourClr>
+        <a:schemeClr val="bg1"/>
+      </a:contourClr>
+    </dgm:sp3d>
+    <dgm:txPr/>
+    <dgm:style>
+      <a:lnRef idx="1">
+        <a:scrgbClr r="0" g="0" b="0"/>
+      </a:lnRef>
+      <a:fillRef idx="1">
+        <a:scrgbClr r="0" g="0" b="0"/>
+      </a:fillRef>
+      <a:effectRef idx="2">
+        <a:scrgbClr r="0" g="0" b="0"/>
+      </a:effectRef>
+      <a:fontRef idx="minor"/>
+    </dgm:style>
+  </dgm:styleLbl>
+  <dgm:styleLbl name="solidAlignAcc1">
+    <dgm:scene3d>
+      <a:camera prst="orthographicFront"/>
+      <a:lightRig rig="threePt" dir="t">
+        <a:rot lat="0" lon="0" rev="7500000"/>
+      </a:lightRig>
+    </dgm:scene3d>
+    <dgm:sp3d extrusionH="190500" prstMaterial="dkEdge">
+      <a:bevelT w="120650" h="38100" prst="relaxedInset"/>
+      <a:contourClr>
+        <a:schemeClr val="bg1"/>
+      </a:contourClr>
+    </dgm:sp3d>
+    <dgm:txPr/>
+    <dgm:style>
+      <a:lnRef idx="1">
+        <a:scrgbClr r="0" g="0" b="0"/>
+      </a:lnRef>
+      <a:fillRef idx="1">
+        <a:scrgbClr r="0" g="0" b="0"/>
+      </a:fillRef>
+      <a:effectRef idx="2">
+        <a:scrgbClr r="0" g="0" b="0"/>
+      </a:effectRef>
+      <a:fontRef idx="minor"/>
+    </dgm:style>
+  </dgm:styleLbl>
+  <dgm:styleLbl name="solidBgAcc1">
+    <dgm:scene3d>
+      <a:camera prst="orthographicFront"/>
+      <a:lightRig rig="threePt" dir="t">
+        <a:rot lat="0" lon="0" rev="7500000"/>
+      </a:lightRig>
+    </dgm:scene3d>
+    <dgm:sp3d z="-152400" extrusionH="63500" prstMaterial="dkEdge">
+      <a:bevelT w="144450" h="36350" prst="relaxedInset"/>
+      <a:contourClr>
+        <a:schemeClr val="bg1"/>
+      </a:contourClr>
+    </dgm:sp3d>
+    <dgm:txPr/>
+    <dgm:style>
+      <a:lnRef idx="1">
+        <a:scrgbClr r="0" g="0" b="0"/>
+      </a:lnRef>
+      <a:fillRef idx="1">
+        <a:scrgbClr r="0" g="0" b="0"/>
+      </a:fillRef>
+      <a:effectRef idx="0">
+        <a:scrgbClr r="0" g="0" b="0"/>
+      </a:effectRef>
+      <a:fontRef idx="minor"/>
+    </dgm:style>
+  </dgm:styleLbl>
+  <dgm:styleLbl name="fgAccFollowNode1">
+    <dgm:scene3d>
+      <a:camera prst="orthographicFront"/>
+      <a:lightRig rig="threePt" dir="t">
+        <a:rot lat="0" lon="0" rev="7500000"/>
+      </a:lightRig>
+    </dgm:scene3d>
+    <dgm:sp3d z="152400" extrusionH="63500" prstMaterial="dkEdge">
+      <a:bevelT w="125400" h="36350" prst="relaxedInset"/>
+      <a:contourClr>
+        <a:schemeClr val="bg1"/>
+      </a:contourClr>
+    </dgm:sp3d>
+    <dgm:txPr/>
+    <dgm:style>
+      <a:lnRef idx="1">
+        <a:scrgbClr r="0" g="0" b="0"/>
+      </a:lnRef>
+      <a:fillRef idx="1">
+        <a:scrgbClr r="0" g="0" b="0"/>
+      </a:fillRef>
+      <a:effectRef idx="0">
+        <a:scrgbClr r="0" g="0" b="0"/>
+      </a:effectRef>
+      <a:fontRef idx="minor"/>
+    </dgm:style>
+  </dgm:styleLbl>
+  <dgm:styleLbl name="alignAccFollowNode1">
+    <dgm:scene3d>
+      <a:camera prst="orthographicFront"/>
+      <a:lightRig rig="threePt" dir="t">
+        <a:rot lat="0" lon="0" rev="7500000"/>
+      </a:lightRig>
+    </dgm:scene3d>
+    <dgm:sp3d extrusionH="190500" prstMaterial="dkEdge">
+      <a:bevelT w="120650" h="38100" prst="relaxedInset"/>
+      <a:bevelB w="120650" h="57150" prst="relaxedInset"/>
+      <a:contourClr>
+        <a:schemeClr val="bg1"/>
+      </a:contourClr>
+    </dgm:sp3d>
+    <dgm:txPr/>
+    <dgm:style>
+      <a:lnRef idx="1">
+        <a:scrgbClr r="0" g="0" b="0"/>
+      </a:lnRef>
+      <a:fillRef idx="1">
+        <a:scrgbClr r="0" g="0" b="0"/>
+      </a:fillRef>
+      <a:effectRef idx="2">
+        <a:scrgbClr r="0" g="0" b="0"/>
+      </a:effectRef>
+      <a:fontRef idx="minor"/>
+    </dgm:style>
+  </dgm:styleLbl>
+  <dgm:styleLbl name="bgAccFollowNode1">
+    <dgm:scene3d>
+      <a:camera prst="orthographicFront"/>
+      <a:lightRig rig="threePt" dir="t">
+        <a:rot lat="0" lon="0" rev="7500000"/>
+      </a:lightRig>
+    </dgm:scene3d>
+    <dgm:sp3d z="-152400" extrusionH="63500" prstMaterial="dkEdge">
+      <a:bevelT w="144450" h="36350" prst="relaxedInset"/>
+      <a:contourClr>
+        <a:schemeClr val="bg1"/>
+      </a:contourClr>
+    </dgm:sp3d>
+    <dgm:txPr/>
+    <dgm:style>
+      <a:lnRef idx="1">
+        <a:scrgbClr r="0" g="0" b="0"/>
+      </a:lnRef>
+      <a:fillRef idx="1">
+        <a:scrgbClr r="0" g="0" b="0"/>
+      </a:fillRef>
+      <a:effectRef idx="2">
+        <a:scrgbClr r="0" g="0" b="0"/>
+      </a:effectRef>
+      <a:fontRef idx="minor"/>
+    </dgm:style>
+  </dgm:styleLbl>
+  <dgm:styleLbl name="fgAcc0">
+    <dgm:scene3d>
+      <a:camera prst="orthographicFront"/>
+      <a:lightRig rig="threePt" dir="t">
+        <a:rot lat="0" lon="0" rev="7500000"/>
+      </a:lightRig>
+    </dgm:scene3d>
+    <dgm:sp3d z="152400" extrusionH="63500" prstMaterial="dkEdge">
+      <a:bevelT w="125400" h="36350" prst="relaxedInset"/>
+      <a:contourClr>
+        <a:schemeClr val="bg1"/>
+      </a:contourClr>
+    </dgm:sp3d>
+    <dgm:txPr/>
+    <dgm:style>
+      <a:lnRef idx="1">
+        <a:scrgbClr r="0" g="0" b="0"/>
+      </a:lnRef>
+      <a:fillRef idx="1">
+        <a:scrgbClr r="0" g="0" b="0"/>
+      </a:fillRef>
+      <a:effectRef idx="2">
+        <a:scrgbClr r="0" g="0" b="0"/>
+      </a:effectRef>
+      <a:fontRef idx="minor"/>
+    </dgm:style>
+  </dgm:styleLbl>
+  <dgm:styleLbl name="fgAcc2">
+    <dgm:scene3d>
+      <a:camera prst="orthographicFront"/>
+      <a:lightRig rig="threePt" dir="t">
+        <a:rot lat="0" lon="0" rev="7500000"/>
+      </a:lightRig>
+    </dgm:scene3d>
+    <dgm:sp3d z="152400" extrusionH="63500" prstMaterial="dkEdge">
+      <a:bevelT w="125400" h="36350" prst="relaxedInset"/>
+      <a:contourClr>
+        <a:schemeClr val="bg1"/>
+      </a:contourClr>
+    </dgm:sp3d>
+    <dgm:txPr/>
+    <dgm:style>
+      <a:lnRef idx="1">
+        <a:scrgbClr r="0" g="0" b="0"/>
+      </a:lnRef>
+      <a:fillRef idx="1">
+        <a:scrgbClr r="0" g="0" b="0"/>
+      </a:fillRef>
+      <a:effectRef idx="2">
+        <a:scrgbClr r="0" g="0" b="0"/>
+      </a:effectRef>
+      <a:fontRef idx="minor"/>
+    </dgm:style>
+  </dgm:styleLbl>
+  <dgm:styleLbl name="fgAcc3">
+    <dgm:scene3d>
+      <a:camera prst="orthographicFront"/>
+      <a:lightRig rig="threePt" dir="t">
+        <a:rot lat="0" lon="0" rev="7500000"/>
+      </a:lightRig>
+    </dgm:scene3d>
+    <dgm:sp3d z="152400" extrusionH="63500" prstMaterial="dkEdge">
+      <a:bevelT w="125400" h="36350" prst="relaxedInset"/>
+      <a:contourClr>
+        <a:schemeClr val="bg1"/>
+      </a:contourClr>
+    </dgm:sp3d>
+    <dgm:txPr/>
+    <dgm:style>
+      <a:lnRef idx="1">
+        <a:scrgbClr r="0" g="0" b="0"/>
+      </a:lnRef>
+      <a:fillRef idx="1">
+        <a:scrgbClr r="0" g="0" b="0"/>
+      </a:fillRef>
+      <a:effectRef idx="2">
+        <a:scrgbClr r="0" g="0" b="0"/>
+      </a:effectRef>
+      <a:fontRef idx="minor"/>
+    </dgm:style>
+  </dgm:styleLbl>
+  <dgm:styleLbl name="fgAcc4">
+    <dgm:scene3d>
+      <a:camera prst="orthographicFront"/>
+      <a:lightRig rig="threePt" dir="t">
+        <a:rot lat="0" lon="0" rev="7500000"/>
+      </a:lightRig>
+    </dgm:scene3d>
+    <dgm:sp3d z="152400" extrusionH="63500" prstMaterial="dkEdge">
+      <a:bevelT w="125400" h="36350" prst="relaxedInset"/>
+      <a:contourClr>
+        <a:schemeClr val="bg1"/>
+      </a:contourClr>
+    </dgm:sp3d>
+    <dgm:txPr/>
+    <dgm:style>
+      <a:lnRef idx="1">
+        <a:scrgbClr r="0" g="0" b="0"/>
+      </a:lnRef>
+      <a:fillRef idx="1">
+        <a:scrgbClr r="0" g="0" b="0"/>
+      </a:fillRef>
+      <a:effectRef idx="2">
+        <a:scrgbClr r="0" g="0" b="0"/>
+      </a:effectRef>
+      <a:fontRef idx="minor"/>
+    </dgm:style>
+  </dgm:styleLbl>
+  <dgm:styleLbl name="bgShp">
+    <dgm:scene3d>
+      <a:camera prst="orthographicFront"/>
+      <a:lightRig rig="threePt" dir="t">
+        <a:rot lat="0" lon="0" rev="7500000"/>
+      </a:lightRig>
+    </dgm:scene3d>
+    <dgm:sp3d z="-152400" extrusionH="63500" prstMaterial="matte">
+      <a:bevelT w="144450" h="6350" prst="relaxedInset"/>
+      <a:contourClr>
+        <a:schemeClr val="bg1"/>
+      </a:contourClr>
+    </dgm:sp3d>
+    <dgm:txPr/>
+    <dgm:style>
+      <a:lnRef idx="0">
+        <a:scrgbClr r="0" g="0" b="0"/>
+      </a:lnRef>
+      <a:fillRef idx="3">
+        <a:scrgbClr r="0" g="0" b="0"/>
+      </a:fillRef>
+      <a:effectRef idx="0">
+        <a:scrgbClr r="0" g="0" b="0"/>
+      </a:effectRef>
+      <a:fontRef idx="minor"/>
+    </dgm:style>
+  </dgm:styleLbl>
+  <dgm:styleLbl name="dkBgShp">
+    <dgm:scene3d>
+      <a:camera prst="orthographicFront"/>
+      <a:lightRig rig="threePt" dir="t">
+        <a:rot lat="0" lon="0" rev="7500000"/>
+      </a:lightRig>
+    </dgm:scene3d>
+    <dgm:sp3d prstMaterial="plastic">
+      <a:bevelT w="127000" h="25400" prst="relaxedInset"/>
+      <a:bevelB w="88900" h="121750" prst="angle"/>
+    </dgm:sp3d>
+    <dgm:txPr/>
+    <dgm:style>
+      <a:lnRef idx="0">
+        <a:scrgbClr r="0" g="0" b="0"/>
+      </a:lnRef>
+      <a:fillRef idx="1">
+        <a:scrgbClr r="0" g="0" b="0"/>
+      </a:fillRef>
+      <a:effectRef idx="2">
+        <a:scrgbClr r="0" g="0" b="0"/>
+      </a:effectRef>
+      <a:fontRef idx="minor">
+        <a:schemeClr val="lt1"/>
+      </a:fontRef>
+    </dgm:style>
+  </dgm:styleLbl>
+  <dgm:styleLbl name="trBgShp">
+    <dgm:scene3d>
+      <a:camera prst="orthographicFront"/>
+      <a:lightRig rig="threePt" dir="t"/>
+    </dgm:scene3d>
+    <dgm:sp3d z="-152400" prstMaterial="matte"/>
+    <dgm:txPr/>
+    <dgm:style>
+      <a:lnRef idx="0">
+        <a:scrgbClr r="0" g="0" b="0"/>
+      </a:lnRef>
+      <a:fillRef idx="1">
+        <a:scrgbClr r="0" g="0" b="0"/>
+      </a:fillRef>
+      <a:effectRef idx="0">
+        <a:scrgbClr r="0" g="0" b="0"/>
+      </a:effectRef>
+      <a:fontRef idx="minor"/>
+    </dgm:style>
+  </dgm:styleLbl>
+  <dgm:styleLbl name="fgShp">
+    <dgm:scene3d>
+      <a:camera prst="orthographicFront"/>
+      <a:lightRig rig="threePt" dir="t">
+        <a:rot lat="0" lon="0" rev="7500000"/>
+      </a:lightRig>
+    </dgm:scene3d>
+    <dgm:sp3d z="152400" extrusionH="63500" prstMaterial="matte">
+      <a:bevelT w="50800" h="19050" prst="relaxedInset"/>
+      <a:contourClr>
+        <a:schemeClr val="bg1"/>
+      </a:contourClr>
+    </dgm:sp3d>
+    <dgm:txPr/>
+    <dgm:style>
+      <a:lnRef idx="0">
+        <a:scrgbClr r="0" g="0" b="0"/>
+      </a:lnRef>
+      <a:fillRef idx="1">
+        <a:scrgbClr r="0" g="0" b="0"/>
+      </a:fillRef>
+      <a:effectRef idx="2">
+        <a:scrgbClr r="0" g="0" b="0"/>
+      </a:effectRef>
+      <a:fontRef idx="minor">
+        <a:schemeClr val="lt1"/>
+      </a:fontRef>
+    </dgm:style>
+  </dgm:styleLbl>
+  <dgm:styleLbl name="revTx">
+    <dgm:scene3d>
+      <a:camera prst="orthographicFront"/>
+      <a:lightRig rig="threePt" dir="t"/>
+    </dgm:scene3d>
+    <dgm:sp3d/>
+    <dgm:txPr/>
+    <dgm:style>
+      <a:lnRef idx="0">
+        <a:scrgbClr r="0" g="0" b="0"/>
+      </a:lnRef>
+      <a:fillRef idx="0">
+        <a:scrgbClr r="0" g="0" b="0"/>
+      </a:fillRef>
+      <a:effectRef idx="0">
+        <a:scrgbClr r="0" g="0" b="0"/>
+      </a:effectRef>
+      <a:fontRef idx="minor"/>
+    </dgm:style>
+  </dgm:styleLbl>
+  <dgm:styleLbl name="revTxLt">
+    <dgm:scene3d>
+      <a:camera prst="orthographicFront"/>
+      <a:lightRig rig="threePt" dir="t"/>
+    </dgm:scene3d>
+    <dgm:sp3d/>
+    <dgm:txPr/>
+    <dgm:style>
+      <a:lnRef idx="0">
+        <a:scrgbClr r="0" g="0" b="0"/>
+      </a:lnRef>
+      <a:fillRef idx="0">
+        <a:scrgbClr r="0" g="0" b="0"/>
+      </a:fillRef>
+      <a:effectRef idx="0">
+        <a:scrgbClr r="0" g="0" b="0"/>
+      </a:effectRef>
+      <a:fontRef idx="minor">
+        <a:schemeClr val="lt1"/>
+      </a:fontRef>
+    </dgm:style>
+  </dgm:styleLbl>
+</dgm:styleDef>
+</file>
+
+<file path=ppt/notesMasters/notesMaster1.xml><?xml version="1.0" encoding="utf-8"?>
+<p:notesMaster xmlns:a="http://schemas.openxmlformats.org/drawingml/2006/main" xmlns:r="http://schemas.openxmlformats.org/officeDocument/2006/relationships" xmlns:p="http://schemas.openxmlformats.org/presentationml/2006/main">
+  <p:cSld>
+    <p:bg>
+      <p:bgRef idx="1001">
+        <a:schemeClr val="bg1"/>
+      </p:bgRef>
+    </p:bg>
+    <p:spTree>
+      <p:nvGrpSpPr>
+        <p:cNvPr id="1" name=""/>
+        <p:cNvGrpSpPr/>
+        <p:nvPr/>
+      </p:nvGrpSpPr>
+      <p:grpSpPr>
+        <a:xfrm>
+          <a:off x="0" y="0"/>
+          <a:ext cx="0" cy="0"/>
+          <a:chOff x="0" y="0"/>
+          <a:chExt cx="0" cy="0"/>
+        </a:xfrm>
+      </p:grpSpPr>
+      <p:sp>
+        <p:nvSpPr>
+          <p:cNvPr id="2" name="Header Placeholder 1"/>
+          <p:cNvSpPr>
+            <a:spLocks noGrp="1"/>
+          </p:cNvSpPr>
+          <p:nvPr>
+            <p:ph type="hdr" sz="quarter"/>
+          </p:nvPr>
+        </p:nvSpPr>
+        <p:spPr>
+          <a:xfrm>
+            <a:off x="0" y="0"/>
+            <a:ext cx="2971800" cy="458788"/>
+          </a:xfrm>
+          <a:prstGeom prst="rect">
+            <a:avLst/>
+          </a:prstGeom>
+        </p:spPr>
+        <p:txBody>
+          <a:bodyPr vert="horz" lIns="91440" tIns="45720" rIns="91440" bIns="45720"/>
+          <a:lstStyle>
+            <a:lvl1pPr algn="l">
+              <a:defRPr sz="1200"/>
+            </a:lvl1pPr>
+          </a:lstStyle>
+          <a:p>
+            <a:endParaRPr lang="en-US"/>
+          </a:p>
+        </p:txBody>
+      </p:sp>
+      <p:sp>
+        <p:nvSpPr>
+          <p:cNvPr id="3" name="Date Placeholder 2"/>
+          <p:cNvSpPr>
+            <a:spLocks noGrp="1"/>
+          </p:cNvSpPr>
+          <p:nvPr>
+            <p:ph type="dt" idx="1"/>
+          </p:nvPr>
+        </p:nvSpPr>
+        <p:spPr>
+          <a:xfrm>
+            <a:off x="3884613" y="0"/>
+            <a:ext cx="2971800" cy="458788"/>
+          </a:xfrm>
+          <a:prstGeom prst="rect">
+            <a:avLst/>
+          </a:prstGeom>
+        </p:spPr>
+        <p:txBody>
+          <a:bodyPr vert="horz" lIns="91440" tIns="45720" rIns="91440" bIns="45720"/>
+          <a:lstStyle>
+            <a:lvl1pPr algn="r">
+              <a:defRPr sz="1200"/>
+            </a:lvl1pPr>
+          </a:lstStyle>
+          <a:p>
+            <a:fld id="{B1E4B0A2-5C8E-4E5F-9C1D-2F3A4B5C6D71}" type="datetimeFigureOut">
+              <a:rPr lang="en-US"/>
+              <a:t>9/5/2026</a:t>
+            </a:fld>
+            <a:endParaRPr lang="en-US"/>
+          </a:p>
+        </p:txBody>
+      </p:sp>
+      <p:sp>
+        <p:nvSpPr>
+          <p:cNvPr id="4" name="Slide Image Placeholder 3"/>
+          <p:cNvSpPr>
+            <a:spLocks noGrp="1" noRot="1" noChangeAspect="1"/>
+          </p:cNvSpPr>
+          <p:nvPr>
+            <p:ph type="sldImg" idx="2"/>
+          </p:nvPr>
+        </p:nvSpPr>
+        <p:spPr>
+          <a:xfrm>
+            <a:off x="1143000" y="685800"/>
+            <a:ext cx="4572000" cy="3429000"/>
+          </a:xfrm>
+          <a:prstGeom prst="rect">
+            <a:avLst/>
+          </a:prstGeom>
+          <a:noFill/>
+          <a:ln w="12700">
+            <a:solidFill>
+              <a:prstClr val="black"/>
+            </a:solidFill>
+          </a:ln>
+        </p:spPr>
+        <p:txBody>
+          <a:bodyPr/>
+          <a:lstStyle/>
+          <a:p>
+            <a:endParaRPr lang="en-US"/>
+          </a:p>
+        </p:txBody>
+      </p:sp>
+      <p:sp>
+        <p:nvSpPr>
+          <p:cNvPr id="5" name="Notes Placeholder 4"/>
+          <p:cNvSpPr>
+            <a:spLocks noGrp="1"/>
+          </p:cNvSpPr>
+          <p:nvPr>
+            <p:ph type="body" sz="quarter" idx="3"/>
+          </p:nvPr>
+        </p:nvSpPr>
+        <p:spPr>
+          <a:xfrm>
+            <a:off x="685800" y="4343400"/>
+            <a:ext cx="5486400" cy="4114800"/>
+          </a:xfrm>
+          <a:prstGeom prst="rect">
+            <a:avLst/>
+          </a:prstGeom>
+        </p:spPr>
+        <p:txBody>
+          <a:bodyPr vert="horz" lIns="91440" tIns="45720" rIns="91440" bIns="45720"/>
+          <a:lstStyle/>
+          <a:p>
+            <a:endParaRPr lang="en-US"/>
+          </a:p>
+        </p:txBody>
+      </p:sp>
+      <p:sp>
+        <p:nvSpPr>
+          <p:cNvPr id="6" name="Footer Placeholder 5"/>
+          <p:cNvSpPr>
+            <a:spLocks noGrp="1"/>
+          </p:cNvSpPr>
+          <p:nvPr>
+            <p:ph type="ftr" sz="quarter" idx="4"/>
+          </p:nvPr>
+        </p:nvSpPr>
+        <p:spPr>
+          <a:xfrm>
+            <a:off x="0" y="8685213"/>
+            <a:ext cx="2971800" cy="458787"/>
+          </a:xfrm>
+          <a:prstGeom prst="rect">
+            <a:avLst/>
+          </a:prstGeom>
+        </p:spPr>
+        <p:txBody>
+          <a:bodyPr vert="horz" lIns="91440" tIns="45720" rIns="91440" bIns="45720"/>
+          <a:lstStyle>
+            <a:lvl1pPr algn="l">
+              <a:defRPr sz="1200"/>
+            </a:lvl1pPr>
+          </a:lstStyle>
+          <a:p>
+            <a:endParaRPr lang="en-US"/>
+          </a:p>
+        </p:txBody>
+      </p:sp>
+      <p:sp>
+        <p:nvSpPr>
+          <p:cNvPr id="7" name="Slide Number Placeholder 6"/>
+          <p:cNvSpPr>
+            <a:spLocks noGrp="1"/>
+          </p:cNvSpPr>
+          <p:nvPr>
+            <p:ph type="sldNum" sz="quarter" idx="5"/>
+          </p:nvPr>
+        </p:nvSpPr>
+        <p:spPr>
+          <a:xfrm>
+            <a:off x="3884613" y="8685213"/>
+            <a:ext cx="2971800" cy="458787"/>
+          </a:xfrm>
+          <a:prstGeom prst="rect">
+            <a:avLst/>
+          </a:prstGeom>
+        </p:spPr>
+        <p:txBody>
+          <a:bodyPr vert="horz" lIns="91440" tIns="45720" rIns="91440" bIns="45720"/>
+          <a:lstStyle>
+            <a:lvl1pPr algn="r">
+              <a:defRPr sz="1200"/>
+            </a:lvl1pPr>
+          </a:lstStyle>
+          <a:p>
+            <a:fld id="{B1E4B0A2-5C8E-4E5F-9C1D-2F3A4B5C6D72}" type="slidenum">
+              <a:rPr lang="en-US"/>
+              <a:t>‹#›</a:t>
+            </a:fld>
+            <a:endParaRPr lang="en-US"/>
+          </a:p>
+        </p:txBody>
+      </p:sp>
+    </p:spTree>
+  </p:cSld>
+  <p:clrMap bg1="lt1" tx1="dk1" bg2="lt2" tx2="dk2" accent1="accent1" accent2="accent2" accent3="accent3" accent4="accent4" accent5="accent5" accent6="accent6" hlink="hlink" folHlink="folHlink"/>
+  <p:notesStyle>
+    <a:lvl1pPr marL="0" algn="l" defTabSz="914400" rtl="0" eaLnBrk="1" latinLnBrk="0" hangingPunct="1">
+      <a:defRPr sz="1200" kern="1200">
+        <a:solidFill>
+          <a:schemeClr val="tx1"/>
+        </a:solidFill>
+        <a:latin typeface="+mn-lt"/>
+        <a:ea typeface="+mn-ea"/>
+        <a:cs typeface="+mn-cs"/>
+      </a:defRPr>
+    </a:lvl1pPr>
+    <a:lvl2pPr marL="457200" algn="l" defTabSz="914400" rtl="0" eaLnBrk="1" latinLnBrk="0" hangingPunct="1">
+      <a:defRPr sz="1200" kern="1200">
+        <a:solidFill>
+          <a:schemeClr val="tx1"/>
+        </a:solidFill>
+        <a:latin typeface="+mn-lt"/>
+        <a:ea typeface="+mn-ea"/>
+        <a:cs typeface="+mn-cs"/>
+      </a:defRPr>
+    </a:lvl2pPr>
+    <a:lvl3pPr marL="914400" algn="l" defTabSz="914400" rtl="0" eaLnBrk="1" latinLnBrk="0" hangingPunct="1">
+      <a:defRPr sz="1200" kern="1200">
+        <a:solidFill>
+          <a:schemeClr val="tx1"/>
+        </a:solidFill>
+        <a:latin typeface="+mn-lt"/>
+        <a:ea typeface="+mn-ea"/>
+        <a:cs typeface="+mn-cs"/>
+      </a:defRPr>
+    </a:lvl3pPr>
+    <a:lvl4pPr marL="1371600" algn="l" defTabSz="914400" rtl="0" eaLnBrk="1" latinLnBrk="0" hangingPunct="1">
+      <a:defRPr sz="1200" kern="1200">
+        <a:solidFill>
+          <a:schemeClr val="tx1"/>
+        </a:solidFill>
+        <a:latin typeface="+mn-lt"/>
+        <a:ea typeface="+mn-ea"/>
+        <a:cs typeface="+mn-cs"/>
+      </a:defRPr>
+    </a:lvl4pPr>
+    <a:lvl5pPr marL="1828800" algn="l" defTabSz="914400" rtl="0" eaLnBrk="1" latinLnBrk="0" hangingPunct="1">
+      <a:defRPr sz="1200" kern="1200">
+        <a:solidFill>
+          <a:schemeClr val="tx1"/>
+        </a:solidFill>
+        <a:latin typeface="+mn-lt"/>
+        <a:ea typeface="+mn-ea"/>
+        <a:cs typeface="+mn-cs"/>
+      </a:defRPr>
+    </a:lvl5pPr>
+    <a:lvl6pPr marL="2286000" algn="l" defTabSz="914400" rtl="0" eaLnBrk="1" latinLnBrk="0" hangingPunct="1">
+      <a:defRPr sz="1200" kern="1200">
+        <a:solidFill>
+          <a:schemeClr val="tx1"/>
+        </a:solidFill>
+        <a:latin typeface="+mn-lt"/>
+        <a:ea typeface="+mn-ea"/>
+        <a:cs typeface="+mn-cs"/>
+      </a:defRPr>
+    </a:lvl6pPr>
+    <a:lvl7pPr marL="2743200" algn="l" defTabSz="914400" rtl="0" eaLnBrk="1" latinLnBrk="0" hangingPunct="1">
+      <a:defRPr sz="1200" kern="1200">
+        <a:solidFill>
+          <a:schemeClr val="tx1"/>
+        </a:solidFill>
+        <a:latin typeface="+mn-lt"/>
+        <a:ea typeface="+mn-ea"/>
+        <a:cs typeface="+mn-cs"/>
+      </a:defRPr>
+    </a:lvl7pPr>
+    <a:lvl8pPr marL="3200400" algn="l" defTabSz="914400" rtl="0" eaLnBrk="1" latinLnBrk="0" hangingPunct="1">
+      <a:defRPr sz="1200" kern="1200">
+        <a:solidFill>
+          <a:schemeClr val="tx1"/>
+        </a:solidFill>
+        <a:latin typeface="+mn-lt"/>
+        <a:ea typeface="+mn-ea"/>
+        <a:cs typeface="+mn-cs"/>
+      </a:defRPr>
+    </a:lvl8pPr>
+    <a:lvl9pPr marL="3657600" algn="l" defTabSz="914400" rtl="0" eaLnBrk="1" latinLnBrk="0" hangingPunct="1">
+      <a:defRPr sz="1200" kern="1200">
+        <a:solidFill>
+          <a:schemeClr val="tx1"/>
+        </a:solidFill>
+        <a:latin typeface="+mn-lt"/>
+        <a:ea typeface="+mn-ea"/>
+        <a:cs typeface="+mn-cs"/>
+      </a:defRPr>
+    </a:lvl9pPr>
+  </p:notesStyle>
+</p:notesMaster>
+</file>
+
+<file path=ppt/notesSlides/notesSlide1.xml><?xml version="1.0" encoding="utf-8"?>
+<p:notes xmlns:a="http://schemas.openxmlformats.org/drawingml/2006/main" xmlns:r="http://schemas.openxmlformats.org/officeDocument/2006/relationships" xmlns:p="http://schemas.openxmlformats.org/presentationml/2006/main">
+  <p:cSld>
+    <p:spTree>
+      <p:nvGrpSpPr>
+        <p:cNvPr id="1" name=""/>
+        <p:cNvGrpSpPr/>
+        <p:nvPr/>
+      </p:nvGrpSpPr>
+      <p:grpSpPr>
+        <a:xfrm>
+          <a:off x="0" y="0"/>
+          <a:ext cx="0" cy="0"/>
+          <a:chOff x="0" y="0"/>
+          <a:chExt cx="0" cy="0"/>
+        </a:xfrm>
+      </p:grpSpPr>
+      <p:sp>
+        <p:nvSpPr>
+          <p:cNvPr id="2" name="Slide Image Placeholder 1"/>
+          <p:cNvSpPr>
+            <a:spLocks noGrp="1" noRot="1" noChangeAspect="1"/>
+          </p:cNvSpPr>
+          <p:nvPr>
+            <p:ph type="sldImg"/>
+          </p:nvPr>
+        </p:nvSpPr>
+        <p:spPr/>
+        <p:txBody>
+          <a:bodyPr/>
+          <a:lstStyle/>
+          <a:p>
+            <a:endParaRPr/>
+          </a:p>
+        </p:txBody>
+      </p:sp>
+      <p:sp>
+        <p:nvSpPr>
+          <p:cNvPr id="3" name="Notes Placeholder 2"/>
+          <p:cNvSpPr>
+            <a:spLocks noGrp="1"/>
+          </p:cNvSpPr>
+          <p:nvPr>
+            <p:ph type="body" idx="1"/>
+          </p:nvPr>
+        </p:nvSpPr>
+        <p:spPr/>
+        <p:txBody>
+          <a:bodyPr/>
+          <a:lstStyle/>
+          <a:p>
+            <a:r>
+              <a:rPr lang="en-US"/>
+              <a:t>This test slide uses the standard 4:3 page setting so the renderer can verify fixed slide geometry.</a:t>
+            </a:r>
+          </a:p>
+        </p:txBody>
+      </p:sp>
+    </p:spTree>
+  </p:cSld>
+  <p:clrMapOvr>
+    <a:masterClrMapping/>
+  </p:clrMapOvr>
+</p:notes>
+</file>
+
+<file path=ppt/notesSlides/notesSlide2.xml><?xml version="1.0" encoding="utf-8"?>
+<p:notes xmlns:a="http://schemas.openxmlformats.org/drawingml/2006/main" xmlns:r="http://schemas.openxmlformats.org/officeDocument/2006/relationships" xmlns:p="http://schemas.openxmlformats.org/presentationml/2006/main">
+  <p:cSld>
+    <p:spTree>
+      <p:nvGrpSpPr>
+        <p:cNvPr id="1" name="">
+          <a:extLst>
+            <a:ext uri="{FF2B5EF4-FFF2-40B4-BE49-F238E27FC236}">
+              <a16:creationId xmlns:a16="http://schemas.microsoft.com/office/drawing/2014/main" id="{F52A3BEB-C04A-675D-A21D-C36D0D855845}"/>
+            </a:ext>
+          </a:extLst>
+        </p:cNvPr>
+        <p:cNvGrpSpPr/>
+        <p:nvPr/>
+      </p:nvGrpSpPr>
+      <p:grpSpPr>
+        <a:xfrm>
+          <a:off x="0" y="0"/>
+          <a:ext cx="0" cy="0"/>
+          <a:chOff x="0" y="0"/>
+          <a:chExt cx="0" cy="0"/>
+        </a:xfrm>
+      </p:grpSpPr>
+      <p:sp>
+        <p:nvSpPr>
+          <p:cNvPr id="2" name="Slide Image Placeholder 1">
+            <a:extLst>
+              <a:ext uri="{FF2B5EF4-FFF2-40B4-BE49-F238E27FC236}">
+                <a16:creationId xmlns:a16="http://schemas.microsoft.com/office/drawing/2014/main" id="{7CD68895-9875-65B0-9113-17819929F08C}"/>
+              </a:ext>
+            </a:extLst>
+          </p:cNvPr>
+          <p:cNvSpPr>
+            <a:spLocks noGrp="1" noRot="1" noChangeAspect="1"/>
+          </p:cNvSpPr>
+          <p:nvPr>
+            <p:ph type="sldImg"/>
+          </p:nvPr>
+        </p:nvSpPr>
+        <p:spPr/>
+        <p:txBody>
+          <a:bodyPr/>
+          <a:lstStyle/>
+          <a:p>
+            <a:endParaRPr/>
+          </a:p>
+        </p:txBody>
+      </p:sp>
+      <p:sp>
+        <p:nvSpPr>
+          <p:cNvPr id="3" name="Notes Placeholder 2">
+            <a:extLst>
+              <a:ext uri="{FF2B5EF4-FFF2-40B4-BE49-F238E27FC236}">
+                <a16:creationId xmlns:a16="http://schemas.microsoft.com/office/drawing/2014/main" id="{501FC2E7-773A-DA57-535A-F073C9D58BA3}"/>
+              </a:ext>
+            </a:extLst>
+          </p:cNvPr>
+          <p:cNvSpPr>
+            <a:spLocks noGrp="1"/>
+          </p:cNvSpPr>
+          <p:nvPr>
+            <p:ph type="body" idx="1"/>
+          </p:nvPr>
+        </p:nvSpPr>
+        <p:spPr/>
+        <p:txBody>
+          <a:bodyPr/>
+          <a:lstStyle/>
+          <a:p>
+            <a:r>
+              <a:rPr lang="en-US"/>
+              <a:t>This test slide uses the standard 4:3 page setting so the renderer can verify fixed slide geometry.</a:t>
+            </a:r>
+          </a:p>
+        </p:txBody>
+      </p:sp>
+    </p:spTree>
+    <p:extLst>
+      <p:ext uri="{BB962C8B-B14F-4D97-AF65-F5344CB8AC3E}">
+        <p14:creationId xmlns:p14="http://schemas.microsoft.com/office/powerpoint/2010/main" val="2653918338"/>
+      </p:ext>
+    </p:extLst>
+  </p:cSld>
+  <p:clrMapOvr>
+    <a:masterClrMapping/>
+  </p:clrMapOvr>
+</p:notes>
+</file>
+
 <file path=ppt/slideLayouts/slideLayout1.xml><?xml version="1.0" encoding="utf-8"?>
-<p:sldLayout xmlns:p="http://schemas.openxmlformats.org/presentationml/2006/main" type="blank">
+<p:sldLayout xmlns:a="http://schemas.openxmlformats.org/drawingml/2006/main" xmlns:r="http://schemas.openxmlformats.org/officeDocument/2006/relationships" xmlns:p="http://schemas.openxmlformats.org/presentationml/2006/main" type="blank">
   <p:cSld name="Blank">
     <p:spTree>
       <p:nvGrpSpPr>
@@ -21,14 +4596,24 @@
         <p:cNvGrpSpPr/>
         <p:nvPr/>
       </p:nvGrpSpPr>
-      <p:grpSpPr/>
+      <p:grpSpPr>
+        <a:xfrm>
+          <a:off x="0" y="0"/>
+          <a:ext cx="0" cy="0"/>
+          <a:chOff x="0" y="0"/>
+          <a:chExt cx="0" cy="0"/>
+        </a:xfrm>
+      </p:grpSpPr>
     </p:spTree>
   </p:cSld>
+  <p:clrMapOvr>
+    <a:masterClrMapping/>
+  </p:clrMapOvr>
 </p:sldLayout>
 </file>
 
 <file path=ppt/slideLayouts/slideLayout2.xml><?xml version="1.0" encoding="utf-8"?>
-<p:sldLayout xmlns:p="http://schemas.openxmlformats.org/presentationml/2006/main" type="title">
+<p:sldLayout xmlns:a="http://schemas.openxmlformats.org/drawingml/2006/main" xmlns:r="http://schemas.openxmlformats.org/officeDocument/2006/relationships" xmlns:p="http://schemas.openxmlformats.org/presentationml/2006/main" type="title">
   <p:cSld name="Title Slide">
     <p:spTree>
       <p:nvGrpSpPr>
@@ -36,27 +4621,34 @@
         <p:cNvGrpSpPr/>
         <p:nvPr/>
       </p:nvGrpSpPr>
-      <p:grpSpPr/>
+      <p:grpSpPr>
+        <a:xfrm>
+          <a:off x="0" y="0"/>
+          <a:ext cx="0" cy="0"/>
+          <a:chOff x="0" y="0"/>
+          <a:chExt cx="0" cy="0"/>
+        </a:xfrm>
+      </p:grpSpPr>
       <p:sp>
         <p:nvSpPr>
           <p:cNvPr id="2" name="Title"/>
           <p:cNvSpPr>
-            <a:spLocks xmlns:a="http://schemas.openxmlformats.org/drawingml/2006/main" noGrp="1"/>
+            <a:spLocks noGrp="1"/>
           </p:cNvSpPr>
           <p:nvPr>
             <p:ph type="ctrTitle"/>
           </p:nvPr>
         </p:nvSpPr>
         <p:spPr>
-          <a:xfrm xmlns:a="http://schemas.openxmlformats.org/drawingml/2006/main">
+          <a:xfrm>
             <a:off x="685800" y="2130425"/>
             <a:ext cx="7772400" cy="1470025"/>
           </a:xfrm>
         </p:spPr>
         <p:txBody>
-          <a:bodyPr xmlns:a="http://schemas.openxmlformats.org/drawingml/2006/main"/>
-          <a:lstStyle xmlns:a="http://schemas.openxmlformats.org/drawingml/2006/main"/>
-          <a:p xmlns:a="http://schemas.openxmlformats.org/drawingml/2006/main">
+          <a:bodyPr/>
+          <a:lstStyle/>
+          <a:p>
             <a:endParaRPr lang="en-US"/>
           </a:p>
         </p:txBody>
@@ -65,33 +4657,36 @@
         <p:nvSpPr>
           <p:cNvPr id="3" name="Subtitle"/>
           <p:cNvSpPr>
-            <a:spLocks xmlns:a="http://schemas.openxmlformats.org/drawingml/2006/main" noGrp="1"/>
+            <a:spLocks noGrp="1"/>
           </p:cNvSpPr>
           <p:nvPr>
             <p:ph type="subTitle" idx="1"/>
           </p:nvPr>
         </p:nvSpPr>
         <p:spPr>
-          <a:xfrm xmlns:a="http://schemas.openxmlformats.org/drawingml/2006/main">
+          <a:xfrm>
             <a:off x="1371600" y="3886200"/>
             <a:ext cx="6400800" cy="1752600"/>
           </a:xfrm>
         </p:spPr>
         <p:txBody>
-          <a:bodyPr xmlns:a="http://schemas.openxmlformats.org/drawingml/2006/main"/>
-          <a:lstStyle xmlns:a="http://schemas.openxmlformats.org/drawingml/2006/main"/>
-          <a:p xmlns:a="http://schemas.openxmlformats.org/drawingml/2006/main">
+          <a:bodyPr/>
+          <a:lstStyle/>
+          <a:p>
             <a:endParaRPr lang="en-US"/>
           </a:p>
         </p:txBody>
       </p:sp>
     </p:spTree>
   </p:cSld>
+  <p:clrMapOvr>
+    <a:masterClrMapping/>
+  </p:clrMapOvr>
 </p:sldLayout>
 </file>
 
 <file path=ppt/slideLayouts/slideLayout3.xml><?xml version="1.0" encoding="utf-8"?>
-<p:sldLayout xmlns:p="http://schemas.openxmlformats.org/presentationml/2006/main" type="objTx">
+<p:sldLayout xmlns:a="http://schemas.openxmlformats.org/drawingml/2006/main" xmlns:r="http://schemas.openxmlformats.org/officeDocument/2006/relationships" xmlns:p="http://schemas.openxmlformats.org/presentationml/2006/main" type="objTx">
   <p:cSld name="Title and Content">
     <p:spTree>
       <p:nvGrpSpPr>
@@ -99,27 +4694,34 @@
         <p:cNvGrpSpPr/>
         <p:nvPr/>
       </p:nvGrpSpPr>
-      <p:grpSpPr/>
+      <p:grpSpPr>
+        <a:xfrm>
+          <a:off x="0" y="0"/>
+          <a:ext cx="0" cy="0"/>
+          <a:chOff x="0" y="0"/>
+          <a:chExt cx="0" cy="0"/>
+        </a:xfrm>
+      </p:grpSpPr>
       <p:sp>
         <p:nvSpPr>
           <p:cNvPr id="2" name="Title"/>
           <p:cNvSpPr>
-            <a:spLocks xmlns:a="http://schemas.openxmlformats.org/drawingml/2006/main" noGrp="1"/>
+            <a:spLocks noGrp="1"/>
           </p:cNvSpPr>
           <p:nvPr>
             <p:ph type="title"/>
           </p:nvPr>
         </p:nvSpPr>
         <p:spPr>
-          <a:xfrm xmlns:a="http://schemas.openxmlformats.org/drawingml/2006/main">
+          <a:xfrm>
             <a:off x="838200" y="365125"/>
             <a:ext cx="10515600" cy="1325563"/>
           </a:xfrm>
         </p:spPr>
         <p:txBody>
-          <a:bodyPr xmlns:a="http://schemas.openxmlformats.org/drawingml/2006/main"/>
-          <a:lstStyle xmlns:a="http://schemas.openxmlformats.org/drawingml/2006/main"/>
-          <a:p xmlns:a="http://schemas.openxmlformats.org/drawingml/2006/main">
+          <a:bodyPr/>
+          <a:lstStyle/>
+          <a:p>
             <a:endParaRPr lang="en-US"/>
           </a:p>
         </p:txBody>
@@ -128,33 +4730,36 @@
         <p:nvSpPr>
           <p:cNvPr id="3" name="Content"/>
           <p:cNvSpPr>
-            <a:spLocks xmlns:a="http://schemas.openxmlformats.org/drawingml/2006/main" noGrp="1"/>
+            <a:spLocks noGrp="1"/>
           </p:cNvSpPr>
           <p:nvPr>
             <p:ph type="body" idx="1"/>
           </p:nvPr>
         </p:nvSpPr>
         <p:spPr>
-          <a:xfrm xmlns:a="http://schemas.openxmlformats.org/drawingml/2006/main">
+          <a:xfrm>
             <a:off x="838200" y="1825625"/>
             <a:ext cx="10515600" cy="4351338"/>
           </a:xfrm>
         </p:spPr>
         <p:txBody>
-          <a:bodyPr xmlns:a="http://schemas.openxmlformats.org/drawingml/2006/main"/>
-          <a:lstStyle xmlns:a="http://schemas.openxmlformats.org/drawingml/2006/main"/>
-          <a:p xmlns:a="http://schemas.openxmlformats.org/drawingml/2006/main">
+          <a:bodyPr/>
+          <a:lstStyle/>
+          <a:p>
             <a:endParaRPr lang="en-US"/>
           </a:p>
         </p:txBody>
       </p:sp>
     </p:spTree>
   </p:cSld>
+  <p:clrMapOvr>
+    <a:masterClrMapping/>
+  </p:clrMapOvr>
 </p:sldLayout>
 </file>
 
 <file path=ppt/slideLayouts/slideLayout4.xml><?xml version="1.0" encoding="utf-8"?>
-<p:sldLayout xmlns:p="http://schemas.openxmlformats.org/presentationml/2006/main" type="twoColTx">
+<p:sldLayout xmlns:a="http://schemas.openxmlformats.org/drawingml/2006/main" xmlns:r="http://schemas.openxmlformats.org/officeDocument/2006/relationships" xmlns:p="http://schemas.openxmlformats.org/presentationml/2006/main" type="twoColTx">
   <p:cSld name="Two Content">
     <p:spTree>
       <p:nvGrpSpPr>
@@ -162,27 +4767,34 @@
         <p:cNvGrpSpPr/>
         <p:nvPr/>
       </p:nvGrpSpPr>
-      <p:grpSpPr/>
+      <p:grpSpPr>
+        <a:xfrm>
+          <a:off x="0" y="0"/>
+          <a:ext cx="0" cy="0"/>
+          <a:chOff x="0" y="0"/>
+          <a:chExt cx="0" cy="0"/>
+        </a:xfrm>
+      </p:grpSpPr>
       <p:sp>
         <p:nvSpPr>
           <p:cNvPr id="2" name="Title"/>
           <p:cNvSpPr>
-            <a:spLocks xmlns:a="http://schemas.openxmlformats.org/drawingml/2006/main" noGrp="1"/>
+            <a:spLocks noGrp="1"/>
           </p:cNvSpPr>
           <p:nvPr>
             <p:ph type="title"/>
           </p:nvPr>
         </p:nvSpPr>
         <p:spPr>
-          <a:xfrm xmlns:a="http://schemas.openxmlformats.org/drawingml/2006/main">
+          <a:xfrm>
             <a:off x="838200" y="365125"/>
             <a:ext cx="10515600" cy="1325563"/>
           </a:xfrm>
         </p:spPr>
         <p:txBody>
-          <a:bodyPr xmlns:a="http://schemas.openxmlformats.org/drawingml/2006/main"/>
-          <a:lstStyle xmlns:a="http://schemas.openxmlformats.org/drawingml/2006/main"/>
-          <a:p xmlns:a="http://schemas.openxmlformats.org/drawingml/2006/main">
+          <a:bodyPr/>
+          <a:lstStyle/>
+          <a:p>
             <a:endParaRPr lang="en-US"/>
           </a:p>
         </p:txBody>
@@ -191,22 +4803,22 @@
         <p:nvSpPr>
           <p:cNvPr id="3" name="Content Left"/>
           <p:cNvSpPr>
-            <a:spLocks xmlns:a="http://schemas.openxmlformats.org/drawingml/2006/main" noGrp="1"/>
+            <a:spLocks noGrp="1"/>
           </p:cNvSpPr>
           <p:nvPr>
             <p:ph type="body" idx="1"/>
           </p:nvPr>
         </p:nvSpPr>
         <p:spPr>
-          <a:xfrm xmlns:a="http://schemas.openxmlformats.org/drawingml/2006/main">
+          <a:xfrm>
             <a:off x="838200" y="1825625"/>
             <a:ext cx="5181600" cy="4351338"/>
           </a:xfrm>
         </p:spPr>
         <p:txBody>
-          <a:bodyPr xmlns:a="http://schemas.openxmlformats.org/drawingml/2006/main"/>
-          <a:lstStyle xmlns:a="http://schemas.openxmlformats.org/drawingml/2006/main"/>
-          <a:p xmlns:a="http://schemas.openxmlformats.org/drawingml/2006/main">
+          <a:bodyPr/>
+          <a:lstStyle/>
+          <a:p>
             <a:endParaRPr lang="en-US"/>
           </a:p>
         </p:txBody>
@@ -215,33 +4827,36 @@
         <p:nvSpPr>
           <p:cNvPr id="4" name="Content Right"/>
           <p:cNvSpPr>
-            <a:spLocks xmlns:a="http://schemas.openxmlformats.org/drawingml/2006/main" noGrp="1"/>
+            <a:spLocks noGrp="1"/>
           </p:cNvSpPr>
           <p:nvPr>
             <p:ph type="body" idx="2"/>
           </p:nvPr>
         </p:nvSpPr>
         <p:spPr>
-          <a:xfrm xmlns:a="http://schemas.openxmlformats.org/drawingml/2006/main">
+          <a:xfrm>
             <a:off x="6172200" y="1825625"/>
             <a:ext cx="5181600" cy="4351338"/>
           </a:xfrm>
         </p:spPr>
         <p:txBody>
-          <a:bodyPr xmlns:a="http://schemas.openxmlformats.org/drawingml/2006/main"/>
-          <a:lstStyle xmlns:a="http://schemas.openxmlformats.org/drawingml/2006/main"/>
-          <a:p xmlns:a="http://schemas.openxmlformats.org/drawingml/2006/main">
+          <a:bodyPr/>
+          <a:lstStyle/>
+          <a:p>
             <a:endParaRPr lang="en-US"/>
           </a:p>
         </p:txBody>
       </p:sp>
     </p:spTree>
   </p:cSld>
+  <p:clrMapOvr>
+    <a:masterClrMapping/>
+  </p:clrMapOvr>
 </p:sldLayout>
 </file>
 
 <file path=ppt/slideLayouts/slideLayout5.xml><?xml version="1.0" encoding="utf-8"?>
-<p:sldLayout xmlns:p="http://schemas.openxmlformats.org/presentationml/2006/main" type="titleOnly">
+<p:sldLayout xmlns:a="http://schemas.openxmlformats.org/drawingml/2006/main" xmlns:r="http://schemas.openxmlformats.org/officeDocument/2006/relationships" xmlns:p="http://schemas.openxmlformats.org/presentationml/2006/main" type="titleOnly">
   <p:cSld name="Title Only">
     <p:spTree>
       <p:nvGrpSpPr>
@@ -249,67 +4864,370 @@
         <p:cNvGrpSpPr/>
         <p:nvPr/>
       </p:nvGrpSpPr>
-      <p:grpSpPr/>
+      <p:grpSpPr>
+        <a:xfrm>
+          <a:off x="0" y="0"/>
+          <a:ext cx="0" cy="0"/>
+          <a:chOff x="0" y="0"/>
+          <a:chExt cx="0" cy="0"/>
+        </a:xfrm>
+      </p:grpSpPr>
       <p:sp>
         <p:nvSpPr>
           <p:cNvPr id="2" name="Title"/>
           <p:cNvSpPr>
-            <a:spLocks xmlns:a="http://schemas.openxmlformats.org/drawingml/2006/main" noGrp="1"/>
+            <a:spLocks noGrp="1"/>
           </p:cNvSpPr>
           <p:nvPr>
             <p:ph type="title"/>
           </p:nvPr>
         </p:nvSpPr>
         <p:spPr>
-          <a:xfrm xmlns:a="http://schemas.openxmlformats.org/drawingml/2006/main">
+          <a:xfrm>
             <a:off x="838200" y="365125"/>
             <a:ext cx="10515600" cy="1325563"/>
           </a:xfrm>
         </p:spPr>
         <p:txBody>
-          <a:bodyPr xmlns:a="http://schemas.openxmlformats.org/drawingml/2006/main"/>
-          <a:lstStyle xmlns:a="http://schemas.openxmlformats.org/drawingml/2006/main"/>
-          <a:p xmlns:a="http://schemas.openxmlformats.org/drawingml/2006/main">
+          <a:bodyPr/>
+          <a:lstStyle/>
+          <a:p>
             <a:endParaRPr lang="en-US"/>
           </a:p>
         </p:txBody>
       </p:sp>
     </p:spTree>
   </p:cSld>
+  <p:clrMapOvr>
+    <a:masterClrMapping/>
+  </p:clrMapOvr>
 </p:sldLayout>
 </file>
 
 <file path=ppt/slideMasters/slideMaster1.xml><?xml version="1.0" encoding="utf-8"?>
-<p:sldMaster xmlns:r="http://schemas.openxmlformats.org/officeDocument/2006/relationships" xmlns:p="http://schemas.openxmlformats.org/presentationml/2006/main">
+<p:sldMaster xmlns:a="http://schemas.openxmlformats.org/drawingml/2006/main" xmlns:r="http://schemas.openxmlformats.org/officeDocument/2006/relationships" xmlns:p="http://schemas.openxmlformats.org/presentationml/2006/main">
   <p:cSld>
+    <p:bg>
+      <p:bgRef idx="1001">
+        <a:schemeClr val="bg1"/>
+      </p:bgRef>
+    </p:bg>
     <p:spTree>
       <p:nvGrpSpPr>
         <p:cNvPr id="1" name=""/>
         <p:cNvGrpSpPr/>
         <p:nvPr/>
       </p:nvGrpSpPr>
-      <p:grpSpPr/>
+      <p:grpSpPr>
+        <a:xfrm>
+          <a:off x="0" y="0"/>
+          <a:ext cx="0" cy="0"/>
+          <a:chOff x="0" y="0"/>
+          <a:chExt cx="0" cy="0"/>
+        </a:xfrm>
+      </p:grpSpPr>
     </p:spTree>
   </p:cSld>
   <p:clrMap bg1="lt1" tx1="dk1" bg2="lt2" tx2="dk2" accent1="accent1" accent2="accent2" accent3="accent3" accent4="accent4" accent5="accent5" accent6="accent6" hlink="hlink" folHlink="folHlink"/>
   <p:sldLayoutIdLst>
-    <p:sldLayoutId xmlns:r="http://schemas.openxmlformats.org/officeDocument/2006/relationships" id="2147483649" r:id="rId1"/>
-    <p:sldLayoutId xmlns:r="http://schemas.openxmlformats.org/officeDocument/2006/relationships" id="2147483650" r:id="rId2"/>
-    <p:sldLayoutId xmlns:r="http://schemas.openxmlformats.org/officeDocument/2006/relationships" id="2147483651" r:id="rId3"/>
-    <p:sldLayoutId xmlns:r="http://schemas.openxmlformats.org/officeDocument/2006/relationships" id="2147483652" r:id="rId4"/>
-    <p:sldLayoutId xmlns:r="http://schemas.openxmlformats.org/officeDocument/2006/relationships" id="2147483653" r:id="rId5"/>
+    <p:sldLayoutId id="2147483649" r:id="rId1"/>
+    <p:sldLayoutId id="2147483650" r:id="rId2"/>
+    <p:sldLayoutId id="2147483651" r:id="rId3"/>
+    <p:sldLayoutId id="2147483652" r:id="rId4"/>
+    <p:sldLayoutId id="2147483653" r:id="rId5"/>
   </p:sldLayoutIdLst>
+  <p:txStyles>
+    <p:titleStyle>
+      <a:lvl1pPr algn="l" defTabSz="914400" rtl="0" eaLnBrk="1" latinLnBrk="0" hangingPunct="1">
+        <a:lnSpc>
+          <a:spcPct val="90000"/>
+        </a:lnSpc>
+        <a:spcBef>
+          <a:spcPct val="0"/>
+        </a:spcBef>
+        <a:buNone/>
+        <a:defRPr sz="4400" kern="1200">
+          <a:solidFill>
+            <a:schemeClr val="tx1"/>
+          </a:solidFill>
+          <a:latin typeface="+mj-lt"/>
+          <a:ea typeface="+mj-ea"/>
+          <a:cs typeface="+mj-cs"/>
+        </a:defRPr>
+      </a:lvl1pPr>
+    </p:titleStyle>
+    <p:bodyStyle>
+      <a:lvl1pPr marL="228600" indent="-228600" algn="l" defTabSz="914400" rtl="0" eaLnBrk="1" latinLnBrk="0" hangingPunct="1">
+        <a:lnSpc>
+          <a:spcPct val="90000"/>
+        </a:lnSpc>
+        <a:spcBef>
+          <a:spcPts val="1000"/>
+        </a:spcBef>
+        <a:buFont typeface="Arial" panose="020B0604020202020204" pitchFamily="34" charset="0"/>
+        <a:buChar char="•"/>
+        <a:defRPr sz="2800" kern="1200">
+          <a:solidFill>
+            <a:schemeClr val="tx1"/>
+          </a:solidFill>
+          <a:latin typeface="+mn-lt"/>
+          <a:ea typeface="+mn-ea"/>
+          <a:cs typeface="+mn-cs"/>
+        </a:defRPr>
+      </a:lvl1pPr>
+      <a:lvl2pPr marL="685800" indent="-228600" algn="l" defTabSz="914400" rtl="0" eaLnBrk="1" latinLnBrk="0" hangingPunct="1">
+        <a:lnSpc>
+          <a:spcPct val="90000"/>
+        </a:lnSpc>
+        <a:spcBef>
+          <a:spcPts val="500"/>
+        </a:spcBef>
+        <a:buFont typeface="Arial" panose="020B0604020202020204" pitchFamily="34" charset="0"/>
+        <a:buChar char="•"/>
+        <a:defRPr sz="2400" kern="1200">
+          <a:solidFill>
+            <a:schemeClr val="tx1"/>
+          </a:solidFill>
+          <a:latin typeface="+mn-lt"/>
+          <a:ea typeface="+mn-ea"/>
+          <a:cs typeface="+mn-cs"/>
+        </a:defRPr>
+      </a:lvl2pPr>
+      <a:lvl3pPr marL="1143000" indent="-228600" algn="l" defTabSz="914400" rtl="0" eaLnBrk="1" latinLnBrk="0" hangingPunct="1">
+        <a:lnSpc>
+          <a:spcPct val="90000"/>
+        </a:lnSpc>
+        <a:spcBef>
+          <a:spcPts val="500"/>
+        </a:spcBef>
+        <a:buFont typeface="Arial" panose="020B0604020202020204" pitchFamily="34" charset="0"/>
+        <a:buChar char="•"/>
+        <a:defRPr sz="2000" kern="1200">
+          <a:solidFill>
+            <a:schemeClr val="tx1"/>
+          </a:solidFill>
+          <a:latin typeface="+mn-lt"/>
+          <a:ea typeface="+mn-ea"/>
+          <a:cs typeface="+mn-cs"/>
+        </a:defRPr>
+      </a:lvl3pPr>
+      <a:lvl4pPr marL="1600200" indent="-228600" algn="l" defTabSz="914400" rtl="0" eaLnBrk="1" latinLnBrk="0" hangingPunct="1">
+        <a:lnSpc>
+          <a:spcPct val="90000"/>
+        </a:lnSpc>
+        <a:spcBef>
+          <a:spcPts val="500"/>
+        </a:spcBef>
+        <a:buFont typeface="Arial" panose="020B0604020202020204" pitchFamily="34" charset="0"/>
+        <a:buChar char="•"/>
+        <a:defRPr sz="1800" kern="1200">
+          <a:solidFill>
+            <a:schemeClr val="tx1"/>
+          </a:solidFill>
+          <a:latin typeface="+mn-lt"/>
+          <a:ea typeface="+mn-ea"/>
+          <a:cs typeface="+mn-cs"/>
+        </a:defRPr>
+      </a:lvl4pPr>
+      <a:lvl5pPr marL="2057400" indent="-228600" algn="l" defTabSz="914400" rtl="0" eaLnBrk="1" latinLnBrk="0" hangingPunct="1">
+        <a:lnSpc>
+          <a:spcPct val="90000"/>
+        </a:lnSpc>
+        <a:spcBef>
+          <a:spcPts val="500"/>
+        </a:spcBef>
+        <a:buFont typeface="Arial" panose="020B0604020202020204" pitchFamily="34" charset="0"/>
+        <a:buChar char="•"/>
+        <a:defRPr sz="1800" kern="1200">
+          <a:solidFill>
+            <a:schemeClr val="tx1"/>
+          </a:solidFill>
+          <a:latin typeface="+mn-lt"/>
+          <a:ea typeface="+mn-ea"/>
+          <a:cs typeface="+mn-cs"/>
+        </a:defRPr>
+      </a:lvl5pPr>
+      <a:lvl6pPr marL="2514600" indent="-228600" algn="l" defTabSz="914400" rtl="0" eaLnBrk="1" latinLnBrk="0" hangingPunct="1">
+        <a:lnSpc>
+          <a:spcPct val="90000"/>
+        </a:lnSpc>
+        <a:spcBef>
+          <a:spcPts val="500"/>
+        </a:spcBef>
+        <a:buFont typeface="Arial" panose="020B0604020202020204" pitchFamily="34" charset="0"/>
+        <a:buChar char="•"/>
+        <a:defRPr sz="1800" kern="1200">
+          <a:solidFill>
+            <a:schemeClr val="tx1"/>
+          </a:solidFill>
+          <a:latin typeface="+mn-lt"/>
+          <a:ea typeface="+mn-ea"/>
+          <a:cs typeface="+mn-cs"/>
+        </a:defRPr>
+      </a:lvl6pPr>
+      <a:lvl7pPr marL="2971800" indent="-228600" algn="l" defTabSz="914400" rtl="0" eaLnBrk="1" latinLnBrk="0" hangingPunct="1">
+        <a:lnSpc>
+          <a:spcPct val="90000"/>
+        </a:lnSpc>
+        <a:spcBef>
+          <a:spcPts val="500"/>
+        </a:spcBef>
+        <a:buFont typeface="Arial" panose="020B0604020202020204" pitchFamily="34" charset="0"/>
+        <a:buChar char="•"/>
+        <a:defRPr sz="1800" kern="1200">
+          <a:solidFill>
+            <a:schemeClr val="tx1"/>
+          </a:solidFill>
+          <a:latin typeface="+mn-lt"/>
+          <a:ea typeface="+mn-ea"/>
+          <a:cs typeface="+mn-cs"/>
+        </a:defRPr>
+      </a:lvl7pPr>
+      <a:lvl8pPr marL="3429000" indent="-228600" algn="l" defTabSz="914400" rtl="0" eaLnBrk="1" latinLnBrk="0" hangingPunct="1">
+        <a:lnSpc>
+          <a:spcPct val="90000"/>
+        </a:lnSpc>
+        <a:spcBef>
+          <a:spcPts val="500"/>
+        </a:spcBef>
+        <a:buFont typeface="Arial" panose="020B0604020202020204" pitchFamily="34" charset="0"/>
+        <a:buChar char="•"/>
+        <a:defRPr sz="1800" kern="1200">
+          <a:solidFill>
+            <a:schemeClr val="tx1"/>
+          </a:solidFill>
+          <a:latin typeface="+mn-lt"/>
+          <a:ea typeface="+mn-ea"/>
+          <a:cs typeface="+mn-cs"/>
+        </a:defRPr>
+      </a:lvl8pPr>
+      <a:lvl9pPr marL="3886200" indent="-228600" algn="l" defTabSz="914400" rtl="0" eaLnBrk="1" latinLnBrk="0" hangingPunct="1">
+        <a:lnSpc>
+          <a:spcPct val="90000"/>
+        </a:lnSpc>
+        <a:spcBef>
+          <a:spcPts val="500"/>
+        </a:spcBef>
+        <a:buFont typeface="Arial" panose="020B0604020202020204" pitchFamily="34" charset="0"/>
+        <a:buChar char="•"/>
+        <a:defRPr sz="1800" kern="1200">
+          <a:solidFill>
+            <a:schemeClr val="tx1"/>
+          </a:solidFill>
+          <a:latin typeface="+mn-lt"/>
+          <a:ea typeface="+mn-ea"/>
+          <a:cs typeface="+mn-cs"/>
+        </a:defRPr>
+      </a:lvl9pPr>
+    </p:bodyStyle>
+    <p:otherStyle>
+      <a:defPPr>
+        <a:defRPr lang="zh-CN"/>
+      </a:defPPr>
+      <a:lvl1pPr marL="0" algn="l" defTabSz="914400" rtl="0" eaLnBrk="1" latinLnBrk="0" hangingPunct="1">
+        <a:defRPr sz="1800" kern="1200">
+          <a:solidFill>
+            <a:schemeClr val="tx1"/>
+          </a:solidFill>
+          <a:latin typeface="+mn-lt"/>
+          <a:ea typeface="+mn-ea"/>
+          <a:cs typeface="+mn-cs"/>
+        </a:defRPr>
+      </a:lvl1pPr>
+      <a:lvl2pPr marL="457200" algn="l" defTabSz="914400" rtl="0" eaLnBrk="1" latinLnBrk="0" hangingPunct="1">
+        <a:defRPr sz="1800" kern="1200">
+          <a:solidFill>
+            <a:schemeClr val="tx1"/>
+          </a:solidFill>
+          <a:latin typeface="+mn-lt"/>
+          <a:ea typeface="+mn-ea"/>
+          <a:cs typeface="+mn-cs"/>
+        </a:defRPr>
+      </a:lvl2pPr>
+      <a:lvl3pPr marL="914400" algn="l" defTabSz="914400" rtl="0" eaLnBrk="1" latinLnBrk="0" hangingPunct="1">
+        <a:defRPr sz="1800" kern="1200">
+          <a:solidFill>
+            <a:schemeClr val="tx1"/>
+          </a:solidFill>
+          <a:latin typeface="+mn-lt"/>
+          <a:ea typeface="+mn-ea"/>
+          <a:cs typeface="+mn-cs"/>
+        </a:defRPr>
+      </a:lvl3pPr>
+      <a:lvl4pPr marL="1371600" algn="l" defTabSz="914400" rtl="0" eaLnBrk="1" latinLnBrk="0" hangingPunct="1">
+        <a:defRPr sz="1800" kern="1200">
+          <a:solidFill>
+            <a:schemeClr val="tx1"/>
+          </a:solidFill>
+          <a:latin typeface="+mn-lt"/>
+          <a:ea typeface="+mn-ea"/>
+          <a:cs typeface="+mn-cs"/>
+        </a:defRPr>
+      </a:lvl4pPr>
+      <a:lvl5pPr marL="1828800" algn="l" defTabSz="914400" rtl="0" eaLnBrk="1" latinLnBrk="0" hangingPunct="1">
+        <a:defRPr sz="1800" kern="1200">
+          <a:solidFill>
+            <a:schemeClr val="tx1"/>
+          </a:solidFill>
+          <a:latin typeface="+mn-lt"/>
+          <a:ea typeface="+mn-ea"/>
+          <a:cs typeface="+mn-cs"/>
+        </a:defRPr>
+      </a:lvl5pPr>
+      <a:lvl6pPr marL="2286000" algn="l" defTabSz="914400" rtl="0" eaLnBrk="1" latinLnBrk="0" hangingPunct="1">
+        <a:defRPr sz="1800" kern="1200">
+          <a:solidFill>
+            <a:schemeClr val="tx1"/>
+          </a:solidFill>
+          <a:latin typeface="+mn-lt"/>
+          <a:ea typeface="+mn-ea"/>
+          <a:cs typeface="+mn-cs"/>
+        </a:defRPr>
+      </a:lvl6pPr>
+      <a:lvl7pPr marL="2743200" algn="l" defTabSz="914400" rtl="0" eaLnBrk="1" latinLnBrk="0" hangingPunct="1">
+        <a:defRPr sz="1800" kern="1200">
+          <a:solidFill>
+            <a:schemeClr val="tx1"/>
+          </a:solidFill>
+          <a:latin typeface="+mn-lt"/>
+          <a:ea typeface="+mn-ea"/>
+          <a:cs typeface="+mn-cs"/>
+        </a:defRPr>
+      </a:lvl7pPr>
+      <a:lvl8pPr marL="3200400" algn="l" defTabSz="914400" rtl="0" eaLnBrk="1" latinLnBrk="0" hangingPunct="1">
+        <a:defRPr sz="1800" kern="1200">
+          <a:solidFill>
+            <a:schemeClr val="tx1"/>
+          </a:solidFill>
+          <a:latin typeface="+mn-lt"/>
+          <a:ea typeface="+mn-ea"/>
+          <a:cs typeface="+mn-cs"/>
+        </a:defRPr>
+      </a:lvl8pPr>
+      <a:lvl9pPr marL="3657600" algn="l" defTabSz="914400" rtl="0" eaLnBrk="1" latinLnBrk="0" hangingPunct="1">
+        <a:defRPr sz="1800" kern="1200">
+          <a:solidFill>
+            <a:schemeClr val="tx1"/>
+          </a:solidFill>
+          <a:latin typeface="+mn-lt"/>
+          <a:ea typeface="+mn-ea"/>
+          <a:cs typeface="+mn-cs"/>
+        </a:defRPr>
+      </a:lvl9pPr>
+    </p:otherStyle>
+  </p:txStyles>
 </p:sldMaster>
 </file>
 
 <file path=ppt/slides/slide1.xml><?xml version="1.0" encoding="utf-8"?>
-<p:sld xmlns:p="http://schemas.openxmlformats.org/presentationml/2006/main">
+<p:sld xmlns:a="http://schemas.openxmlformats.org/drawingml/2006/main" xmlns:r="http://schemas.openxmlformats.org/officeDocument/2006/relationships" xmlns:p="http://schemas.openxmlformats.org/presentationml/2006/main">
   <p:cSld>
     <p:bg>
       <p:bgPr>
-        <a:solidFill xmlns:a="http://schemas.openxmlformats.org/drawingml/2006/main">
+        <a:solidFill>
           <a:srgbClr val="F2EFE7"/>
         </a:solidFill>
+        <a:effectLst/>
       </p:bgPr>
     </p:bg>
     <p:spTree>
@@ -318,27 +5236,71 @@
         <p:cNvGrpSpPr/>
         <p:nvPr/>
       </p:nvGrpSpPr>
-      <p:grpSpPr/>
+      <p:grpSpPr>
+        <a:xfrm>
+          <a:off x="0" y="0"/>
+          <a:ext cx="0" cy="0"/>
+          <a:chOff x="0" y="0"/>
+          <a:chExt cx="0" cy="0"/>
+        </a:xfrm>
+      </p:grpSpPr>
       <p:sp>
         <p:nvSpPr>
-          <p:cNvPr id="2" name="Title"/>
+          <p:cNvPr id="100000" name="HeaderBand"/>
           <p:cNvSpPr/>
-          <p:nvPr>
-            <p:ph type="title"/>
-          </p:nvPr>
+          <p:nvPr/>
         </p:nvSpPr>
         <p:spPr>
-          <a:xfrm xmlns:a="http://schemas.openxmlformats.org/drawingml/2006/main">
-            <a:off x="838200" y="365125"/>
-            <a:ext cx="10515600" cy="1320800"/>
+          <a:xfrm>
+            <a:off x="0" y="0"/>
+            <a:ext cx="9144000" cy="1656000"/>
           </a:xfrm>
+          <a:prstGeom prst="rect">
+            <a:avLst/>
+          </a:prstGeom>
+          <a:solidFill>
+            <a:srgbClr val="152B2A"/>
+          </a:solidFill>
+          <a:ln>
+            <a:noFill/>
+          </a:ln>
         </p:spPr>
         <p:txBody>
-          <a:bodyPr xmlns:a="http://schemas.openxmlformats.org/drawingml/2006/main"/>
-          <a:lstStyle xmlns:a="http://schemas.openxmlformats.org/drawingml/2006/main"/>
-          <a:p xmlns:a="http://schemas.openxmlformats.org/drawingml/2006/main">
+          <a:bodyPr/>
+          <a:lstStyle/>
+          <a:p>
+            <a:endParaRPr/>
+          </a:p>
+        </p:txBody>
+      </p:sp>
+      <p:sp>
+        <p:nvSpPr>
+          <p:cNvPr id="100001" name="Title"/>
+          <p:cNvSpPr txBox="1"/>
+          <p:nvPr/>
+        </p:nvSpPr>
+        <p:spPr>
+          <a:xfrm>
+            <a:off x="540000" y="360000"/>
+            <a:ext cx="8064000" cy="900000"/>
+          </a:xfrm>
+          <a:prstGeom prst="rect">
+            <a:avLst/>
+          </a:prstGeom>
+          <a:noFill/>
+        </p:spPr>
+        <p:txBody>
+          <a:bodyPr/>
+          <a:lstStyle/>
+          <a:p>
             <a:r>
-              <a:rPr lang="en-US"/>
+              <a:rPr lang="en-US" sz="3600" b="1">
+                <a:solidFill>
+                  <a:srgbClr val="FFFFFF"/>
+                </a:solidFill>
+                <a:latin typeface="Calibri"/>
+                <a:ea typeface="Calibri"/>
+              </a:rPr>
               <a:t>Survoler Presentation</a:t>
             </a:r>
           </a:p>
@@ -346,31 +5308,275 @@
       </p:sp>
       <p:sp>
         <p:nvSpPr>
-          <p:cNvPr id="3" name="Content"/>
-          <p:cNvSpPr txBox="1"/>
-          <p:nvPr>
-            <p:ph type="body" idx="1"/>
-          </p:nvPr>
+          <p:cNvPr id="100002" name="RatioCard"/>
+          <p:cNvSpPr/>
+          <p:nvPr/>
         </p:nvSpPr>
         <p:spPr>
-          <a:xfrm xmlns:a="http://schemas.openxmlformats.org/drawingml/2006/main">
-            <a:off x="838200" y="1825625"/>
-            <a:ext cx="10515600" cy="4349750"/>
+          <a:xfrm>
+            <a:off x="540000" y="2160000"/>
+            <a:ext cx="2880000" cy="2700000"/>
           </a:xfrm>
+          <a:prstGeom prst="roundRect">
+            <a:avLst/>
+          </a:prstGeom>
+          <a:solidFill>
+            <a:srgbClr val="D6A84B"/>
+          </a:solidFill>
+          <a:ln>
+            <a:noFill/>
+          </a:ln>
         </p:spPr>
         <p:txBody>
-          <a:bodyPr xmlns:a="http://schemas.openxmlformats.org/drawingml/2006/main"/>
-          <a:lstStyle xmlns:a="http://schemas.openxmlformats.org/drawingml/2006/main"/>
-          <a:p xmlns:a="http://schemas.openxmlformats.org/drawingml/2006/main">
+          <a:bodyPr anchor="ctr"/>
+          <a:lstStyle/>
+          <a:p>
+            <a:pPr algn="ctr"/>
             <a:r>
-              <a:rPr lang="en-US"/>
-              <a:t>Fast Office preview on Android</a:t>
+              <a:rPr lang="en-US" sz="5400" b="1">
+                <a:solidFill>
+                  <a:srgbClr val="272116"/>
+                </a:solidFill>
+                <a:latin typeface="Calibri"/>
+                <a:ea typeface="Calibri"/>
+              </a:rPr>
+              <a:t>4:3</a:t>
+            </a:r>
+          </a:p>
+        </p:txBody>
+      </p:sp>
+      <p:sp>
+        <p:nvSpPr>
+          <p:cNvPr id="100003" name="Body"/>
+          <p:cNvSpPr txBox="1"/>
+          <p:nvPr/>
+        </p:nvSpPr>
+        <p:spPr>
+          <a:xfrm>
+            <a:off x="3960000" y="2520000"/>
+            <a:ext cx="4464000" cy="1800000"/>
+          </a:xfrm>
+          <a:prstGeom prst="rect">
+            <a:avLst/>
+          </a:prstGeom>
+          <a:noFill/>
+        </p:spPr>
+        <p:txBody>
+          <a:bodyPr anchor="ctr"/>
+          <a:lstStyle/>
+          <a:p>
+            <a:r>
+              <a:rPr lang="en-US" sz="2200">
+                <a:solidFill>
+                  <a:srgbClr val="263533"/>
+                </a:solidFill>
+                <a:latin typeface="Calibri"/>
+                <a:ea typeface="Calibri"/>
+              </a:rPr>
+              <a:t>The preview must preserve the presentation's standard page size and aspect ratio.</a:t>
             </a:r>
           </a:p>
         </p:txBody>
       </p:sp>
     </p:spTree>
   </p:cSld>
+  <p:clrMapOvr>
+    <a:masterClrMapping/>
+  </p:clrMapOvr>
+</p:sld>
+</file>
+
+<file path=ppt/slides/slide2.xml><?xml version="1.0" encoding="utf-8"?>
+<p:sld xmlns:a="http://schemas.openxmlformats.org/drawingml/2006/main" xmlns:r="http://schemas.openxmlformats.org/officeDocument/2006/relationships" xmlns:p="http://schemas.openxmlformats.org/presentationml/2006/main">
+  <p:cSld>
+    <p:spTree>
+      <p:nvGrpSpPr>
+        <p:cNvPr id="1" name="">
+          <a:extLst>
+            <a:ext uri="{FF2B5EF4-FFF2-40B4-BE49-F238E27FC236}">
+              <a16:creationId xmlns:a16="http://schemas.microsoft.com/office/drawing/2014/main" id="{81866583-1EBD-90DB-B21C-4F8824E1AB61}"/>
+            </a:ext>
+          </a:extLst>
+        </p:cNvPr>
+        <p:cNvGrpSpPr/>
+        <p:nvPr/>
+      </p:nvGrpSpPr>
+      <p:grpSpPr>
+        <a:xfrm>
+          <a:off x="0" y="0"/>
+          <a:ext cx="0" cy="0"/>
+          <a:chOff x="0" y="0"/>
+          <a:chExt cx="0" cy="0"/>
+        </a:xfrm>
+      </p:grpSpPr>
+      <p:sp>
+        <p:nvSpPr>
+          <p:cNvPr id="100000" name="HeaderBand">
+            <a:extLst>
+              <a:ext uri="{FF2B5EF4-FFF2-40B4-BE49-F238E27FC236}">
+                <a16:creationId xmlns:a16="http://schemas.microsoft.com/office/drawing/2014/main" id="{5C5C9798-C96E-D4FE-1B19-3A17B6A8F416}"/>
+              </a:ext>
+            </a:extLst>
+          </p:cNvPr>
+          <p:cNvSpPr/>
+          <p:nvPr/>
+        </p:nvSpPr>
+        <p:spPr>
+          <a:xfrm>
+            <a:off x="0" y="0"/>
+            <a:ext cx="9144000" cy="1656000"/>
+          </a:xfrm>
+          <a:prstGeom prst="rect">
+            <a:avLst/>
+          </a:prstGeom>
+          <a:solidFill>
+            <a:srgbClr val="152B2A"/>
+          </a:solidFill>
+          <a:ln>
+            <a:noFill/>
+          </a:ln>
+        </p:spPr>
+        <p:txBody>
+          <a:bodyPr/>
+          <a:lstStyle/>
+          <a:p>
+            <a:endParaRPr/>
+          </a:p>
+        </p:txBody>
+      </p:sp>
+      <p:sp>
+        <p:nvSpPr>
+          <p:cNvPr id="100001" name="Title">
+            <a:extLst>
+              <a:ext uri="{FF2B5EF4-FFF2-40B4-BE49-F238E27FC236}">
+                <a16:creationId xmlns:a16="http://schemas.microsoft.com/office/drawing/2014/main" id="{C0954FD8-2F80-EAEF-816A-C0A83D4E504D}"/>
+              </a:ext>
+            </a:extLst>
+          </p:cNvPr>
+          <p:cNvSpPr txBox="1"/>
+          <p:nvPr/>
+        </p:nvSpPr>
+        <p:spPr>
+          <a:xfrm>
+            <a:off x="540000" y="360000"/>
+            <a:ext cx="8064000" cy="900000"/>
+          </a:xfrm>
+          <a:prstGeom prst="rect">
+            <a:avLst/>
+          </a:prstGeom>
+          <a:noFill/>
+        </p:spPr>
+        <p:txBody>
+          <a:bodyPr/>
+          <a:lstStyle/>
+          <a:p>
+            <a:r>
+              <a:rPr lang="en-US" sz="3600" b="1" dirty="0" err="1">
+                <a:solidFill>
+                  <a:srgbClr val="FFFFFF"/>
+                </a:solidFill>
+                <a:latin typeface="Calibri"/>
+                <a:ea typeface="Calibri"/>
+              </a:rPr>
+              <a:t>Survoler</a:t>
+            </a:r>
+            <a:r>
+              <a:rPr lang="en-US" sz="3600" b="1" dirty="0">
+                <a:solidFill>
+                  <a:srgbClr val="FFFFFF"/>
+                </a:solidFill>
+                <a:latin typeface="Calibri"/>
+                <a:ea typeface="Calibri"/>
+              </a:rPr>
+              <a:t> Presentation</a:t>
+            </a:r>
+          </a:p>
+        </p:txBody>
+      </p:sp>
+      <p:graphicFrame>
+        <p:nvGraphicFramePr>
+          <p:cNvPr id="2" name="图示 1">
+            <a:extLst>
+              <a:ext uri="{FF2B5EF4-FFF2-40B4-BE49-F238E27FC236}">
+                <a16:creationId xmlns:a16="http://schemas.microsoft.com/office/drawing/2014/main" id="{9F476BD9-3F69-1A71-B71E-5D32F877D15E}"/>
+              </a:ext>
+            </a:extLst>
+          </p:cNvPr>
+          <p:cNvGraphicFramePr/>
+          <p:nvPr>
+            <p:extLst>
+              <p:ext uri="{D42A27DB-BD31-4B8C-83A1-F6EECF244321}">
+                <p14:modId xmlns:p14="http://schemas.microsoft.com/office/powerpoint/2010/main" val="904273768"/>
+              </p:ext>
+            </p:extLst>
+          </p:nvPr>
+        </p:nvGraphicFramePr>
+        <p:xfrm>
+          <a:off x="307943" y="1783499"/>
+          <a:ext cx="6096000" cy="4064000"/>
+        </p:xfrm>
+        <a:graphic>
+          <a:graphicData uri="http://schemas.openxmlformats.org/drawingml/2006/diagram">
+            <dgm:relIds xmlns:dgm="http://schemas.openxmlformats.org/drawingml/2006/diagram" xmlns:r="http://schemas.openxmlformats.org/officeDocument/2006/relationships" r:dm="rId3" r:lo="rId4" r:qs="rId5" r:cs="rId6"/>
+          </a:graphicData>
+        </a:graphic>
+      </p:graphicFrame>
+      <p:sp>
+        <p:nvSpPr>
+          <p:cNvPr id="3" name="笑脸 2">
+            <a:extLst>
+              <a:ext uri="{FF2B5EF4-FFF2-40B4-BE49-F238E27FC236}">
+                <a16:creationId xmlns:a16="http://schemas.microsoft.com/office/drawing/2014/main" id="{087005E2-C38F-1A8A-A863-FC18CC2CEEE5}"/>
+              </a:ext>
+            </a:extLst>
+          </p:cNvPr>
+          <p:cNvSpPr/>
+          <p:nvPr/>
+        </p:nvSpPr>
+        <p:spPr>
+          <a:xfrm>
+            <a:off x="6711885" y="2526384"/>
+            <a:ext cx="1772239" cy="1791092"/>
+          </a:xfrm>
+          <a:prstGeom prst="smileyFace">
+            <a:avLst/>
+          </a:prstGeom>
+        </p:spPr>
+        <p:style>
+          <a:lnRef idx="2">
+            <a:schemeClr val="accent1">
+              <a:shade val="15000"/>
+            </a:schemeClr>
+          </a:lnRef>
+          <a:fillRef idx="1">
+            <a:schemeClr val="accent1"/>
+          </a:fillRef>
+          <a:effectRef idx="0">
+            <a:schemeClr val="accent1"/>
+          </a:effectRef>
+          <a:fontRef idx="minor">
+            <a:schemeClr val="lt1"/>
+          </a:fontRef>
+        </p:style>
+        <p:txBody>
+          <a:bodyPr rtlCol="0" anchor="ctr"/>
+          <a:lstStyle/>
+          <a:p>
+            <a:pPr algn="ctr"/>
+            <a:endParaRPr lang="zh-CN" altLang="en-US"/>
+          </a:p>
+        </p:txBody>
+      </p:sp>
+    </p:spTree>
+    <p:extLst>
+      <p:ext uri="{BB962C8B-B14F-4D97-AF65-F5344CB8AC3E}">
+        <p14:creationId xmlns:p14="http://schemas.microsoft.com/office/powerpoint/2010/main" val="1379023785"/>
+      </p:ext>
+    </p:extLst>
+  </p:cSld>
+  <p:clrMapOvr>
+    <a:masterClrMapping/>
+  </p:clrMapOvr>
 </p:sld>
 </file>
 
@@ -418,12 +5624,12 @@
     <a:fontScheme name="Office">
       <a:majorFont>
         <a:latin typeface="Calibri Light"/>
-        <a:ea typeface=""/>
+        <a:ea typeface="等线"/>
         <a:cs typeface=""/>
       </a:majorFont>
       <a:minorFont>
         <a:latin typeface="Calibri"/>
-        <a:ea typeface=""/>
+        <a:ea typeface="等线"/>
         <a:cs typeface=""/>
       </a:minorFont>
     </a:fontScheme>
@@ -480,5 +5686,118 @@
       </a:bgFillStyleLst>
     </a:fmtScheme>
   </a:themeElements>
+  <a:objectDefaults/>
+  <a:extraClrSchemeLst/>
+</a:theme>
+</file>
+
+<file path=ppt/theme/theme2.xml><?xml version="1.0" encoding="utf-8"?>
+<a:theme xmlns:a="http://schemas.openxmlformats.org/drawingml/2006/main" name="Office Theme">
+  <a:themeElements>
+    <a:clrScheme name="Office">
+      <a:dk1>
+        <a:sysClr val="windowText" lastClr="000000"/>
+      </a:dk1>
+      <a:lt1>
+        <a:sysClr val="window" lastClr="FFFFFF"/>
+      </a:lt1>
+      <a:dk2>
+        <a:srgbClr val="44546A"/>
+      </a:dk2>
+      <a:lt2>
+        <a:srgbClr val="E7E6E6"/>
+      </a:lt2>
+      <a:accent1>
+        <a:srgbClr val="4472C4"/>
+      </a:accent1>
+      <a:accent2>
+        <a:srgbClr val="ED7D31"/>
+      </a:accent2>
+      <a:accent3>
+        <a:srgbClr val="A5A5A5"/>
+      </a:accent3>
+      <a:accent4>
+        <a:srgbClr val="FFC000"/>
+      </a:accent4>
+      <a:accent5>
+        <a:srgbClr val="5B9BD5"/>
+      </a:accent5>
+      <a:accent6>
+        <a:srgbClr val="70AD47"/>
+      </a:accent6>
+      <a:hlink>
+        <a:srgbClr val="0563C1"/>
+      </a:hlink>
+      <a:folHlink>
+        <a:srgbClr val="954F72"/>
+      </a:folHlink>
+    </a:clrScheme>
+    <a:fontScheme name="Office">
+      <a:majorFont>
+        <a:latin typeface="Calibri Light"/>
+        <a:ea typeface="等线"/>
+        <a:cs typeface=""/>
+      </a:majorFont>
+      <a:minorFont>
+        <a:latin typeface="Calibri"/>
+        <a:ea typeface="等线"/>
+        <a:cs typeface=""/>
+      </a:minorFont>
+    </a:fontScheme>
+    <a:fmtScheme name="Office">
+      <a:fillStyleLst>
+        <a:solidFill>
+          <a:schemeClr val="phClr"/>
+        </a:solidFill>
+        <a:solidFill>
+          <a:schemeClr val="phClr"/>
+        </a:solidFill>
+        <a:solidFill>
+          <a:schemeClr val="phClr"/>
+        </a:solidFill>
+      </a:fillStyleLst>
+      <a:lnStyleLst>
+        <a:ln w="6350" cap="flat">
+          <a:solidFill>
+            <a:schemeClr val="phClr"/>
+          </a:solidFill>
+        </a:ln>
+        <a:ln w="12700" cap="flat">
+          <a:solidFill>
+            <a:schemeClr val="phClr"/>
+          </a:solidFill>
+        </a:ln>
+        <a:ln w="19050" cap="flat">
+          <a:solidFill>
+            <a:schemeClr val="phClr"/>
+          </a:solidFill>
+        </a:ln>
+      </a:lnStyleLst>
+      <a:effectStyleLst>
+        <a:effectStyle>
+          <a:effectLst/>
+        </a:effectStyle>
+        <a:effectStyle>
+          <a:effectLst/>
+        </a:effectStyle>
+        <a:effectStyle>
+          <a:effectLst/>
+        </a:effectStyle>
+      </a:effectStyleLst>
+      <a:bgFillStyleLst>
+        <a:solidFill>
+          <a:schemeClr val="phClr"/>
+        </a:solidFill>
+        <a:solidFill>
+          <a:schemeClr val="phClr"/>
+        </a:solidFill>
+        <a:solidFill>
+          <a:schemeClr val="phClr"/>
+        </a:solidFill>
+      </a:bgFillStyleLst>
+    </a:fmtScheme>
+  </a:themeElements>
+  <a:objectDefaults/>
+  <a:extraClrSchemeLst/>
 </a:theme>
 </file>
--- a/Survoler.Tests/TestData/sample.pptx
+++ b/Survoler.Tests/TestData/sample.pptx
@@ -108,6 +108,11 @@
       </a:defRPr>
     </a:lvl9pPr>
   </p:defaultTextStyle>
+  <p:extLst>
+    <p:ext uri="{EFAFB233-063F-42B5-8137-9DF3F51BA10A}">
+      <p15:sldGuideLst xmlns:p15="http://schemas.microsoft.com/office/powerpoint/2012/main"/>
+    </p:ext>
+  </p:extLst>
 </p:presentation>
 </file>
 
@@ -1288,7 +1293,15 @@
     </dgm:pt>
     <dgm:pt modelId="{EE19D97F-5DA6-44A1-A459-27A1CD60B914}" type="pres">
       <dgm:prSet presAssocID="{A60FE6FE-471B-429F-A808-29225B208470}" presName="photoCircle" presStyleLbl="ltNode1NoLn" presStyleIdx="0" presStyleCnt="4"/>
-      <dgm:spPr/>
+      <dgm:spPr>
+        <a:blipFill>
+          <a:blip xmlns:r="http://schemas.openxmlformats.org/officeDocument/2006/relationships" r:embed="rId1"/>
+          <a:srcRect/>
+          <a:stretch>
+            <a:fillRect l="-35000" r="-35000"/>
+          </a:stretch>
+        </a:blipFill>
+      </dgm:spPr>
     </dgm:pt>
     <dgm:pt modelId="{59ED88E6-33CA-4468-B7F9-4586C2AF6202}" type="pres">
       <dgm:prSet presAssocID="{70BFA0F0-E95C-4DEC-8FC4-DDB29D78BA7F}" presName="sibTrans" presStyleCnt="0"/>
@@ -1321,7 +1334,15 @@
     </dgm:pt>
     <dgm:pt modelId="{6C2E8EDF-30E0-43D2-A1E5-3EC22C4CCD81}" type="pres">
       <dgm:prSet presAssocID="{64543702-2944-46D6-A1C0-17F1149962E0}" presName="photoCircle" presStyleLbl="ltNode1NoLn" presStyleIdx="1" presStyleCnt="4"/>
-      <dgm:spPr/>
+      <dgm:spPr>
+        <a:blipFill>
+          <a:blip xmlns:r="http://schemas.openxmlformats.org/officeDocument/2006/relationships" r:embed="rId2"/>
+          <a:srcRect/>
+          <a:stretch>
+            <a:fillRect l="-25000" r="-25000"/>
+          </a:stretch>
+        </a:blipFill>
+      </dgm:spPr>
     </dgm:pt>
     <dgm:pt modelId="{5DE5CCAD-FF59-495E-8C0C-FD19E15F8FA4}" type="pres">
       <dgm:prSet presAssocID="{E0899D51-9EC5-41E9-9760-19F9F331D861}" presName="sibTrans" presStyleCnt="0"/>
@@ -1354,7 +1375,15 @@
     </dgm:pt>
     <dgm:pt modelId="{2B678B5E-9C5A-4F3C-A4B5-A12DD3464D62}" type="pres">
       <dgm:prSet presAssocID="{CAA61C63-F29E-4AB8-8490-DC21A46AEDD1}" presName="photoCircle" presStyleLbl="ltNode1NoLn" presStyleIdx="2" presStyleCnt="4"/>
-      <dgm:spPr/>
+      <dgm:spPr>
+        <a:blipFill>
+          <a:blip xmlns:r="http://schemas.openxmlformats.org/officeDocument/2006/relationships" r:embed="rId3"/>
+          <a:srcRect/>
+          <a:stretch>
+            <a:fillRect t="-25000" b="-25000"/>
+          </a:stretch>
+        </a:blipFill>
+      </dgm:spPr>
     </dgm:pt>
     <dgm:pt modelId="{F7A14308-2391-4A68-8803-BD9AF1274E24}" type="pres">
       <dgm:prSet presAssocID="{28EAC434-C342-41A5-9DF1-8766E15C3101}" presName="sibTrans" presStyleCnt="0"/>
@@ -1387,7 +1416,15 @@
     </dgm:pt>
     <dgm:pt modelId="{D3293C81-DDA6-41DD-94D9-8642CE9ED5F9}" type="pres">
       <dgm:prSet presAssocID="{5AD9A9D0-ADB6-455E-9A0A-FD7AE4DC63E2}" presName="photoCircle" presStyleLbl="ltNode1NoLn" presStyleIdx="3" presStyleCnt="4"/>
-      <dgm:spPr/>
+      <dgm:spPr>
+        <a:blipFill>
+          <a:blip xmlns:r="http://schemas.openxmlformats.org/officeDocument/2006/relationships" r:embed="rId4"/>
+          <a:srcRect/>
+          <a:stretch>
+            <a:fillRect t="-25000" b="-25000"/>
+          </a:stretch>
+        </a:blipFill>
+      </dgm:spPr>
     </dgm:pt>
   </dgm:ptLst>
   <dgm:cxnLst>
@@ -1642,15 +1679,13 @@
         <a:prstGeom prst="ellipse">
           <a:avLst/>
         </a:prstGeom>
-        <a:solidFill>
-          <a:schemeClr val="accent1">
-            <a:tint val="75000"/>
-            <a:hueOff val="0"/>
-            <a:satOff val="0"/>
-            <a:lumOff val="0"/>
-            <a:alphaOff val="0"/>
-          </a:schemeClr>
-        </a:solidFill>
+        <a:blipFill>
+          <a:blip xmlns:r="http://schemas.openxmlformats.org/officeDocument/2006/relationships" r:embed="rId1"/>
+          <a:srcRect/>
+          <a:stretch>
+            <a:fillRect l="-35000" r="-35000"/>
+          </a:stretch>
+        </a:blipFill>
         <a:ln w="6350" cap="flat">
           <a:solidFill>
             <a:schemeClr val="lt1">
@@ -1880,15 +1915,13 @@
         <a:prstGeom prst="ellipse">
           <a:avLst/>
         </a:prstGeom>
-        <a:solidFill>
-          <a:schemeClr val="accent1">
-            <a:tint val="75000"/>
-            <a:hueOff val="0"/>
-            <a:satOff val="0"/>
-            <a:lumOff val="0"/>
-            <a:alphaOff val="0"/>
-          </a:schemeClr>
-        </a:solidFill>
+        <a:blipFill>
+          <a:blip xmlns:r="http://schemas.openxmlformats.org/officeDocument/2006/relationships" r:embed="rId2"/>
+          <a:srcRect/>
+          <a:stretch>
+            <a:fillRect l="-25000" r="-25000"/>
+          </a:stretch>
+        </a:blipFill>
         <a:ln w="6350" cap="flat">
           <a:solidFill>
             <a:schemeClr val="lt1">
@@ -2118,15 +2151,13 @@
         <a:prstGeom prst="ellipse">
           <a:avLst/>
         </a:prstGeom>
-        <a:solidFill>
-          <a:schemeClr val="accent1">
-            <a:tint val="75000"/>
-            <a:hueOff val="0"/>
-            <a:satOff val="0"/>
-            <a:lumOff val="0"/>
-            <a:alphaOff val="0"/>
-          </a:schemeClr>
-        </a:solidFill>
+        <a:blipFill>
+          <a:blip xmlns:r="http://schemas.openxmlformats.org/officeDocument/2006/relationships" r:embed="rId3"/>
+          <a:srcRect/>
+          <a:stretch>
+            <a:fillRect t="-25000" b="-25000"/>
+          </a:stretch>
+        </a:blipFill>
         <a:ln w="6350" cap="flat">
           <a:solidFill>
             <a:schemeClr val="lt1">
@@ -2356,15 +2387,13 @@
         <a:prstGeom prst="ellipse">
           <a:avLst/>
         </a:prstGeom>
-        <a:solidFill>
-          <a:schemeClr val="accent1">
-            <a:tint val="75000"/>
-            <a:hueOff val="0"/>
-            <a:satOff val="0"/>
-            <a:lumOff val="0"/>
-            <a:alphaOff val="0"/>
-          </a:schemeClr>
-        </a:solidFill>
+        <a:blipFill>
+          <a:blip xmlns:r="http://schemas.openxmlformats.org/officeDocument/2006/relationships" r:embed="rId4"/>
+          <a:srcRect/>
+          <a:stretch>
+            <a:fillRect t="-25000" b="-25000"/>
+          </a:stretch>
+        </a:blipFill>
         <a:ln w="6350" cap="flat">
           <a:solidFill>
             <a:schemeClr val="lt1">
@@ -5506,7 +5535,7 @@
           <p:nvPr>
             <p:extLst>
               <p:ext uri="{D42A27DB-BD31-4B8C-83A1-F6EECF244321}">
-                <p14:modId xmlns:p14="http://schemas.microsoft.com/office/powerpoint/2010/main" val="904273768"/>
+                <p14:modId xmlns:p14="http://schemas.microsoft.com/office/powerpoint/2010/main" val="3210689518"/>
               </p:ext>
             </p:extLst>
           </p:nvPr>
